--- a/docs/entreprise/deck/Quantinvo-dossier-DSI-marque.pptx
+++ b/docs/entreprise/deck/Quantinvo-dossier-DSI-marque.pptx
@@ -2494,7 +2494,7 @@
                 <a:ea typeface="Inter" pitchFamily="34" charset="-122"/>
                 <a:cs typeface="Inter" pitchFamily="34" charset="-120"/>
               </a:rPr>
-              <a:t>En cas de violation, c'est vous qui notifiez la CNIL sous 72 heures ; nous vous prévenons sans délai et vous donnons les éléments.</a:t>
+              <a:t>En cas de violation, c'est vous qui notifiez la CNIL sous 72 heures ; nous vous prévenons sans délai et vous donnons les éléments.</a:t>
             </a:r>
             <a:endParaRPr lang="en-US" sz="1150" dirty="0"/>
           </a:p>
@@ -2588,7 +2588,7 @@
                 <a:ea typeface="Inter" pitchFamily="34" charset="-122"/>
                 <a:cs typeface="Inter" pitchFamily="34" charset="-120"/>
               </a:rPr>
-              <a:t>Les droits sont outillés : chaque personne télécharge ses données depuis son compte ; la suppression d'un compte conserve les comptages mais les détache du nom.</a:t>
+              <a:t>Les droits sont outillés : chaque personne télécharge ses données depuis son compte ; la suppression d'un compte conserve les comptages mais les détache du nom.</a:t>
             </a:r>
             <a:endParaRPr lang="en-US" sz="1150" dirty="0"/>
           </a:p>
@@ -2612,7 +2612,7 @@
                 <a:ea typeface="Inter" pitchFamily="34" charset="-122"/>
                 <a:cs typeface="Inter" pitchFamily="34" charset="-120"/>
               </a:rPr>
-              <a:t>Durées : comptes tant qu'ils sont actifs, journaux un an, demandes et invitations purgées. Le suivi en direct n'est jamais enregistré.</a:t>
+              <a:t>Durées : comptes tant qu'ils sont actifs, journaux un an, demandes et invitations purgées. Le suivi en direct n'est jamais enregistré.</a:t>
             </a:r>
             <a:endParaRPr lang="en-US" sz="1150" dirty="0"/>
           </a:p>
@@ -3106,7 +3106,7 @@
                 <a:ea typeface="Inter" pitchFamily="34" charset="-122"/>
                 <a:cs typeface="Inter" pitchFamily="34" charset="-120"/>
               </a:rPr>
-              <a:t>Les comptes sont locaux, créés par invitation. Techniquement possible ; pas planifié tant qu'un client ne le demande pas.</a:t>
+              <a:t>Les comptes sont locaux, créés par invitation. Techniquement possible ; pas planifié tant qu'un client ne le demande pas.</a:t>
             </a:r>
             <a:endParaRPr lang="en-US" sz="1200" dirty="0"/>
           </a:p>
@@ -3192,7 +3192,7 @@
                 <a:ea typeface="Inter" pitchFamily="34" charset="-122"/>
                 <a:cs typeface="Inter" pitchFamily="34" charset="-120"/>
               </a:rPr>
-              <a:t>Le build est en cours. Les identifiants sont réservés ; la fiche MDM le signale.</a:t>
+              <a:t>Le build est en cours. Les identifiants sont réservés ; la fiche MDM le signale.</a:t>
             </a:r>
             <a:endParaRPr lang="en-US" sz="1200" dirty="0"/>
           </a:p>
@@ -3235,7 +3235,7 @@
                 <a:ea typeface="Inter" pitchFamily="34" charset="-122"/>
                 <a:cs typeface="Inter" pitchFamily="34" charset="-120"/>
               </a:rPr>
-              <a:t>L'échange se fait par fichiers : import CSV ou Excel, export Excel. Un connecteur viendra avec le premier client qui en a besoin, pas avant.</a:t>
+              <a:t>L'échange se fait par fichiers : import CSV ou Excel, export Excel. Un connecteur viendra avec le premier client qui en a besoin, pas avant.</a:t>
             </a:r>
             <a:endParaRPr lang="en-US" sz="1200" dirty="0"/>
           </a:p>
@@ -4440,7 +4440,7 @@
                 <a:ea typeface="Inter" pitchFamily="34" charset="-122"/>
                 <a:cs typeface="Inter" pitchFamily="34" charset="-120"/>
               </a:rPr>
-              <a:t>Scan par la caméra ; comptages gardés sur l’appareil hors réseau, renvoyés au retour.</a:t>
+              <a:t>Scan par la caméra ; comptages gardés sur l’appareil hors réseau, renvoyés au retour.</a:t>
             </a:r>
             <a:endParaRPr lang="en-US" sz="1050" dirty="0"/>
           </a:p>
@@ -6867,7 +6867,7 @@
                 <a:ea typeface="Inter" pitchFamily="34" charset="-122"/>
                 <a:cs typeface="Inter" pitchFamily="34" charset="-120"/>
               </a:rPr>
-              <a:t>Workspace ONE, Intune, SOTI, Ivanti, Jamf ou autre : il n'y a pas de version spéciale à demander, pas d'installation manuelle, pas de compte Apple ou Google personnel sur les appareils.</a:t>
+              <a:t>Workspace ONE, Intune, SOTI, Ivanti, Jamf ou autre : il n'y a pas de version spéciale à demander, pas d'installation manuelle, pas de compte Apple ou Google personnel sur les appareils.</a:t>
             </a:r>
             <a:endParaRPr lang="en-US" sz="1200" dirty="0"/>
           </a:p>
@@ -7664,7 +7664,7 @@
                 <a:ea typeface="Inter" pitchFamily="34" charset="-122"/>
                 <a:cs typeface="Inter" pitchFamily="34" charset="-120"/>
               </a:rPr>
-              <a:t>Depuis Apple Business Manager, « Apps et livres » : vous attribuez les licences, votre MDM distribue, l'installation est silencieuse. Si votre politique interdit les applications publiques, nous publions une application personnalisée réservée à votre organisation.</a:t>
+              <a:t>Depuis Apple Business Manager, « Apps et livres » : vous attribuez les licences, votre MDM distribue, l'installation est silencieuse. Si votre politique interdit les applications publiques, nous publions une application personnalisée réservée à votre organisation.</a:t>
             </a:r>
             <a:endParaRPr lang="en-US" sz="1150" dirty="0"/>
           </a:p>
@@ -7707,7 +7707,7 @@
                 <a:ea typeface="Inter" pitchFamily="34" charset="-122"/>
                 <a:cs typeface="Inter" pitchFamily="34" charset="-120"/>
               </a:rPr>
-              <a:t>Par Managed Google Play, ou en chargeant l'APK que nous vous remettons comme application interne. Zebra, Honeywell et Datalogic fonctionnent ; le mode « application unique » est compatible.</a:t>
+              <a:t>Par Managed Google Play, ou en chargeant l'APK que nous vous remettons comme application interne. Zebra, Honeywell et Datalogic fonctionnent ; le mode « application unique » est compatible.</a:t>
             </a:r>
             <a:endParaRPr lang="en-US" sz="1150" dirty="0"/>
           </a:p>
@@ -8028,7 +8028,7 @@
                 <a:ea typeface="Inter" pitchFamily="34" charset="-122"/>
                 <a:cs typeface="Inter" pitchFamily="34" charset="-120"/>
               </a:rPr>
-              <a:t>Sans les trois premiers, l'application s'installe et ne sert à rien. Personne ne vous le dira : le compteur verra juste un écran noir, ou un téléphone qui ne synchronise pas.</a:t>
+              <a:t>Sans les trois premiers, l'application s'installe et ne sert à rien. Personne ne vous le dira : le compteur verra juste un écran noir, ou un téléphone qui ne synchronise pas.</a:t>
             </a:r>
             <a:endParaRPr lang="en-US" sz="1200" dirty="0"/>
           </a:p>
@@ -8406,7 +8406,7 @@
                 <a:ea typeface="Inter" pitchFamily="34" charset="-122"/>
                 <a:cs typeface="Inter" pitchFamily="34" charset="-120"/>
               </a:rPr>
-              <a:t>L'application fonctionne hors ligne : en réserve, en chambre froide, les comptages attendent sur l'appareil et partent au retour du réseau. Un effacement ou une désinstallation pendant cette fenêtre perd ce travail. C'est propre à Quantinvo, et c'est le point qu'on oublie.</a:t>
+              <a:t>L'application fonctionne hors ligne : en réserve, en chambre froide, les comptages attendent sur l'appareil et partent au retour du réseau. Un effacement ou une désinstallation pendant cette fenêtre perd ce travail. C'est propre à Quantinvo, et c'est le point qu'on oublie.</a:t>
             </a:r>
             <a:endParaRPr lang="en-US" sz="1150" dirty="0"/>
           </a:p>
@@ -8532,7 +8532,7 @@
                 <a:ea typeface="Inter" pitchFamily="34" charset="-122"/>
                 <a:cs typeface="Inter" pitchFamily="34" charset="-120"/>
               </a:rPr>
-              <a:t>Elles servent à prévenir quelqu'un qu'il a été invité à un inventaire. Sans elles, tout fonctionne ; la personne ouvre simplement l'application pour voir.</a:t>
+              <a:t>Elles servent à prévenir quelqu'un qu'il a été invité à un inventaire. Sans elles, tout fonctionne ; la personne ouvre simplement l'application pour voir.</a:t>
             </a:r>
             <a:endParaRPr lang="en-US" sz="1150" dirty="0"/>
           </a:p>
@@ -9340,7 +9340,7 @@
                 <a:ea typeface="Inter" pitchFamily="34" charset="-122"/>
                 <a:cs typeface="Inter" pitchFamily="34" charset="-120"/>
               </a:rPr>
-              <a:t>Douze caractères minimum, majuscule, minuscule, chiffre, symbole ; refus des mots de passe présents dans les fuites connues. Changer le sien exige l'ancien.</a:t>
+              <a:t>Douze caractères minimum, majuscule, minuscule, chiffre, symbole ; refus des mots de passe présents dans les fuites connues. Changer le sien exige l'ancien.</a:t>
             </a:r>
             <a:endParaRPr lang="en-US" sz="1150" dirty="0"/>
           </a:p>
@@ -9937,7 +9937,7 @@
                 <a:ea typeface="Inter" pitchFamily="34" charset="-122"/>
                 <a:cs typeface="Inter" pitchFamily="34" charset="-120"/>
               </a:rPr>
-              <a:t>En-têtes de sécurité posés (politique de contenu, interdiction d'intégration dans un cadre, etc.). Aucun traceur, aucune mesure d'audience : il n'y a pas de bandeau cookies parce qu'il n'y a pas de cookies à déclarer.</a:t>
+              <a:t>En-têtes de sécurité posés (politique de contenu, interdiction d'intégration dans un cadre, etc.). Aucun traceur, aucune mesure d'audience : il n'y a pas de bandeau cookies parce qu'il n'y a pas de cookies à déclarer.</a:t>
             </a:r>
             <a:endParaRPr lang="en-US" sz="1250" dirty="0"/>
           </a:p>
@@ -10452,7 +10452,7 @@
                 <a:ea typeface="Inter" pitchFamily="34" charset="-122"/>
                 <a:cs typeface="Inter" pitchFamily="34" charset="-120"/>
               </a:rPr>
-              <a:t>Les scans sont enregistrés sur le téléphone et renvoyés automatiquement au retour du réseau, dans l'ordre. Le compteur voit ce qui attend et ce qui est parti. Une session expirée n'efface rien : la file attend la reconnexion.</a:t>
+              <a:t>Les scans sont enregistrés sur le téléphone et renvoyés automatiquement au retour du réseau, dans l'ordre. Le compteur voit ce qui attend et ce qui est parti. Une session expirée n'efface rien : la file attend la reconnexion.</a:t>
             </a:r>
             <a:endParaRPr lang="en-US" sz="1200" dirty="0"/>
           </a:p>
@@ -10495,7 +10495,7 @@
                 <a:ea typeface="Inter" pitchFamily="34" charset="-122"/>
                 <a:cs typeface="Inter" pitchFamily="34" charset="-120"/>
               </a:rPr>
-              <a:t>Chaque téléphone envoie un signal toutes les 5 à 30 secondes ; il n'écoute rien. Seul le tableau de bord écoute. Le coût du suivi croît avec le nombre de téléphones, pas avec son carré.</a:t>
+              <a:t>Chaque téléphone envoie un signal toutes les 5 à 30 secondes ; il n'écoute rien. Seul le tableau de bord écoute. Le coût du suivi croît avec le nombre de téléphones, pas avec son carré.</a:t>
             </a:r>
             <a:endParaRPr lang="en-US" sz="1200" dirty="0"/>
           </a:p>
@@ -10581,7 +10581,7 @@
                 <a:ea typeface="Inter" pitchFamily="34" charset="-122"/>
                 <a:cs typeface="Inter" pitchFamily="34" charset="-120"/>
               </a:rPr>
-              <a:t>Un référentiel de plusieurs dizaines de milliers de références s'importe par lots. Pour un réseau de plusieurs centaines de magasins comptant le même jour, nous montons la capacité de la base : c'est un réglage, pas un chantier.</a:t>
+              <a:t>Un référentiel de plusieurs dizaines de milliers de références s'importe par lots. Pour un réseau de plusieurs centaines de magasins comptant le même jour, nous montons la capacité de la base : c'est un réglage, pas un chantier.</a:t>
             </a:r>
             <a:endParaRPr lang="en-US" sz="1200" dirty="0"/>
           </a:p>

--- a/docs/entreprise/deck/Quantinvo-dossier-DSI-marque.pptx
+++ b/docs/entreprise/deck/Quantinvo-dossier-DSI-marque.pptx
@@ -606,7 +606,7 @@
           <a:p>
             <a:r>
               <a:rPr lang="en-US" dirty="0"/>
-              <a:t>Trois gestes, dix minutes de prise en main, aucun briefing matériel. C'est ce qui permet de faire compter des équipes de vente plutôt qu'un service spécialisé. Un guide illustré complet est remis après la signature.</a:t>
+              <a:t>Trois gestes, dix minutes de prise en main, aucun briefing matériel. C'est ce qui permet de faire compter des équipes de vente plutôt qu'un service spécialisé. Le guide illustré complet est remis après la signature — et depuis septembre 2026 il vit aussi dans le produit : le superviseur l'ouvre depuis sa boîte à outils, sur le site, et peut l'imprimer pour la réserve.</a:t>
             </a:r>
             <a:endParaRPr lang="en-US" dirty="0"/>
           </a:p>
@@ -3188,7 +3188,7 @@
                 <a:ea typeface="Inter" pitchFamily="34" charset="-122"/>
                 <a:cs typeface="Inter" pitchFamily="34" charset="-120"/>
               </a:rPr>
-              <a:t>Quantinvo · dossier technique · août 2026</a:t>
+              <a:t>Quantinvo · dossier technique · septembre 2026</a:t>
             </a:r>
             <a:endParaRPr lang="en-US" sz="900" dirty="0"/>
           </a:p>
@@ -4125,7 +4125,7 @@
                 <a:ea typeface="Inter" pitchFamily="34" charset="-122"/>
                 <a:cs typeface="Inter" pitchFamily="34" charset="-120"/>
               </a:rPr>
-              <a:t>Quantinvo · dossier technique · août 2026</a:t>
+              <a:t>Quantinvo · dossier technique · septembre 2026</a:t>
             </a:r>
             <a:endParaRPr lang="en-US" sz="900" dirty="0"/>
           </a:p>
@@ -4726,7 +4726,7 @@
                 <a:ea typeface="Inter" pitchFamily="34" charset="-122"/>
                 <a:cs typeface="Inter" pitchFamily="34" charset="-120"/>
               </a:rPr>
-              <a:t>Quantinvo · dossier technique · août 2026</a:t>
+              <a:t>Quantinvo · dossier technique · septembre 2026</a:t>
             </a:r>
             <a:endParaRPr lang="en-US" sz="900" dirty="0"/>
           </a:p>
@@ -5280,7 +5280,7 @@
                 <a:ea typeface="Inter" pitchFamily="34" charset="-122"/>
                 <a:cs typeface="Inter" pitchFamily="34" charset="-120"/>
               </a:rPr>
-              <a:t>Quantinvo · dossier technique · août 2026</a:t>
+              <a:t>Quantinvo · dossier technique · septembre 2026</a:t>
             </a:r>
             <a:endParaRPr lang="en-US" sz="900" dirty="0"/>
           </a:p>
@@ -5795,7 +5795,7 @@
                 <a:ea typeface="Inter" pitchFamily="34" charset="-122"/>
                 <a:cs typeface="Inter" pitchFamily="34" charset="-120"/>
               </a:rPr>
-              <a:t>Quantinvo · dossier technique · août 2026</a:t>
+              <a:t>Quantinvo · dossier technique · septembre 2026</a:t>
             </a:r>
             <a:endParaRPr lang="en-US" sz="900" dirty="0"/>
           </a:p>
@@ -6495,7 +6495,7 @@
                 <a:ea typeface="Inter" pitchFamily="34" charset="-122"/>
                 <a:cs typeface="Inter" pitchFamily="34" charset="-120"/>
               </a:rPr>
-              <a:t>Quantinvo · dossier technique · août 2026</a:t>
+              <a:t>Quantinvo · dossier technique · septembre 2026</a:t>
             </a:r>
             <a:endParaRPr lang="en-US" sz="900" dirty="0"/>
           </a:p>
@@ -7053,7 +7053,7 @@
                 <a:ea typeface="Inter" pitchFamily="34" charset="-122"/>
                 <a:cs typeface="Inter" pitchFamily="34" charset="-120"/>
               </a:rPr>
-              <a:t>Quantinvo · dossier technique · août 2026</a:t>
+              <a:t>Quantinvo · dossier technique · septembre 2026</a:t>
             </a:r>
             <a:endParaRPr lang="en-US" sz="900" dirty="0"/>
           </a:p>
@@ -7296,7 +7296,7 @@
                 <a:ea typeface="Inter" pitchFamily="34" charset="-122"/>
                 <a:cs typeface="Inter" pitchFamily="34" charset="-120"/>
               </a:rPr>
-              <a:t>La fiche de déploiement MDM pour l'équipe parc. La politique de confidentialité, les clauses article 28 et les synthèses d'audit pour votre DPO. Le guide de prise en main pour vos superviseurs. La note d'information aux salariés pour vos RH. Et un interlocuteur qui répond.</a:t>
+              <a:t>La fiche de déploiement MDM pour l'équipe parc. La politique de confidentialité, les clauses article 28 et les synthèses d'audit pour votre DPO. Le guide de prise en main pour vos superviseurs — remis en présentation, et consultable à tout moment depuis leur espace, où il s'imprime pour la réserve. La note d'information aux salariés pour vos RH. Et un interlocuteur qui répond.</a:t>
             </a:r>
             <a:endParaRPr lang="en-US" sz="1450" dirty="0"/>
           </a:p>
@@ -7808,7 +7808,7 @@
                 <a:ea typeface="Inter" pitchFamily="34" charset="-122"/>
                 <a:cs typeface="Inter" pitchFamily="34" charset="-120"/>
               </a:rPr>
-              <a:t>Quantinvo · dossier technique · août 2026</a:t>
+              <a:t>Quantinvo · dossier technique · septembre 2026</a:t>
             </a:r>
             <a:endParaRPr lang="en-US" sz="900" dirty="0"/>
           </a:p>
@@ -9007,7 +9007,7 @@
                 <a:ea typeface="Inter" pitchFamily="34" charset="-122"/>
                 <a:cs typeface="Inter" pitchFamily="34" charset="-120"/>
               </a:rPr>
-              <a:t>Quantinvo · dossier technique · août 2026</a:t>
+              <a:t>Quantinvo · dossier technique · septembre 2026</a:t>
             </a:r>
             <a:endParaRPr lang="en-US" sz="900" dirty="0"/>
           </a:p>
@@ -10470,7 +10470,7 @@
                 <a:ea typeface="Inter" pitchFamily="34" charset="-122"/>
                 <a:cs typeface="Inter" pitchFamily="34" charset="-120"/>
               </a:rPr>
-              <a:t>Quantinvo · dossier technique · août 2026</a:t>
+              <a:t>Quantinvo · dossier technique · septembre 2026</a:t>
             </a:r>
             <a:endParaRPr lang="en-US" sz="900" dirty="0"/>
           </a:p>
@@ -10997,7 +10997,7 @@
                 <a:ea typeface="Inter" pitchFamily="34" charset="-122"/>
                 <a:cs typeface="Inter" pitchFamily="34" charset="-120"/>
               </a:rPr>
-              <a:t>Quantinvo · dossier technique · août 2026</a:t>
+              <a:t>Quantinvo · dossier technique · septembre 2026</a:t>
             </a:r>
             <a:endParaRPr lang="en-US" sz="900" dirty="0"/>
           </a:p>
@@ -12158,7 +12158,7 @@
                 <a:ea typeface="Inter" pitchFamily="34" charset="-122"/>
                 <a:cs typeface="Inter" pitchFamily="34" charset="-120"/>
               </a:rPr>
-              <a:t>Quantinvo · dossier technique · août 2026</a:t>
+              <a:t>Quantinvo · dossier technique · septembre 2026</a:t>
             </a:r>
             <a:endParaRPr lang="en-US" sz="900" dirty="0"/>
           </a:p>
@@ -12983,7 +12983,7 @@
                 <a:ea typeface="Inter" pitchFamily="34" charset="-122"/>
                 <a:cs typeface="Inter" pitchFamily="34" charset="-120"/>
               </a:rPr>
-              <a:t>Quantinvo · dossier technique · août 2026</a:t>
+              <a:t>Quantinvo · dossier technique · septembre 2026</a:t>
             </a:r>
             <a:endParaRPr lang="en-US" sz="900" dirty="0"/>
           </a:p>
@@ -13897,7 +13897,7 @@
                 <a:ea typeface="Inter" pitchFamily="34" charset="-122"/>
                 <a:cs typeface="Inter" pitchFamily="34" charset="-120"/>
               </a:rPr>
-              <a:t>Quantinvo · dossier technique · août 2026</a:t>
+              <a:t>Quantinvo · dossier technique · septembre 2026</a:t>
             </a:r>
             <a:endParaRPr lang="en-US" sz="900" dirty="0"/>
           </a:p>
@@ -14417,7 +14417,7 @@
                 <a:ea typeface="Inter" pitchFamily="34" charset="-122"/>
                 <a:cs typeface="Inter" pitchFamily="34" charset="-120"/>
               </a:rPr>
-              <a:t>Quantinvo · dossier technique · août 2026</a:t>
+              <a:t>Quantinvo · dossier technique · septembre 2026</a:t>
             </a:r>
             <a:endParaRPr lang="en-US" sz="900" dirty="0"/>
           </a:p>

--- a/docs/entreprise/deck/Quantinvo-dossier-DSI-marque.pptx
+++ b/docs/entreprise/deck/Quantinvo-dossier-DSI-marque.pptx
@@ -2350,11 +2350,11 @@
             <a:r>
               <a:rPr lang="en-US" sz="2400" b="1" dirty="0">
                 <a:solidFill>
-                  <a:srgbClr val="0B0F19"/>
-                </a:solidFill>
-                <a:latin typeface="Sora" pitchFamily="34" charset="0"/>
-                <a:ea typeface="Sora" pitchFamily="34" charset="-122"/>
-                <a:cs typeface="Sora" pitchFamily="34" charset="-120"/>
+                  <a:srgbClr val="14181A"/>
+                </a:solidFill>
+                <a:latin typeface="Archivo" pitchFamily="34" charset="0"/>
+                <a:ea typeface="Archivo" pitchFamily="34" charset="-122"/>
+                <a:cs typeface="Archivo" pitchFamily="34" charset="-120"/>
               </a:rPr>
               <a:t>Quantinvo</a:t>
             </a:r>
@@ -2371,17 +2371,17 @@
         <p:spPr>
           <a:xfrm>
             <a:off x="731520" y="1481328"/>
-            <a:ext cx="2377440" cy="25603"/>
+            <a:ext cx="2011680" cy="20117"/>
           </a:xfrm>
           <a:prstGeom prst="rect">
             <a:avLst/>
           </a:prstGeom>
           <a:solidFill>
-            <a:srgbClr val="38C9FF"/>
+            <a:srgbClr val="14181A"/>
           </a:solidFill>
           <a:ln w="12700">
             <a:solidFill>
-              <a:srgbClr val="38C9FF"/>
+              <a:srgbClr val="14181A"/>
             </a:solidFill>
             <a:prstDash val="solid"/>
           </a:ln>
@@ -2414,11 +2414,11 @@
             <a:r>
               <a:rPr lang="en-US" sz="1300" dirty="0">
                 <a:solidFill>
-                  <a:srgbClr val="5B6475"/>
-                </a:solidFill>
-                <a:latin typeface="Inter" pitchFamily="34" charset="0"/>
-                <a:ea typeface="Inter" pitchFamily="34" charset="-122"/>
-                <a:cs typeface="Inter" pitchFamily="34" charset="-120"/>
+                  <a:srgbClr val="575F5C"/>
+                </a:solidFill>
+                <a:latin typeface="Public Sans" pitchFamily="34" charset="0"/>
+                <a:ea typeface="Public Sans" pitchFamily="34" charset="-122"/>
+                <a:cs typeface="Public Sans" pitchFamily="34" charset="-120"/>
               </a:rPr>
               <a:t>Dossier technique, pour la direction informatique</a:t>
             </a:r>
@@ -2456,11 +2456,11 @@
             <a:r>
               <a:rPr lang="en-US" sz="4000" b="1" dirty="0">
                 <a:solidFill>
-                  <a:srgbClr val="4636B0"/>
-                </a:solidFill>
-                <a:latin typeface="Sora" pitchFamily="34" charset="0"/>
-                <a:ea typeface="Sora" pitchFamily="34" charset="-122"/>
-                <a:cs typeface="Sora" pitchFamily="34" charset="-120"/>
+                  <a:srgbClr val="14181A"/>
+                </a:solidFill>
+                <a:latin typeface="Archivo" pitchFamily="34" charset="0"/>
+                <a:ea typeface="Archivo" pitchFamily="34" charset="-122"/>
+                <a:cs typeface="Archivo" pitchFamily="34" charset="-120"/>
               </a:rPr>
               <a:t>Ce qu’il faut savoir avant de déployer Quantinvo.</a:t>
             </a:r>
@@ -2498,11 +2498,11 @@
             <a:r>
               <a:rPr lang="en-US" sz="1500" dirty="0">
                 <a:solidFill>
-                  <a:srgbClr val="3D4556"/>
-                </a:solidFill>
-                <a:latin typeface="Inter" pitchFamily="34" charset="0"/>
-                <a:ea typeface="Inter" pitchFamily="34" charset="-122"/>
-                <a:cs typeface="Inter" pitchFamily="34" charset="-120"/>
+                  <a:srgbClr val="3A423F"/>
+                </a:solidFill>
+                <a:latin typeface="Public Sans" pitchFamily="34" charset="0"/>
+                <a:ea typeface="Public Sans" pitchFamily="34" charset="-122"/>
+                <a:cs typeface="Public Sans" pitchFamily="34" charset="-120"/>
               </a:rPr>
               <a:t>Architecture, hébergement, distribution de l'application, mise en place, prise en main, comptes, sécurité, protection des données. Et ce qui n'existe pas encore, dit tel quel.</a:t>
             </a:r>
@@ -2537,11 +2537,11 @@
             <a:r>
               <a:rPr lang="en-US" sz="1050" dirty="0">
                 <a:solidFill>
-                  <a:srgbClr val="5B6475"/>
-                </a:solidFill>
-                <a:latin typeface="Inter" pitchFamily="34" charset="0"/>
-                <a:ea typeface="Inter" pitchFamily="34" charset="-122"/>
-                <a:cs typeface="Inter" pitchFamily="34" charset="-120"/>
+                  <a:srgbClr val="575F5C"/>
+                </a:solidFill>
+                <a:latin typeface="Public Sans" pitchFamily="34" charset="0"/>
+                <a:ea typeface="Public Sans" pitchFamily="34" charset="-122"/>
+                <a:cs typeface="Public Sans" pitchFamily="34" charset="-120"/>
               </a:rPr>
               <a:t>Devkaylab  ·  état au 30 août 2026  ·  www.quantinvo.com</a:t>
             </a:r>
@@ -2632,11 +2632,11 @@
             <a:r>
               <a:rPr lang="en-US" sz="1600" b="1" dirty="0">
                 <a:solidFill>
-                  <a:srgbClr val="0B0F19"/>
-                </a:solidFill>
-                <a:latin typeface="Sora" pitchFamily="34" charset="0"/>
-                <a:ea typeface="Sora" pitchFamily="34" charset="-122"/>
-                <a:cs typeface="Sora" pitchFamily="34" charset="-120"/>
+                  <a:srgbClr val="14181A"/>
+                </a:solidFill>
+                <a:latin typeface="Archivo" pitchFamily="34" charset="0"/>
+                <a:ea typeface="Archivo" pitchFamily="34" charset="-122"/>
+                <a:cs typeface="Archivo" pitchFamily="34" charset="-120"/>
               </a:rPr>
               <a:t>Quantinvo</a:t>
             </a:r>
@@ -2671,11 +2671,11 @@
             <a:r>
               <a:rPr lang="en-US" sz="1000" dirty="0">
                 <a:solidFill>
-                  <a:srgbClr val="5B6475"/>
-                </a:solidFill>
-                <a:latin typeface="Inter" pitchFamily="34" charset="0"/>
-                <a:ea typeface="Inter" pitchFamily="34" charset="-122"/>
-                <a:cs typeface="Inter" pitchFamily="34" charset="-120"/>
+                  <a:srgbClr val="575F5C"/>
+                </a:solidFill>
+                <a:latin typeface="Public Sans" pitchFamily="34" charset="0"/>
+                <a:ea typeface="Public Sans" pitchFamily="34" charset="-122"/>
+                <a:cs typeface="Public Sans" pitchFamily="34" charset="-120"/>
               </a:rPr>
               <a:t>La prise en main</a:t>
             </a:r>
@@ -2692,17 +2692,17 @@
         <p:spPr>
           <a:xfrm>
             <a:off x="731520" y="877824"/>
-            <a:ext cx="10725912" cy="25603"/>
+            <a:ext cx="10725912" cy="10973"/>
           </a:xfrm>
           <a:prstGeom prst="rect">
             <a:avLst/>
           </a:prstGeom>
           <a:solidFill>
-            <a:srgbClr val="38C9FF"/>
+            <a:srgbClr val="E2E5E1"/>
           </a:solidFill>
           <a:ln w="12700">
             <a:solidFill>
-              <a:srgbClr val="38C9FF"/>
+              <a:srgbClr val="E2E5E1"/>
             </a:solidFill>
             <a:prstDash val="solid"/>
           </a:ln>
@@ -2738,11 +2738,11 @@
             <a:r>
               <a:rPr lang="en-US" sz="2500" b="1" dirty="0">
                 <a:solidFill>
-                  <a:srgbClr val="4636B0"/>
-                </a:solidFill>
-                <a:latin typeface="Sora" pitchFamily="34" charset="0"/>
-                <a:ea typeface="Sora" pitchFamily="34" charset="-122"/>
-                <a:cs typeface="Sora" pitchFamily="34" charset="-120"/>
+                  <a:srgbClr val="14181A"/>
+                </a:solidFill>
+                <a:latin typeface="Archivo" pitchFamily="34" charset="0"/>
+                <a:ea typeface="Archivo" pitchFamily="34" charset="-122"/>
+                <a:cs typeface="Archivo" pitchFamily="34" charset="-120"/>
               </a:rPr>
               <a:t>Ce que la personne qui compte a à apprendre</a:t>
             </a:r>
@@ -2780,11 +2780,11 @@
             <a:r>
               <a:rPr lang="en-US" sz="1350" b="1" dirty="0">
                 <a:solidFill>
-                  <a:srgbClr val="4636B0"/>
-                </a:solidFill>
-                <a:latin typeface="Sora" pitchFamily="34" charset="0"/>
-                <a:ea typeface="Sora" pitchFamily="34" charset="-122"/>
-                <a:cs typeface="Sora" pitchFamily="34" charset="-120"/>
+                  <a:srgbClr val="14181A"/>
+                </a:solidFill>
+                <a:latin typeface="Archivo" pitchFamily="34" charset="0"/>
+                <a:ea typeface="Archivo" pitchFamily="34" charset="-122"/>
+                <a:cs typeface="Archivo" pitchFamily="34" charset="-120"/>
               </a:rPr>
               <a:t>1 — Rejoindre l’inventaire</a:t>
             </a:r>
@@ -2822,11 +2822,11 @@
             <a:r>
               <a:rPr lang="en-US" sz="1100" dirty="0">
                 <a:solidFill>
-                  <a:srgbClr val="3D4556"/>
-                </a:solidFill>
-                <a:latin typeface="Inter" pitchFamily="34" charset="0"/>
-                <a:ea typeface="Inter" pitchFamily="34" charset="-122"/>
-                <a:cs typeface="Inter" pitchFamily="34" charset="-120"/>
+                  <a:srgbClr val="3A423F"/>
+                </a:solidFill>
+                <a:latin typeface="Public Sans" pitchFamily="34" charset="0"/>
+                <a:ea typeface="Public Sans" pitchFamily="34" charset="-122"/>
+                <a:cs typeface="Public Sans" pitchFamily="34" charset="-120"/>
               </a:rPr>
               <a:t>Elle ouvre l'application, choisit l'inventaire du jour, et se met en comptage ou en audit.</a:t>
             </a:r>
@@ -2847,15 +2847,15 @@
           </a:xfrm>
           <a:prstGeom prst="roundRect">
             <a:avLst>
-              <a:gd name="adj" fmla="val 3857"/>
+              <a:gd name="adj" fmla="val 1102"/>
             </a:avLst>
           </a:prstGeom>
           <a:solidFill>
-            <a:srgbClr val="F4F5F9"/>
+            <a:srgbClr val="F2F3F1"/>
           </a:solidFill>
           <a:ln w="12700">
             <a:solidFill>
-              <a:srgbClr val="F4F5F9"/>
+              <a:srgbClr val="F2F3F1"/>
             </a:solidFill>
             <a:prstDash val="solid"/>
           </a:ln>
@@ -2915,11 +2915,11 @@
             <a:r>
               <a:rPr lang="en-US" sz="1350" b="1" dirty="0">
                 <a:solidFill>
-                  <a:srgbClr val="4636B0"/>
-                </a:solidFill>
-                <a:latin typeface="Sora" pitchFamily="34" charset="0"/>
-                <a:ea typeface="Sora" pitchFamily="34" charset="-122"/>
-                <a:cs typeface="Sora" pitchFamily="34" charset="-120"/>
+                  <a:srgbClr val="14181A"/>
+                </a:solidFill>
+                <a:latin typeface="Archivo" pitchFamily="34" charset="0"/>
+                <a:ea typeface="Archivo" pitchFamily="34" charset="-122"/>
+                <a:cs typeface="Archivo" pitchFamily="34" charset="-120"/>
               </a:rPr>
               <a:t>2 — Scanner la balise du rayon</a:t>
             </a:r>
@@ -2957,11 +2957,11 @@
             <a:r>
               <a:rPr lang="en-US" sz="1100" dirty="0">
                 <a:solidFill>
-                  <a:srgbClr val="3D4556"/>
-                </a:solidFill>
-                <a:latin typeface="Inter" pitchFamily="34" charset="0"/>
-                <a:ea typeface="Inter" pitchFamily="34" charset="-122"/>
-                <a:cs typeface="Inter" pitchFamily="34" charset="-120"/>
+                  <a:srgbClr val="3A423F"/>
+                </a:solidFill>
+                <a:latin typeface="Public Sans" pitchFamily="34" charset="0"/>
+                <a:ea typeface="Public Sans" pitchFamily="34" charset="-122"/>
+                <a:cs typeface="Public Sans" pitchFamily="34" charset="-120"/>
               </a:rPr>
               <a:t>L'étiquette numérotée ouvre la zone. Tout ce qui suit s'y rattache.</a:t>
             </a:r>
@@ -2982,15 +2982,15 @@
           </a:xfrm>
           <a:prstGeom prst="roundRect">
             <a:avLst>
-              <a:gd name="adj" fmla="val 3857"/>
+              <a:gd name="adj" fmla="val 1102"/>
             </a:avLst>
           </a:prstGeom>
           <a:solidFill>
-            <a:srgbClr val="EEEEFC"/>
+            <a:srgbClr val="E7EDE9"/>
           </a:solidFill>
           <a:ln w="12700">
             <a:solidFill>
-              <a:srgbClr val="EEEEFC"/>
+              <a:srgbClr val="E7EDE9"/>
             </a:solidFill>
             <a:prstDash val="solid"/>
           </a:ln>
@@ -3050,11 +3050,11 @@
             <a:r>
               <a:rPr lang="en-US" sz="1350" b="1" dirty="0">
                 <a:solidFill>
-                  <a:srgbClr val="4636B0"/>
-                </a:solidFill>
-                <a:latin typeface="Sora" pitchFamily="34" charset="0"/>
-                <a:ea typeface="Sora" pitchFamily="34" charset="-122"/>
-                <a:cs typeface="Sora" pitchFamily="34" charset="-120"/>
+                  <a:srgbClr val="14181A"/>
+                </a:solidFill>
+                <a:latin typeface="Archivo" pitchFamily="34" charset="0"/>
+                <a:ea typeface="Archivo" pitchFamily="34" charset="-122"/>
+                <a:cs typeface="Archivo" pitchFamily="34" charset="-120"/>
               </a:rPr>
               <a:t>3 — Scanner les articles</a:t>
             </a:r>
@@ -3092,11 +3092,11 @@
             <a:r>
               <a:rPr lang="en-US" sz="1100" dirty="0">
                 <a:solidFill>
-                  <a:srgbClr val="3D4556"/>
-                </a:solidFill>
-                <a:latin typeface="Inter" pitchFamily="34" charset="0"/>
-                <a:ea typeface="Inter" pitchFamily="34" charset="-122"/>
-                <a:cs typeface="Inter" pitchFamily="34" charset="-120"/>
+                  <a:srgbClr val="3A423F"/>
+                </a:solidFill>
+                <a:latin typeface="Public Sans" pitchFamily="34" charset="0"/>
+                <a:ea typeface="Public Sans" pitchFamily="34" charset="-122"/>
+                <a:cs typeface="Public Sans" pitchFamily="34" charset="-120"/>
               </a:rPr>
               <a:t>Caméra, saisie manuelle ou douchette. La quantité se corrige d'un appui, la zone se clôture à la fin.</a:t>
             </a:r>
@@ -3117,15 +3117,15 @@
           </a:xfrm>
           <a:prstGeom prst="roundRect">
             <a:avLst>
-              <a:gd name="adj" fmla="val 3857"/>
+              <a:gd name="adj" fmla="val 1102"/>
             </a:avLst>
           </a:prstGeom>
           <a:solidFill>
-            <a:srgbClr val="F4F5F9"/>
+            <a:srgbClr val="F2F3F1"/>
           </a:solidFill>
           <a:ln w="12700">
             <a:solidFill>
-              <a:srgbClr val="F4F5F9"/>
+              <a:srgbClr val="F2F3F1"/>
             </a:solidFill>
             <a:prstDash val="solid"/>
           </a:ln>
@@ -3182,11 +3182,11 @@
             <a:r>
               <a:rPr lang="en-US" sz="900" dirty="0">
                 <a:solidFill>
-                  <a:srgbClr val="5B6475"/>
-                </a:solidFill>
-                <a:latin typeface="Inter" pitchFamily="34" charset="0"/>
-                <a:ea typeface="Inter" pitchFamily="34" charset="-122"/>
-                <a:cs typeface="Inter" pitchFamily="34" charset="-120"/>
+                  <a:srgbClr val="575F5C"/>
+                </a:solidFill>
+                <a:latin typeface="Public Sans" pitchFamily="34" charset="0"/>
+                <a:ea typeface="Public Sans" pitchFamily="34" charset="-122"/>
+                <a:cs typeface="Public Sans" pitchFamily="34" charset="-120"/>
               </a:rPr>
               <a:t>Quantinvo · dossier technique · septembre 2026</a:t>
             </a:r>
@@ -3221,11 +3221,11 @@
             <a:r>
               <a:rPr lang="en-US" sz="900" dirty="0">
                 <a:solidFill>
-                  <a:srgbClr val="5B6475"/>
-                </a:solidFill>
-                <a:latin typeface="Inter" pitchFamily="34" charset="0"/>
-                <a:ea typeface="Inter" pitchFamily="34" charset="-122"/>
-                <a:cs typeface="Inter" pitchFamily="34" charset="-120"/>
+                  <a:srgbClr val="575F5C"/>
+                </a:solidFill>
+                <a:latin typeface="Public Sans" pitchFamily="34" charset="0"/>
+                <a:ea typeface="Public Sans" pitchFamily="34" charset="-122"/>
+                <a:cs typeface="Public Sans" pitchFamily="34" charset="-120"/>
               </a:rPr>
               <a:t>10</a:t>
             </a:r>
@@ -3316,11 +3316,11 @@
             <a:r>
               <a:rPr lang="en-US" sz="1600" b="1" dirty="0">
                 <a:solidFill>
-                  <a:srgbClr val="0B0F19"/>
-                </a:solidFill>
-                <a:latin typeface="Sora" pitchFamily="34" charset="0"/>
-                <a:ea typeface="Sora" pitchFamily="34" charset="-122"/>
-                <a:cs typeface="Sora" pitchFamily="34" charset="-120"/>
+                  <a:srgbClr val="14181A"/>
+                </a:solidFill>
+                <a:latin typeface="Archivo" pitchFamily="34" charset="0"/>
+                <a:ea typeface="Archivo" pitchFamily="34" charset="-122"/>
+                <a:cs typeface="Archivo" pitchFamily="34" charset="-120"/>
               </a:rPr>
               <a:t>Quantinvo</a:t>
             </a:r>
@@ -3355,11 +3355,11 @@
             <a:r>
               <a:rPr lang="en-US" sz="1000" dirty="0">
                 <a:solidFill>
-                  <a:srgbClr val="5B6475"/>
-                </a:solidFill>
-                <a:latin typeface="Inter" pitchFamily="34" charset="0"/>
-                <a:ea typeface="Inter" pitchFamily="34" charset="-122"/>
-                <a:cs typeface="Inter" pitchFamily="34" charset="-120"/>
+                  <a:srgbClr val="575F5C"/>
+                </a:solidFill>
+                <a:latin typeface="Public Sans" pitchFamily="34" charset="0"/>
+                <a:ea typeface="Public Sans" pitchFamily="34" charset="-122"/>
+                <a:cs typeface="Public Sans" pitchFamily="34" charset="-120"/>
               </a:rPr>
               <a:t>Comptes et accès</a:t>
             </a:r>
@@ -3376,17 +3376,17 @@
         <p:spPr>
           <a:xfrm>
             <a:off x="731520" y="877824"/>
-            <a:ext cx="10725912" cy="25603"/>
+            <a:ext cx="10725912" cy="10973"/>
           </a:xfrm>
           <a:prstGeom prst="rect">
             <a:avLst/>
           </a:prstGeom>
           <a:solidFill>
-            <a:srgbClr val="38C9FF"/>
+            <a:srgbClr val="E2E5E1"/>
           </a:solidFill>
           <a:ln w="12700">
             <a:solidFill>
-              <a:srgbClr val="38C9FF"/>
+              <a:srgbClr val="E2E5E1"/>
             </a:solidFill>
             <a:prstDash val="solid"/>
           </a:ln>
@@ -3422,11 +3422,11 @@
             <a:r>
               <a:rPr lang="en-US" sz="2600" b="1" dirty="0">
                 <a:solidFill>
-                  <a:srgbClr val="4636B0"/>
-                </a:solidFill>
-                <a:latin typeface="Sora" pitchFamily="34" charset="0"/>
-                <a:ea typeface="Sora" pitchFamily="34" charset="-122"/>
-                <a:cs typeface="Sora" pitchFamily="34" charset="-120"/>
+                  <a:srgbClr val="14181A"/>
+                </a:solidFill>
+                <a:latin typeface="Archivo" pitchFamily="34" charset="0"/>
+                <a:ea typeface="Archivo" pitchFamily="34" charset="-122"/>
+                <a:cs typeface="Archivo" pitchFamily="34" charset="-120"/>
               </a:rPr>
               <a:t>Des comptes nominatifs, créés sur invitation. Personne ne s’inscrit.</a:t>
             </a:r>
@@ -3464,11 +3464,11 @@
             <a:r>
               <a:rPr lang="en-US" sz="1200" dirty="0">
                 <a:solidFill>
-                  <a:srgbClr val="3D4556"/>
-                </a:solidFill>
-                <a:latin typeface="Inter" pitchFamily="34" charset="0"/>
-                <a:ea typeface="Inter" pitchFamily="34" charset="-122"/>
-                <a:cs typeface="Inter" pitchFamily="34" charset="-120"/>
+                  <a:srgbClr val="3A423F"/>
+                </a:solidFill>
+                <a:latin typeface="Public Sans" pitchFamily="34" charset="0"/>
+                <a:ea typeface="Public Sans" pitchFamily="34" charset="-122"/>
+                <a:cs typeface="Public Sans" pitchFamily="34" charset="-120"/>
               </a:rPr>
               <a:t>Savoir qui a compté quoi est nécessaire pour arbitrer un écart. C'est pour cela que chaque personne a son compte, et qu'il n'y a pas d'inscription libre.</a:t>
             </a:r>
@@ -3503,11 +3503,11 @@
             <a:r>
               <a:rPr lang="en-US" sz="1000" b="1" dirty="0">
                 <a:solidFill>
-                  <a:srgbClr val="5B6475"/>
-                </a:solidFill>
-                <a:latin typeface="Inter" pitchFamily="34" charset="0"/>
-                <a:ea typeface="Inter" pitchFamily="34" charset="-122"/>
-                <a:cs typeface="Inter" pitchFamily="34" charset="-120"/>
+                  <a:srgbClr val="575F5C"/>
+                </a:solidFill>
+                <a:latin typeface="Public Sans" pitchFamily="34" charset="0"/>
+                <a:ea typeface="Public Sans" pitchFamily="34" charset="-122"/>
+                <a:cs typeface="Public Sans" pitchFamily="34" charset="-120"/>
               </a:rPr>
               <a:t>Rôle</a:t>
             </a:r>
@@ -3542,11 +3542,11 @@
             <a:r>
               <a:rPr lang="en-US" sz="1000" b="1" dirty="0">
                 <a:solidFill>
-                  <a:srgbClr val="5B6475"/>
-                </a:solidFill>
-                <a:latin typeface="Inter" pitchFamily="34" charset="0"/>
-                <a:ea typeface="Inter" pitchFamily="34" charset="-122"/>
-                <a:cs typeface="Inter" pitchFamily="34" charset="-120"/>
+                  <a:srgbClr val="575F5C"/>
+                </a:solidFill>
+                <a:latin typeface="Public Sans" pitchFamily="34" charset="0"/>
+                <a:ea typeface="Public Sans" pitchFamily="34" charset="-122"/>
+                <a:cs typeface="Public Sans" pitchFamily="34" charset="-120"/>
               </a:rPr>
               <a:t>Ce qu’il voit et ce qu’il fait</a:t>
             </a:r>
@@ -3571,7 +3571,7 @@
           <a:noFill/>
           <a:ln w="9525">
             <a:solidFill>
-              <a:srgbClr val="E3E6EE"/>
+              <a:srgbClr val="E2E5E1"/>
             </a:solidFill>
             <a:prstDash val="solid"/>
           </a:ln>
@@ -3607,11 +3607,11 @@
             <a:r>
               <a:rPr lang="en-US" sz="1150" b="1" dirty="0">
                 <a:solidFill>
-                  <a:srgbClr val="0B0F19"/>
-                </a:solidFill>
-                <a:latin typeface="Sora" pitchFamily="34" charset="0"/>
-                <a:ea typeface="Sora" pitchFamily="34" charset="-122"/>
-                <a:cs typeface="Sora" pitchFamily="34" charset="-120"/>
+                  <a:srgbClr val="14181A"/>
+                </a:solidFill>
+                <a:latin typeface="Archivo" pitchFamily="34" charset="0"/>
+                <a:ea typeface="Archivo" pitchFamily="34" charset="-122"/>
+                <a:cs typeface="Archivo" pitchFamily="34" charset="-120"/>
               </a:rPr>
               <a:t>Administrateur d'entreprise</a:t>
             </a:r>
@@ -3649,11 +3649,11 @@
             <a:r>
               <a:rPr lang="en-US" sz="1150" dirty="0">
                 <a:solidFill>
-                  <a:srgbClr val="3D4556"/>
-                </a:solidFill>
-                <a:latin typeface="Inter" pitchFamily="34" charset="0"/>
-                <a:ea typeface="Inter" pitchFamily="34" charset="-122"/>
-                <a:cs typeface="Inter" pitchFamily="34" charset="-120"/>
+                  <a:srgbClr val="3A423F"/>
+                </a:solidFill>
+                <a:latin typeface="Public Sans" pitchFamily="34" charset="0"/>
+                <a:ea typeface="Public Sans" pitchFamily="34" charset="-122"/>
+                <a:cs typeface="Public Sans" pitchFamily="34" charset="-120"/>
               </a:rPr>
               <a:t>Tous les magasins, toutes les personnes, tous les inventaires de son entreprise. Invite, retire, supprime, lit le journal des actions.</a:t>
             </a:r>
@@ -3678,7 +3678,7 @@
           <a:noFill/>
           <a:ln w="9525">
             <a:solidFill>
-              <a:srgbClr val="E3E6EE"/>
+              <a:srgbClr val="E2E5E1"/>
             </a:solidFill>
             <a:prstDash val="solid"/>
           </a:ln>
@@ -3714,11 +3714,11 @@
             <a:r>
               <a:rPr lang="en-US" sz="1150" b="1" dirty="0">
                 <a:solidFill>
-                  <a:srgbClr val="0B0F19"/>
-                </a:solidFill>
-                <a:latin typeface="Sora" pitchFamily="34" charset="0"/>
-                <a:ea typeface="Sora" pitchFamily="34" charset="-122"/>
-                <a:cs typeface="Sora" pitchFamily="34" charset="-120"/>
+                  <a:srgbClr val="14181A"/>
+                </a:solidFill>
+                <a:latin typeface="Archivo" pitchFamily="34" charset="0"/>
+                <a:ea typeface="Archivo" pitchFamily="34" charset="-122"/>
+                <a:cs typeface="Archivo" pitchFamily="34" charset="-120"/>
               </a:rPr>
               <a:t>Superviseur</a:t>
             </a:r>
@@ -3756,11 +3756,11 @@
             <a:r>
               <a:rPr lang="en-US" sz="1150" dirty="0">
                 <a:solidFill>
-                  <a:srgbClr val="3D4556"/>
-                </a:solidFill>
-                <a:latin typeface="Inter" pitchFamily="34" charset="0"/>
-                <a:ea typeface="Inter" pitchFamily="34" charset="-122"/>
-                <a:cs typeface="Inter" pitchFamily="34" charset="-120"/>
+                  <a:srgbClr val="3A423F"/>
+                </a:solidFill>
+                <a:latin typeface="Public Sans" pitchFamily="34" charset="0"/>
+                <a:ea typeface="Public Sans" pitchFamily="34" charset="-122"/>
+                <a:cs typeface="Public Sans" pitchFamily="34" charset="-120"/>
               </a:rPr>
               <a:t>Ses magasins. Crée et pilote les inventaires, constitue son équipe, arbitre les écarts, lit les rapports.</a:t>
             </a:r>
@@ -3785,7 +3785,7 @@
           <a:noFill/>
           <a:ln w="9525">
             <a:solidFill>
-              <a:srgbClr val="E3E6EE"/>
+              <a:srgbClr val="E2E5E1"/>
             </a:solidFill>
             <a:prstDash val="solid"/>
           </a:ln>
@@ -3821,11 +3821,11 @@
             <a:r>
               <a:rPr lang="en-US" sz="1150" b="1" dirty="0">
                 <a:solidFill>
-                  <a:srgbClr val="0B0F19"/>
-                </a:solidFill>
-                <a:latin typeface="Sora" pitchFamily="34" charset="0"/>
-                <a:ea typeface="Sora" pitchFamily="34" charset="-122"/>
-                <a:cs typeface="Sora" pitchFamily="34" charset="-120"/>
+                  <a:srgbClr val="14181A"/>
+                </a:solidFill>
+                <a:latin typeface="Archivo" pitchFamily="34" charset="0"/>
+                <a:ea typeface="Archivo" pitchFamily="34" charset="-122"/>
+                <a:cs typeface="Archivo" pitchFamily="34" charset="-120"/>
               </a:rPr>
               <a:t>Compteur</a:t>
             </a:r>
@@ -3863,11 +3863,11 @@
             <a:r>
               <a:rPr lang="en-US" sz="1150" dirty="0">
                 <a:solidFill>
-                  <a:srgbClr val="3D4556"/>
-                </a:solidFill>
-                <a:latin typeface="Inter" pitchFamily="34" charset="0"/>
-                <a:ea typeface="Inter" pitchFamily="34" charset="-122"/>
-                <a:cs typeface="Inter" pitchFamily="34" charset="-120"/>
+                  <a:srgbClr val="3A423F"/>
+                </a:solidFill>
+                <a:latin typeface="Public Sans" pitchFamily="34" charset="0"/>
+                <a:ea typeface="Public Sans" pitchFamily="34" charset="-122"/>
+                <a:cs typeface="Public Sans" pitchFamily="34" charset="-120"/>
               </a:rPr>
               <a:t>Les inventaires auxquels il est invité. Il scanne, il compte, il audite. Aucun accès au site.</a:t>
             </a:r>
@@ -3892,7 +3892,7 @@
           <a:noFill/>
           <a:ln w="9525">
             <a:solidFill>
-              <a:srgbClr val="E3E6EE"/>
+              <a:srgbClr val="E2E5E1"/>
             </a:solidFill>
             <a:prstDash val="solid"/>
           </a:ln>
@@ -3931,11 +3931,11 @@
             <a:r>
               <a:rPr lang="en-US" sz="1150" b="1" dirty="0">
                 <a:solidFill>
-                  <a:srgbClr val="0B0F19"/>
-                </a:solidFill>
-                <a:latin typeface="Inter" pitchFamily="34" charset="0"/>
-                <a:ea typeface="Inter" pitchFamily="34" charset="-122"/>
-                <a:cs typeface="Inter" pitchFamily="34" charset="-120"/>
+                  <a:srgbClr val="14181A"/>
+                </a:solidFill>
+                <a:latin typeface="Public Sans" pitchFamily="34" charset="0"/>
+                <a:ea typeface="Public Sans" pitchFamily="34" charset="-122"/>
+                <a:cs typeface="Public Sans" pitchFamily="34" charset="-120"/>
               </a:rPr>
               <a:t>Mot de passe. </a:t>
             </a:r>
@@ -3951,11 +3951,11 @@
             <a:r>
               <a:rPr lang="en-US" sz="1150" dirty="0">
                 <a:solidFill>
-                  <a:srgbClr val="3D4556"/>
-                </a:solidFill>
-                <a:latin typeface="Inter" pitchFamily="34" charset="0"/>
-                <a:ea typeface="Inter" pitchFamily="34" charset="-122"/>
-                <a:cs typeface="Inter" pitchFamily="34" charset="-120"/>
+                  <a:srgbClr val="3A423F"/>
+                </a:solidFill>
+                <a:latin typeface="Public Sans" pitchFamily="34" charset="0"/>
+                <a:ea typeface="Public Sans" pitchFamily="34" charset="-122"/>
+                <a:cs typeface="Public Sans" pitchFamily="34" charset="-120"/>
               </a:rPr>
               <a:t>Douze caractères minimum, majuscule, minuscule, chiffre, symbole ; refus des mots de passe présents dans les fuites connues. Changer le sien exige l'ancien.</a:t>
             </a:r>
@@ -3974,11 +3974,11 @@
             <a:r>
               <a:rPr lang="en-US" sz="1150" b="1" dirty="0">
                 <a:solidFill>
-                  <a:srgbClr val="0B0F19"/>
-                </a:solidFill>
-                <a:latin typeface="Inter" pitchFamily="34" charset="0"/>
-                <a:ea typeface="Inter" pitchFamily="34" charset="-122"/>
-                <a:cs typeface="Inter" pitchFamily="34" charset="-120"/>
+                  <a:srgbClr val="14181A"/>
+                </a:solidFill>
+                <a:latin typeface="Public Sans" pitchFamily="34" charset="0"/>
+                <a:ea typeface="Public Sans" pitchFamily="34" charset="-122"/>
+                <a:cs typeface="Public Sans" pitchFamily="34" charset="-120"/>
               </a:rPr>
               <a:t>Double authentification. </a:t>
             </a:r>
@@ -3994,11 +3994,11 @@
             <a:r>
               <a:rPr lang="en-US" sz="1150" dirty="0">
                 <a:solidFill>
-                  <a:srgbClr val="3D4556"/>
-                </a:solidFill>
-                <a:latin typeface="Inter" pitchFamily="34" charset="0"/>
-                <a:ea typeface="Inter" pitchFamily="34" charset="-122"/>
-                <a:cs typeface="Inter" pitchFamily="34" charset="-120"/>
+                  <a:srgbClr val="3A423F"/>
+                </a:solidFill>
+                <a:latin typeface="Public Sans" pitchFamily="34" charset="0"/>
+                <a:ea typeface="Public Sans" pitchFamily="34" charset="-122"/>
+                <a:cs typeface="Public Sans" pitchFamily="34" charset="-120"/>
               </a:rPr>
               <a:t>Par code à usage unique (TOTP), activable par chacun depuis son compte. Quand elle est activée, le serveur la vérifie, pas seulement l'écran.</a:t>
             </a:r>
@@ -4017,11 +4017,11 @@
             <a:r>
               <a:rPr lang="en-US" sz="1150" b="1" dirty="0">
                 <a:solidFill>
-                  <a:srgbClr val="0B0F19"/>
-                </a:solidFill>
-                <a:latin typeface="Inter" pitchFamily="34" charset="0"/>
-                <a:ea typeface="Inter" pitchFamily="34" charset="-122"/>
-                <a:cs typeface="Inter" pitchFamily="34" charset="-120"/>
+                  <a:srgbClr val="14181A"/>
+                </a:solidFill>
+                <a:latin typeface="Public Sans" pitchFamily="34" charset="0"/>
+                <a:ea typeface="Public Sans" pitchFamily="34" charset="-122"/>
+                <a:cs typeface="Public Sans" pitchFamily="34" charset="-120"/>
               </a:rPr>
               <a:t>Sessions. </a:t>
             </a:r>
@@ -4037,11 +4037,11 @@
             <a:r>
               <a:rPr lang="en-US" sz="1150" dirty="0">
                 <a:solidFill>
-                  <a:srgbClr val="3D4556"/>
-                </a:solidFill>
-                <a:latin typeface="Inter" pitchFamily="34" charset="0"/>
-                <a:ea typeface="Inter" pitchFamily="34" charset="-122"/>
-                <a:cs typeface="Inter" pitchFamily="34" charset="-120"/>
+                  <a:srgbClr val="3A423F"/>
+                </a:solidFill>
+                <a:latin typeface="Public Sans" pitchFamily="34" charset="0"/>
+                <a:ea typeface="Public Sans" pitchFamily="34" charset="-122"/>
+                <a:cs typeface="Public Sans" pitchFamily="34" charset="-120"/>
               </a:rPr>
               <a:t>Expiration après 30 jours sans usage, et au plus 180 jours depuis la connexion. Un téléphone perdu cesse d'être connecté.</a:t>
             </a:r>
@@ -4060,11 +4060,11 @@
             <a:r>
               <a:rPr lang="en-US" sz="1150" b="1" dirty="0">
                 <a:solidFill>
-                  <a:srgbClr val="0B0F19"/>
-                </a:solidFill>
-                <a:latin typeface="Inter" pitchFamily="34" charset="0"/>
-                <a:ea typeface="Inter" pitchFamily="34" charset="-122"/>
-                <a:cs typeface="Inter" pitchFamily="34" charset="-120"/>
+                  <a:srgbClr val="14181A"/>
+                </a:solidFill>
+                <a:latin typeface="Public Sans" pitchFamily="34" charset="0"/>
+                <a:ea typeface="Public Sans" pitchFamily="34" charset="-122"/>
+                <a:cs typeface="Public Sans" pitchFamily="34" charset="-120"/>
               </a:rPr>
               <a:t>Cloisonnement. </a:t>
             </a:r>
@@ -4080,11 +4080,11 @@
             <a:r>
               <a:rPr lang="en-US" sz="1150" dirty="0">
                 <a:solidFill>
-                  <a:srgbClr val="3D4556"/>
-                </a:solidFill>
-                <a:latin typeface="Inter" pitchFamily="34" charset="0"/>
-                <a:ea typeface="Inter" pitchFamily="34" charset="-122"/>
-                <a:cs typeface="Inter" pitchFamily="34" charset="-120"/>
+                  <a:srgbClr val="3A423F"/>
+                </a:solidFill>
+                <a:latin typeface="Public Sans" pitchFamily="34" charset="0"/>
+                <a:ea typeface="Public Sans" pitchFamily="34" charset="-122"/>
+                <a:cs typeface="Public Sans" pitchFamily="34" charset="-120"/>
               </a:rPr>
               <a:t>Le filtrage par entreprise et par rôle est fait dans la base, à chaque requête. Un écran contourné ne donne rien.</a:t>
             </a:r>
@@ -4119,11 +4119,11 @@
             <a:r>
               <a:rPr lang="en-US" sz="900" dirty="0">
                 <a:solidFill>
-                  <a:srgbClr val="5B6475"/>
-                </a:solidFill>
-                <a:latin typeface="Inter" pitchFamily="34" charset="0"/>
-                <a:ea typeface="Inter" pitchFamily="34" charset="-122"/>
-                <a:cs typeface="Inter" pitchFamily="34" charset="-120"/>
+                  <a:srgbClr val="575F5C"/>
+                </a:solidFill>
+                <a:latin typeface="Public Sans" pitchFamily="34" charset="0"/>
+                <a:ea typeface="Public Sans" pitchFamily="34" charset="-122"/>
+                <a:cs typeface="Public Sans" pitchFamily="34" charset="-120"/>
               </a:rPr>
               <a:t>Quantinvo · dossier technique · septembre 2026</a:t>
             </a:r>
@@ -4158,11 +4158,11 @@
             <a:r>
               <a:rPr lang="en-US" sz="900" dirty="0">
                 <a:solidFill>
-                  <a:srgbClr val="5B6475"/>
-                </a:solidFill>
-                <a:latin typeface="Inter" pitchFamily="34" charset="0"/>
-                <a:ea typeface="Inter" pitchFamily="34" charset="-122"/>
-                <a:cs typeface="Inter" pitchFamily="34" charset="-120"/>
+                  <a:srgbClr val="575F5C"/>
+                </a:solidFill>
+                <a:latin typeface="Public Sans" pitchFamily="34" charset="0"/>
+                <a:ea typeface="Public Sans" pitchFamily="34" charset="-122"/>
+                <a:cs typeface="Public Sans" pitchFamily="34" charset="-120"/>
               </a:rPr>
               <a:t>11</a:t>
             </a:r>
@@ -4253,11 +4253,11 @@
             <a:r>
               <a:rPr lang="en-US" sz="1600" b="1" dirty="0">
                 <a:solidFill>
-                  <a:srgbClr val="0B0F19"/>
-                </a:solidFill>
-                <a:latin typeface="Sora" pitchFamily="34" charset="0"/>
-                <a:ea typeface="Sora" pitchFamily="34" charset="-122"/>
-                <a:cs typeface="Sora" pitchFamily="34" charset="-120"/>
+                  <a:srgbClr val="14181A"/>
+                </a:solidFill>
+                <a:latin typeface="Archivo" pitchFamily="34" charset="0"/>
+                <a:ea typeface="Archivo" pitchFamily="34" charset="-122"/>
+                <a:cs typeface="Archivo" pitchFamily="34" charset="-120"/>
               </a:rPr>
               <a:t>Quantinvo</a:t>
             </a:r>
@@ -4292,11 +4292,11 @@
             <a:r>
               <a:rPr lang="en-US" sz="1000" dirty="0">
                 <a:solidFill>
-                  <a:srgbClr val="5B6475"/>
-                </a:solidFill>
-                <a:latin typeface="Inter" pitchFamily="34" charset="0"/>
-                <a:ea typeface="Inter" pitchFamily="34" charset="-122"/>
-                <a:cs typeface="Inter" pitchFamily="34" charset="-120"/>
+                  <a:srgbClr val="575F5C"/>
+                </a:solidFill>
+                <a:latin typeface="Public Sans" pitchFamily="34" charset="0"/>
+                <a:ea typeface="Public Sans" pitchFamily="34" charset="-122"/>
+                <a:cs typeface="Public Sans" pitchFamily="34" charset="-120"/>
               </a:rPr>
               <a:t>Sécurité</a:t>
             </a:r>
@@ -4313,17 +4313,17 @@
         <p:spPr>
           <a:xfrm>
             <a:off x="731520" y="877824"/>
-            <a:ext cx="10725912" cy="25603"/>
+            <a:ext cx="10725912" cy="10973"/>
           </a:xfrm>
           <a:prstGeom prst="rect">
             <a:avLst/>
           </a:prstGeom>
           <a:solidFill>
-            <a:srgbClr val="38C9FF"/>
+            <a:srgbClr val="E2E5E1"/>
           </a:solidFill>
           <a:ln w="12700">
             <a:solidFill>
-              <a:srgbClr val="38C9FF"/>
+              <a:srgbClr val="E2E5E1"/>
             </a:solidFill>
             <a:prstDash val="solid"/>
           </a:ln>
@@ -4359,11 +4359,11 @@
             <a:r>
               <a:rPr lang="en-US" sz="2600" b="1" dirty="0">
                 <a:solidFill>
-                  <a:srgbClr val="4636B0"/>
-                </a:solidFill>
-                <a:latin typeface="Sora" pitchFamily="34" charset="0"/>
-                <a:ea typeface="Sora" pitchFamily="34" charset="-122"/>
-                <a:cs typeface="Sora" pitchFamily="34" charset="-120"/>
+                  <a:srgbClr val="14181A"/>
+                </a:solidFill>
+                <a:latin typeface="Archivo" pitchFamily="34" charset="0"/>
+                <a:ea typeface="Archivo" pitchFamily="34" charset="-122"/>
+                <a:cs typeface="Archivo" pitchFamily="34" charset="-120"/>
               </a:rPr>
               <a:t>Ce qui est en place.</a:t>
             </a:r>
@@ -4401,11 +4401,11 @@
             <a:r>
               <a:rPr lang="en-US" sz="1200" i="1" dirty="0">
                 <a:solidFill>
-                  <a:srgbClr val="5B6475"/>
-                </a:solidFill>
-                <a:latin typeface="Inter" pitchFamily="34" charset="0"/>
-                <a:ea typeface="Inter" pitchFamily="34" charset="-122"/>
-                <a:cs typeface="Inter" pitchFamily="34" charset="-120"/>
+                  <a:srgbClr val="575F5C"/>
+                </a:solidFill>
+                <a:latin typeface="Public Sans" pitchFamily="34" charset="0"/>
+                <a:ea typeface="Public Sans" pitchFamily="34" charset="-122"/>
+                <a:cs typeface="Public Sans" pitchFamily="34" charset="-120"/>
               </a:rPr>
               <a:t>Le détail des audits est en page suivante.</a:t>
             </a:r>
@@ -4446,11 +4446,11 @@
             <a:r>
               <a:rPr lang="en-US" sz="1200" b="1" dirty="0">
                 <a:solidFill>
-                  <a:srgbClr val="0B0F19"/>
-                </a:solidFill>
-                <a:latin typeface="Inter" pitchFamily="34" charset="0"/>
-                <a:ea typeface="Inter" pitchFamily="34" charset="-122"/>
-                <a:cs typeface="Inter" pitchFamily="34" charset="-120"/>
+                  <a:srgbClr val="14181A"/>
+                </a:solidFill>
+                <a:latin typeface="Public Sans" pitchFamily="34" charset="0"/>
+                <a:ea typeface="Public Sans" pitchFamily="34" charset="-122"/>
+                <a:cs typeface="Public Sans" pitchFamily="34" charset="-120"/>
               </a:rPr>
               <a:t>En transit et au repos. </a:t>
             </a:r>
@@ -4466,11 +4466,11 @@
             <a:r>
               <a:rPr lang="en-US" sz="1200" dirty="0">
                 <a:solidFill>
-                  <a:srgbClr val="3D4556"/>
-                </a:solidFill>
-                <a:latin typeface="Inter" pitchFamily="34" charset="0"/>
-                <a:ea typeface="Inter" pitchFamily="34" charset="-122"/>
-                <a:cs typeface="Inter" pitchFamily="34" charset="-120"/>
+                  <a:srgbClr val="3A423F"/>
+                </a:solidFill>
+                <a:latin typeface="Public Sans" pitchFamily="34" charset="0"/>
+                <a:ea typeface="Public Sans" pitchFamily="34" charset="-122"/>
+                <a:cs typeface="Public Sans" pitchFamily="34" charset="-120"/>
               </a:rPr>
               <a:t>Tout le trafic est chiffré (TLS). Les données sont chiffrées au repos par l'hébergeur, qui en assure aussi les sauvegardes quotidiennes.</a:t>
             </a:r>
@@ -4489,11 +4489,11 @@
             <a:r>
               <a:rPr lang="en-US" sz="1200" b="1" dirty="0">
                 <a:solidFill>
-                  <a:srgbClr val="0B0F19"/>
-                </a:solidFill>
-                <a:latin typeface="Inter" pitchFamily="34" charset="0"/>
-                <a:ea typeface="Inter" pitchFamily="34" charset="-122"/>
-                <a:cs typeface="Inter" pitchFamily="34" charset="-120"/>
+                  <a:srgbClr val="14181A"/>
+                </a:solidFill>
+                <a:latin typeface="Public Sans" pitchFamily="34" charset="0"/>
+                <a:ea typeface="Public Sans" pitchFamily="34" charset="-122"/>
+                <a:cs typeface="Public Sans" pitchFamily="34" charset="-120"/>
               </a:rPr>
               <a:t>Sur le téléphone. </a:t>
             </a:r>
@@ -4509,11 +4509,11 @@
             <a:r>
               <a:rPr lang="en-US" sz="1200" dirty="0">
                 <a:solidFill>
-                  <a:srgbClr val="3D4556"/>
-                </a:solidFill>
-                <a:latin typeface="Inter" pitchFamily="34" charset="0"/>
-                <a:ea typeface="Inter" pitchFamily="34" charset="-122"/>
-                <a:cs typeface="Inter" pitchFamily="34" charset="-120"/>
+                  <a:srgbClr val="3A423F"/>
+                </a:solidFill>
+                <a:latin typeface="Public Sans" pitchFamily="34" charset="0"/>
+                <a:ea typeface="Public Sans" pitchFamily="34" charset="-122"/>
+                <a:cs typeface="Public Sans" pitchFamily="34" charset="-120"/>
               </a:rPr>
               <a:t>Le jeton de session est rangé dans le trousseau du système — Keychain sur iOS, Keystore sur Android — chiffré par l'appareil, pas dans un fichier de l'application.</a:t>
             </a:r>
@@ -4532,11 +4532,11 @@
             <a:r>
               <a:rPr lang="en-US" sz="1200" b="1" dirty="0">
                 <a:solidFill>
-                  <a:srgbClr val="0B0F19"/>
-                </a:solidFill>
-                <a:latin typeface="Inter" pitchFamily="34" charset="0"/>
-                <a:ea typeface="Inter" pitchFamily="34" charset="-122"/>
-                <a:cs typeface="Inter" pitchFamily="34" charset="-120"/>
+                  <a:srgbClr val="14181A"/>
+                </a:solidFill>
+                <a:latin typeface="Public Sans" pitchFamily="34" charset="0"/>
+                <a:ea typeface="Public Sans" pitchFamily="34" charset="-122"/>
+                <a:cs typeface="Public Sans" pitchFamily="34" charset="-120"/>
               </a:rPr>
               <a:t>Site. </a:t>
             </a:r>
@@ -4552,11 +4552,11 @@
             <a:r>
               <a:rPr lang="en-US" sz="1200" dirty="0">
                 <a:solidFill>
-                  <a:srgbClr val="3D4556"/>
-                </a:solidFill>
-                <a:latin typeface="Inter" pitchFamily="34" charset="0"/>
-                <a:ea typeface="Inter" pitchFamily="34" charset="-122"/>
-                <a:cs typeface="Inter" pitchFamily="34" charset="-120"/>
+                  <a:srgbClr val="3A423F"/>
+                </a:solidFill>
+                <a:latin typeface="Public Sans" pitchFamily="34" charset="0"/>
+                <a:ea typeface="Public Sans" pitchFamily="34" charset="-122"/>
+                <a:cs typeface="Public Sans" pitchFamily="34" charset="-120"/>
               </a:rPr>
               <a:t>En-têtes de sécurité posés (politique de contenu, interdiction d'intégration dans un cadre, restriction des destinations réseau). Aucun traceur, aucune mesure d'audience : il n'y a pas de bandeau cookies parce qu'il n'y a pas de cookie à déclarer.</a:t>
             </a:r>
@@ -4575,11 +4575,11 @@
             <a:r>
               <a:rPr lang="en-US" sz="1200" b="1" dirty="0">
                 <a:solidFill>
-                  <a:srgbClr val="0B0F19"/>
-                </a:solidFill>
-                <a:latin typeface="Inter" pitchFamily="34" charset="0"/>
-                <a:ea typeface="Inter" pitchFamily="34" charset="-122"/>
-                <a:cs typeface="Inter" pitchFamily="34" charset="-120"/>
+                  <a:srgbClr val="14181A"/>
+                </a:solidFill>
+                <a:latin typeface="Public Sans" pitchFamily="34" charset="0"/>
+                <a:ea typeface="Public Sans" pitchFamily="34" charset="-122"/>
+                <a:cs typeface="Public Sans" pitchFamily="34" charset="-120"/>
               </a:rPr>
               <a:t>Journal. </a:t>
             </a:r>
@@ -4595,11 +4595,11 @@
             <a:r>
               <a:rPr lang="en-US" sz="1200" dirty="0">
                 <a:solidFill>
-                  <a:srgbClr val="3D4556"/>
-                </a:solidFill>
-                <a:latin typeface="Inter" pitchFamily="34" charset="0"/>
-                <a:ea typeface="Inter" pitchFamily="34" charset="-122"/>
-                <a:cs typeface="Inter" pitchFamily="34" charset="-120"/>
+                  <a:srgbClr val="3A423F"/>
+                </a:solidFill>
+                <a:latin typeface="Public Sans" pitchFamily="34" charset="0"/>
+                <a:ea typeface="Public Sans" pitchFamily="34" charset="-122"/>
+                <a:cs typeface="Public Sans" pitchFamily="34" charset="-120"/>
               </a:rPr>
               <a:t>Chaque action d'administration — création d'un compte, retrait d'un accès, suppression — est journalisée avec son auteur, et conservée un an. Votre administrateur lit le sien depuis son espace.</a:t>
             </a:r>
@@ -4618,11 +4618,11 @@
             <a:r>
               <a:rPr lang="en-US" sz="1200" b="1" dirty="0">
                 <a:solidFill>
-                  <a:srgbClr val="0B0F19"/>
-                </a:solidFill>
-                <a:latin typeface="Inter" pitchFamily="34" charset="0"/>
-                <a:ea typeface="Inter" pitchFamily="34" charset="-122"/>
-                <a:cs typeface="Inter" pitchFamily="34" charset="-120"/>
+                  <a:srgbClr val="14181A"/>
+                </a:solidFill>
+                <a:latin typeface="Public Sans" pitchFamily="34" charset="0"/>
+                <a:ea typeface="Public Sans" pitchFamily="34" charset="-122"/>
+                <a:cs typeface="Public Sans" pitchFamily="34" charset="-120"/>
               </a:rPr>
               <a:t>Suivi d’activité. </a:t>
             </a:r>
@@ -4638,11 +4638,11 @@
             <a:r>
               <a:rPr lang="en-US" sz="1200" dirty="0">
                 <a:solidFill>
-                  <a:srgbClr val="3D4556"/>
-                </a:solidFill>
-                <a:latin typeface="Inter" pitchFamily="34" charset="0"/>
-                <a:ea typeface="Inter" pitchFamily="34" charset="-122"/>
-                <a:cs typeface="Inter" pitchFamily="34" charset="-120"/>
+                  <a:srgbClr val="3A423F"/>
+                </a:solidFill>
+                <a:latin typeface="Public Sans" pitchFamily="34" charset="0"/>
+                <a:ea typeface="Public Sans" pitchFamily="34" charset="-122"/>
+                <a:cs typeface="Public Sans" pitchFamily="34" charset="-120"/>
               </a:rPr>
               <a:t>Le tableau de bord voit des compteurs (appareils connectés, en comptage, en audit), jamais qui fait quoi en direct. Ce qui reste nominatif, c'est l'auteur d'un comptage, pour l'arbitrage.</a:t>
             </a:r>
@@ -4661,11 +4661,11 @@
             <a:r>
               <a:rPr lang="en-US" sz="1200" b="1" dirty="0">
                 <a:solidFill>
-                  <a:srgbClr val="0B0F19"/>
-                </a:solidFill>
-                <a:latin typeface="Inter" pitchFamily="34" charset="0"/>
-                <a:ea typeface="Inter" pitchFamily="34" charset="-122"/>
-                <a:cs typeface="Inter" pitchFamily="34" charset="-120"/>
+                  <a:srgbClr val="14181A"/>
+                </a:solidFill>
+                <a:latin typeface="Public Sans" pitchFamily="34" charset="0"/>
+                <a:ea typeface="Public Sans" pitchFamily="34" charset="-122"/>
+                <a:cs typeface="Public Sans" pitchFamily="34" charset="-120"/>
               </a:rPr>
               <a:t>Effacement. </a:t>
             </a:r>
@@ -4681,11 +4681,11 @@
             <a:r>
               <a:rPr lang="en-US" sz="1200" dirty="0">
                 <a:solidFill>
-                  <a:srgbClr val="3D4556"/>
-                </a:solidFill>
-                <a:latin typeface="Inter" pitchFamily="34" charset="0"/>
-                <a:ea typeface="Inter" pitchFamily="34" charset="-122"/>
-                <a:cs typeface="Inter" pitchFamily="34" charset="-120"/>
+                  <a:srgbClr val="3A423F"/>
+                </a:solidFill>
+                <a:latin typeface="Public Sans" pitchFamily="34" charset="0"/>
+                <a:ea typeface="Public Sans" pitchFamily="34" charset="-122"/>
+                <a:cs typeface="Public Sans" pitchFamily="34" charset="-120"/>
               </a:rPr>
               <a:t>Les durées de conservation sont appliquées automatiquement, chaque nuit : journaux à un an, demandes et invitations traitées à trois mois, et purge des données expirées.</a:t>
             </a:r>
@@ -4720,11 +4720,11 @@
             <a:r>
               <a:rPr lang="en-US" sz="900" dirty="0">
                 <a:solidFill>
-                  <a:srgbClr val="5B6475"/>
-                </a:solidFill>
-                <a:latin typeface="Inter" pitchFamily="34" charset="0"/>
-                <a:ea typeface="Inter" pitchFamily="34" charset="-122"/>
-                <a:cs typeface="Inter" pitchFamily="34" charset="-120"/>
+                  <a:srgbClr val="575F5C"/>
+                </a:solidFill>
+                <a:latin typeface="Public Sans" pitchFamily="34" charset="0"/>
+                <a:ea typeface="Public Sans" pitchFamily="34" charset="-122"/>
+                <a:cs typeface="Public Sans" pitchFamily="34" charset="-120"/>
               </a:rPr>
               <a:t>Quantinvo · dossier technique · septembre 2026</a:t>
             </a:r>
@@ -4759,11 +4759,11 @@
             <a:r>
               <a:rPr lang="en-US" sz="900" dirty="0">
                 <a:solidFill>
-                  <a:srgbClr val="5B6475"/>
-                </a:solidFill>
-                <a:latin typeface="Inter" pitchFamily="34" charset="0"/>
-                <a:ea typeface="Inter" pitchFamily="34" charset="-122"/>
-                <a:cs typeface="Inter" pitchFamily="34" charset="-120"/>
+                  <a:srgbClr val="575F5C"/>
+                </a:solidFill>
+                <a:latin typeface="Public Sans" pitchFamily="34" charset="0"/>
+                <a:ea typeface="Public Sans" pitchFamily="34" charset="-122"/>
+                <a:cs typeface="Public Sans" pitchFamily="34" charset="-120"/>
               </a:rPr>
               <a:t>12</a:t>
             </a:r>
@@ -4854,11 +4854,11 @@
             <a:r>
               <a:rPr lang="en-US" sz="1600" b="1" dirty="0">
                 <a:solidFill>
-                  <a:srgbClr val="0B0F19"/>
-                </a:solidFill>
-                <a:latin typeface="Sora" pitchFamily="34" charset="0"/>
-                <a:ea typeface="Sora" pitchFamily="34" charset="-122"/>
-                <a:cs typeface="Sora" pitchFamily="34" charset="-120"/>
+                  <a:srgbClr val="14181A"/>
+                </a:solidFill>
+                <a:latin typeface="Archivo" pitchFamily="34" charset="0"/>
+                <a:ea typeface="Archivo" pitchFamily="34" charset="-122"/>
+                <a:cs typeface="Archivo" pitchFamily="34" charset="-120"/>
               </a:rPr>
               <a:t>Quantinvo</a:t>
             </a:r>
@@ -4893,11 +4893,11 @@
             <a:r>
               <a:rPr lang="en-US" sz="1000" dirty="0">
                 <a:solidFill>
-                  <a:srgbClr val="5B6475"/>
-                </a:solidFill>
-                <a:latin typeface="Inter" pitchFamily="34" charset="0"/>
-                <a:ea typeface="Inter" pitchFamily="34" charset="-122"/>
-                <a:cs typeface="Inter" pitchFamily="34" charset="-120"/>
+                  <a:srgbClr val="575F5C"/>
+                </a:solidFill>
+                <a:latin typeface="Public Sans" pitchFamily="34" charset="0"/>
+                <a:ea typeface="Public Sans" pitchFamily="34" charset="-122"/>
+                <a:cs typeface="Public Sans" pitchFamily="34" charset="-120"/>
               </a:rPr>
               <a:t>Les audits</a:t>
             </a:r>
@@ -4914,17 +4914,17 @@
         <p:spPr>
           <a:xfrm>
             <a:off x="731520" y="877824"/>
-            <a:ext cx="10725912" cy="25603"/>
+            <a:ext cx="10725912" cy="10973"/>
           </a:xfrm>
           <a:prstGeom prst="rect">
             <a:avLst/>
           </a:prstGeom>
           <a:solidFill>
-            <a:srgbClr val="38C9FF"/>
+            <a:srgbClr val="E2E5E1"/>
           </a:solidFill>
           <a:ln w="12700">
             <a:solidFill>
-              <a:srgbClr val="38C9FF"/>
+              <a:srgbClr val="E2E5E1"/>
             </a:solidFill>
             <a:prstDash val="solid"/>
           </a:ln>
@@ -4960,11 +4960,11 @@
             <a:r>
               <a:rPr lang="en-US" sz="2600" b="1" dirty="0">
                 <a:solidFill>
-                  <a:srgbClr val="4636B0"/>
-                </a:solidFill>
-                <a:latin typeface="Sora" pitchFamily="34" charset="0"/>
-                <a:ea typeface="Sora" pitchFamily="34" charset="-122"/>
-                <a:cs typeface="Sora" pitchFamily="34" charset="-120"/>
+                  <a:srgbClr val="14181A"/>
+                </a:solidFill>
+                <a:latin typeface="Archivo" pitchFamily="34" charset="0"/>
+                <a:ea typeface="Archivo" pitchFamily="34" charset="-122"/>
+                <a:cs typeface="Archivo" pitchFamily="34" charset="-120"/>
               </a:rPr>
               <a:t>Ce qui a été audité, et par quelle méthode.</a:t>
             </a:r>
@@ -4999,11 +4999,11 @@
             <a:r>
               <a:rPr lang="en-US" sz="4600" b="1" dirty="0">
                 <a:solidFill>
-                  <a:srgbClr val="4636B0"/>
-                </a:solidFill>
-                <a:latin typeface="Sora" pitchFamily="34" charset="0"/>
-                <a:ea typeface="Sora" pitchFamily="34" charset="-122"/>
-                <a:cs typeface="Sora" pitchFamily="34" charset="-120"/>
+                  <a:srgbClr val="1E4D3B"/>
+                </a:solidFill>
+                <a:latin typeface="Archivo" pitchFamily="34" charset="0"/>
+                <a:ea typeface="Archivo" pitchFamily="34" charset="-122"/>
+                <a:cs typeface="Archivo" pitchFamily="34" charset="-120"/>
               </a:rPr>
               <a:t>3</a:t>
             </a:r>
@@ -5041,11 +5041,11 @@
             <a:r>
               <a:rPr lang="en-US" sz="1200" dirty="0">
                 <a:solidFill>
-                  <a:srgbClr val="5B6475"/>
-                </a:solidFill>
-                <a:latin typeface="Inter" pitchFamily="34" charset="0"/>
-                <a:ea typeface="Inter" pitchFamily="34" charset="-122"/>
-                <a:cs typeface="Inter" pitchFamily="34" charset="-120"/>
+                  <a:srgbClr val="575F5C"/>
+                </a:solidFill>
+                <a:latin typeface="Public Sans" pitchFamily="34" charset="0"/>
+                <a:ea typeface="Public Sans" pitchFamily="34" charset="-122"/>
+                <a:cs typeface="Public Sans" pitchFamily="34" charset="-120"/>
               </a:rPr>
               <a:t>revues conduites en août 2026 : conformité, parcours de paiement, et l'ensemble des surfaces serveur.</a:t>
             </a:r>
@@ -5086,11 +5086,11 @@
             <a:r>
               <a:rPr lang="en-US" sz="1200" b="1" dirty="0">
                 <a:solidFill>
-                  <a:srgbClr val="0B0F19"/>
-                </a:solidFill>
-                <a:latin typeface="Inter" pitchFamily="34" charset="0"/>
-                <a:ea typeface="Inter" pitchFamily="34" charset="-122"/>
-                <a:cs typeface="Inter" pitchFamily="34" charset="-120"/>
+                  <a:srgbClr val="14181A"/>
+                </a:solidFill>
+                <a:latin typeface="Public Sans" pitchFamily="34" charset="0"/>
+                <a:ea typeface="Public Sans" pitchFamily="34" charset="-122"/>
+                <a:cs typeface="Public Sans" pitchFamily="34" charset="-120"/>
               </a:rPr>
               <a:t>Conformité RGPD et sécurité. </a:t>
             </a:r>
@@ -5106,11 +5106,11 @@
             <a:r>
               <a:rPr lang="en-US" sz="1200" dirty="0">
                 <a:solidFill>
-                  <a:srgbClr val="3D4556"/>
-                </a:solidFill>
-                <a:latin typeface="Inter" pitchFamily="34" charset="0"/>
-                <a:ea typeface="Inter" pitchFamily="34" charset="-122"/>
-                <a:cs typeface="Inter" pitchFamily="34" charset="-120"/>
+                  <a:srgbClr val="3A423F"/>
+                </a:solidFill>
+                <a:latin typeface="Public Sans" pitchFamily="34" charset="0"/>
+                <a:ea typeface="Public Sans" pitchFamily="34" charset="-122"/>
+                <a:cs typeface="Public Sans" pitchFamily="34" charset="-120"/>
               </a:rPr>
               <a:t>Quinze constats relevés le 13 août, treize clos au 19. Les deux restants sont des documents juridiques en relecture — registre des traitements et clauses de sous-traitance.</a:t>
             </a:r>
@@ -5129,11 +5129,11 @@
             <a:r>
               <a:rPr lang="en-US" sz="1200" b="1" dirty="0">
                 <a:solidFill>
-                  <a:srgbClr val="0B0F19"/>
-                </a:solidFill>
-                <a:latin typeface="Inter" pitchFamily="34" charset="0"/>
-                <a:ea typeface="Inter" pitchFamily="34" charset="-122"/>
-                <a:cs typeface="Inter" pitchFamily="34" charset="-120"/>
+                  <a:srgbClr val="14181A"/>
+                </a:solidFill>
+                <a:latin typeface="Public Sans" pitchFamily="34" charset="0"/>
+                <a:ea typeface="Public Sans" pitchFamily="34" charset="-122"/>
+                <a:cs typeface="Public Sans" pitchFamily="34" charset="-120"/>
               </a:rPr>
               <a:t>Modélisation de menaces du parcours de l’argent. </a:t>
             </a:r>
@@ -5149,11 +5149,11 @@
             <a:r>
               <a:rPr lang="en-US" sz="1200" dirty="0">
                 <a:solidFill>
-                  <a:srgbClr val="3D4556"/>
-                </a:solidFill>
-                <a:latin typeface="Inter" pitchFamily="34" charset="0"/>
-                <a:ea typeface="Inter" pitchFamily="34" charset="-122"/>
-                <a:cs typeface="Inter" pitchFamily="34" charset="-120"/>
+                  <a:srgbClr val="3A423F"/>
+                </a:solidFill>
+                <a:latin typeface="Public Sans" pitchFamily="34" charset="0"/>
+                <a:ea typeface="Public Sans" pitchFamily="34" charset="-122"/>
+                <a:cs typeface="Public Sans" pitchFamily="34" charset="-120"/>
               </a:rPr>
               <a:t>Méthode STRIDE, appliquée au chemin complet — demande, devis, acceptation, paiement, création des accès. Quatre constats, tous corrigés le jour même, avec des tests qui empêchent leur retour.</a:t>
             </a:r>
@@ -5172,11 +5172,11 @@
             <a:r>
               <a:rPr lang="en-US" sz="1200" b="1" dirty="0">
                 <a:solidFill>
-                  <a:srgbClr val="0B0F19"/>
-                </a:solidFill>
-                <a:latin typeface="Inter" pitchFamily="34" charset="0"/>
-                <a:ea typeface="Inter" pitchFamily="34" charset="-122"/>
-                <a:cs typeface="Inter" pitchFamily="34" charset="-120"/>
+                  <a:srgbClr val="14181A"/>
+                </a:solidFill>
+                <a:latin typeface="Public Sans" pitchFamily="34" charset="0"/>
+                <a:ea typeface="Public Sans" pitchFamily="34" charset="-122"/>
+                <a:cs typeface="Public Sans" pitchFamily="34" charset="-120"/>
               </a:rPr>
               <a:t>Revue des surfaces serveur. </a:t>
             </a:r>
@@ -5192,11 +5192,11 @@
             <a:r>
               <a:rPr lang="en-US" sz="1200" dirty="0">
                 <a:solidFill>
-                  <a:srgbClr val="3D4556"/>
-                </a:solidFill>
-                <a:latin typeface="Inter" pitchFamily="34" charset="0"/>
-                <a:ea typeface="Inter" pitchFamily="34" charset="-122"/>
-                <a:cs typeface="Inter" pitchFamily="34" charset="-120"/>
+                  <a:srgbClr val="3A423F"/>
+                </a:solidFill>
+                <a:latin typeface="Public Sans" pitchFamily="34" charset="0"/>
+                <a:ea typeface="Public Sans" pitchFamily="34" charset="-122"/>
+                <a:cs typeface="Public Sans" pitchFamily="34" charset="-120"/>
               </a:rPr>
               <a:t>Balayage des fonctions de base de données, des règles d'accès et des fonctions distantes, par motif de défaut connu. Cinq constats, tous corrigés le jour même. Trois l'ont été par retrait : une permission dont personne ne se sert n'a pas besoin d'un contrôle, elle a besoin d'être injoignable.</a:t>
             </a:r>
@@ -5215,11 +5215,11 @@
             <a:r>
               <a:rPr lang="en-US" sz="1200" b="1" dirty="0">
                 <a:solidFill>
-                  <a:srgbClr val="0B0F19"/>
-                </a:solidFill>
-                <a:latin typeface="Inter" pitchFamily="34" charset="0"/>
-                <a:ea typeface="Inter" pitchFamily="34" charset="-122"/>
-                <a:cs typeface="Inter" pitchFamily="34" charset="-120"/>
+                  <a:srgbClr val="14181A"/>
+                </a:solidFill>
+                <a:latin typeface="Public Sans" pitchFamily="34" charset="0"/>
+                <a:ea typeface="Public Sans" pitchFamily="34" charset="-122"/>
+                <a:cs typeface="Public Sans" pitchFamily="34" charset="-120"/>
               </a:rPr>
               <a:t>Ce que nous ne faisons pas. </a:t>
             </a:r>
@@ -5235,11 +5235,11 @@
             <a:r>
               <a:rPr lang="en-US" sz="1200" dirty="0">
                 <a:solidFill>
-                  <a:srgbClr val="3D4556"/>
-                </a:solidFill>
-                <a:latin typeface="Inter" pitchFamily="34" charset="0"/>
-                <a:ea typeface="Inter" pitchFamily="34" charset="-122"/>
-                <a:cs typeface="Inter" pitchFamily="34" charset="-120"/>
+                  <a:srgbClr val="3A423F"/>
+                </a:solidFill>
+                <a:latin typeface="Public Sans" pitchFamily="34" charset="0"/>
+                <a:ea typeface="Public Sans" pitchFamily="34" charset="-122"/>
+                <a:cs typeface="Public Sans" pitchFamily="34" charset="-120"/>
               </a:rPr>
               <a:t>Pas de test d'intrusion externe à ce jour, et pas de certification ISO. Si votre politique l'exige, nous accueillons le vôtre.</a:t>
             </a:r>
@@ -5274,11 +5274,11 @@
             <a:r>
               <a:rPr lang="en-US" sz="900" dirty="0">
                 <a:solidFill>
-                  <a:srgbClr val="5B6475"/>
-                </a:solidFill>
-                <a:latin typeface="Inter" pitchFamily="34" charset="0"/>
-                <a:ea typeface="Inter" pitchFamily="34" charset="-122"/>
-                <a:cs typeface="Inter" pitchFamily="34" charset="-120"/>
+                  <a:srgbClr val="575F5C"/>
+                </a:solidFill>
+                <a:latin typeface="Public Sans" pitchFamily="34" charset="0"/>
+                <a:ea typeface="Public Sans" pitchFamily="34" charset="-122"/>
+                <a:cs typeface="Public Sans" pitchFamily="34" charset="-120"/>
               </a:rPr>
               <a:t>Quantinvo · dossier technique · septembre 2026</a:t>
             </a:r>
@@ -5313,11 +5313,11 @@
             <a:r>
               <a:rPr lang="en-US" sz="900" dirty="0">
                 <a:solidFill>
-                  <a:srgbClr val="5B6475"/>
-                </a:solidFill>
-                <a:latin typeface="Inter" pitchFamily="34" charset="0"/>
-                <a:ea typeface="Inter" pitchFamily="34" charset="-122"/>
-                <a:cs typeface="Inter" pitchFamily="34" charset="-120"/>
+                  <a:srgbClr val="575F5C"/>
+                </a:solidFill>
+                <a:latin typeface="Public Sans" pitchFamily="34" charset="0"/>
+                <a:ea typeface="Public Sans" pitchFamily="34" charset="-122"/>
+                <a:cs typeface="Public Sans" pitchFamily="34" charset="-120"/>
               </a:rPr>
               <a:t>13</a:t>
             </a:r>
@@ -5408,11 +5408,11 @@
             <a:r>
               <a:rPr lang="en-US" sz="1600" b="1" dirty="0">
                 <a:solidFill>
-                  <a:srgbClr val="0B0F19"/>
-                </a:solidFill>
-                <a:latin typeface="Sora" pitchFamily="34" charset="0"/>
-                <a:ea typeface="Sora" pitchFamily="34" charset="-122"/>
-                <a:cs typeface="Sora" pitchFamily="34" charset="-120"/>
+                  <a:srgbClr val="14181A"/>
+                </a:solidFill>
+                <a:latin typeface="Archivo" pitchFamily="34" charset="0"/>
+                <a:ea typeface="Archivo" pitchFamily="34" charset="-122"/>
+                <a:cs typeface="Archivo" pitchFamily="34" charset="-120"/>
               </a:rPr>
               <a:t>Quantinvo</a:t>
             </a:r>
@@ -5447,11 +5447,11 @@
             <a:r>
               <a:rPr lang="en-US" sz="1000" dirty="0">
                 <a:solidFill>
-                  <a:srgbClr val="5B6475"/>
-                </a:solidFill>
-                <a:latin typeface="Inter" pitchFamily="34" charset="0"/>
-                <a:ea typeface="Inter" pitchFamily="34" charset="-122"/>
-                <a:cs typeface="Inter" pitchFamily="34" charset="-120"/>
+                  <a:srgbClr val="575F5C"/>
+                </a:solidFill>
+                <a:latin typeface="Public Sans" pitchFamily="34" charset="0"/>
+                <a:ea typeface="Public Sans" pitchFamily="34" charset="-122"/>
+                <a:cs typeface="Public Sans" pitchFamily="34" charset="-120"/>
               </a:rPr>
               <a:t>Hors ligne et charge</a:t>
             </a:r>
@@ -5468,17 +5468,17 @@
         <p:spPr>
           <a:xfrm>
             <a:off x="731520" y="877824"/>
-            <a:ext cx="10725912" cy="25603"/>
+            <a:ext cx="10725912" cy="10973"/>
           </a:xfrm>
           <a:prstGeom prst="rect">
             <a:avLst/>
           </a:prstGeom>
           <a:solidFill>
-            <a:srgbClr val="38C9FF"/>
+            <a:srgbClr val="E2E5E1"/>
           </a:solidFill>
           <a:ln w="12700">
             <a:solidFill>
-              <a:srgbClr val="38C9FF"/>
+              <a:srgbClr val="E2E5E1"/>
             </a:solidFill>
             <a:prstDash val="solid"/>
           </a:ln>
@@ -5514,11 +5514,11 @@
             <a:r>
               <a:rPr lang="en-US" sz="2600" b="1" dirty="0">
                 <a:solidFill>
-                  <a:srgbClr val="4636B0"/>
-                </a:solidFill>
-                <a:latin typeface="Sora" pitchFamily="34" charset="0"/>
-                <a:ea typeface="Sora" pitchFamily="34" charset="-122"/>
-                <a:cs typeface="Sora" pitchFamily="34" charset="-120"/>
+                  <a:srgbClr val="14181A"/>
+                </a:solidFill>
+                <a:latin typeface="Archivo" pitchFamily="34" charset="0"/>
+                <a:ea typeface="Archivo" pitchFamily="34" charset="-122"/>
+                <a:cs typeface="Archivo" pitchFamily="34" charset="-120"/>
               </a:rPr>
               <a:t>Le réseau tombe en réserve. Le comptage continue.</a:t>
             </a:r>
@@ -5556,11 +5556,11 @@
             <a:r>
               <a:rPr lang="en-US" sz="1200" i="1" dirty="0">
                 <a:solidFill>
-                  <a:srgbClr val="5B6475"/>
-                </a:solidFill>
-                <a:latin typeface="Inter" pitchFamily="34" charset="0"/>
-                <a:ea typeface="Inter" pitchFamily="34" charset="-122"/>
-                <a:cs typeface="Inter" pitchFamily="34" charset="-120"/>
+                  <a:srgbClr val="575F5C"/>
+                </a:solidFill>
+                <a:latin typeface="Public Sans" pitchFamily="34" charset="0"/>
+                <a:ea typeface="Public Sans" pitchFamily="34" charset="-122"/>
+                <a:cs typeface="Public Sans" pitchFamily="34" charset="-120"/>
               </a:rPr>
               <a:t>C'est le cas le plus fréquent sur le terrain, et celui pour lequel l'application a été construite.</a:t>
             </a:r>
@@ -5601,11 +5601,11 @@
             <a:r>
               <a:rPr lang="en-US" sz="1200" b="1" dirty="0">
                 <a:solidFill>
-                  <a:srgbClr val="0B0F19"/>
-                </a:solidFill>
-                <a:latin typeface="Inter" pitchFamily="34" charset="0"/>
-                <a:ea typeface="Inter" pitchFamily="34" charset="-122"/>
-                <a:cs typeface="Inter" pitchFamily="34" charset="-120"/>
+                  <a:srgbClr val="14181A"/>
+                </a:solidFill>
+                <a:latin typeface="Public Sans" pitchFamily="34" charset="0"/>
+                <a:ea typeface="Public Sans" pitchFamily="34" charset="-122"/>
+                <a:cs typeface="Public Sans" pitchFamily="34" charset="-120"/>
               </a:rPr>
               <a:t>Hors ligne. </a:t>
             </a:r>
@@ -5621,11 +5621,11 @@
             <a:r>
               <a:rPr lang="en-US" sz="1200" dirty="0">
                 <a:solidFill>
-                  <a:srgbClr val="3D4556"/>
-                </a:solidFill>
-                <a:latin typeface="Inter" pitchFamily="34" charset="0"/>
-                <a:ea typeface="Inter" pitchFamily="34" charset="-122"/>
-                <a:cs typeface="Inter" pitchFamily="34" charset="-120"/>
+                  <a:srgbClr val="3A423F"/>
+                </a:solidFill>
+                <a:latin typeface="Public Sans" pitchFamily="34" charset="0"/>
+                <a:ea typeface="Public Sans" pitchFamily="34" charset="-122"/>
+                <a:cs typeface="Public Sans" pitchFamily="34" charset="-120"/>
               </a:rPr>
               <a:t>Les scans sont enregistrés sur le téléphone et renvoyés automatiquement au retour du réseau, dans l'ordre. Le compteur voit ce qui attend et ce qui est parti. Une session expirée n'efface rien : la file attend la reconnexion.</a:t>
             </a:r>
@@ -5644,11 +5644,11 @@
             <a:r>
               <a:rPr lang="en-US" sz="1200" b="1" dirty="0">
                 <a:solidFill>
-                  <a:srgbClr val="0B0F19"/>
-                </a:solidFill>
-                <a:latin typeface="Inter" pitchFamily="34" charset="0"/>
-                <a:ea typeface="Inter" pitchFamily="34" charset="-122"/>
-                <a:cs typeface="Inter" pitchFamily="34" charset="-120"/>
+                  <a:srgbClr val="14181A"/>
+                </a:solidFill>
+                <a:latin typeface="Public Sans" pitchFamily="34" charset="0"/>
+                <a:ea typeface="Public Sans" pitchFamily="34" charset="-122"/>
+                <a:cs typeface="Public Sans" pitchFamily="34" charset="-120"/>
               </a:rPr>
               <a:t>Plusieurs compteurs par magasin. </a:t>
             </a:r>
@@ -5664,11 +5664,11 @@
             <a:r>
               <a:rPr lang="en-US" sz="1200" dirty="0">
                 <a:solidFill>
-                  <a:srgbClr val="3D4556"/>
-                </a:solidFill>
-                <a:latin typeface="Inter" pitchFamily="34" charset="0"/>
-                <a:ea typeface="Inter" pitchFamily="34" charset="-122"/>
-                <a:cs typeface="Inter" pitchFamily="34" charset="-120"/>
+                  <a:srgbClr val="3A423F"/>
+                </a:solidFill>
+                <a:latin typeface="Public Sans" pitchFamily="34" charset="0"/>
+                <a:ea typeface="Public Sans" pitchFamily="34" charset="-122"/>
+                <a:cs typeface="Public Sans" pitchFamily="34" charset="-120"/>
               </a:rPr>
               <a:t>Chaque téléphone envoie un signal toutes les 5 à 30 secondes ; il n'écoute rien. Seul le tableau de bord écoute. Le coût du suivi croît avec le nombre de téléphones, pas avec son carré.</a:t>
             </a:r>
@@ -5687,11 +5687,11 @@
             <a:r>
               <a:rPr lang="en-US" sz="1200" b="1" dirty="0">
                 <a:solidFill>
-                  <a:srgbClr val="0B0F19"/>
-                </a:solidFill>
-                <a:latin typeface="Inter" pitchFamily="34" charset="0"/>
-                <a:ea typeface="Inter" pitchFamily="34" charset="-122"/>
-                <a:cs typeface="Inter" pitchFamily="34" charset="-120"/>
+                  <a:srgbClr val="14181A"/>
+                </a:solidFill>
+                <a:latin typeface="Public Sans" pitchFamily="34" charset="0"/>
+                <a:ea typeface="Public Sans" pitchFamily="34" charset="-122"/>
+                <a:cs typeface="Public Sans" pitchFamily="34" charset="-120"/>
               </a:rPr>
               <a:t>Tableau de bord. </a:t>
             </a:r>
@@ -5707,11 +5707,11 @@
             <a:r>
               <a:rPr lang="en-US" sz="1200" dirty="0">
                 <a:solidFill>
-                  <a:srgbClr val="3D4556"/>
-                </a:solidFill>
-                <a:latin typeface="Inter" pitchFamily="34" charset="0"/>
-                <a:ea typeface="Inter" pitchFamily="34" charset="-122"/>
-                <a:cs typeface="Inter" pitchFamily="34" charset="-120"/>
+                  <a:srgbClr val="3A423F"/>
+                </a:solidFill>
+                <a:latin typeface="Public Sans" pitchFamily="34" charset="0"/>
+                <a:ea typeface="Public Sans" pitchFamily="34" charset="-122"/>
+                <a:cs typeface="Public Sans" pitchFamily="34" charset="-120"/>
               </a:rPr>
               <a:t>Les totaux sont calculés par la base, pas téléchargés. Un tableau de bord ouvert recalcule au plus une fois par minute, et se met au repos quand personne ne scanne.</a:t>
             </a:r>
@@ -5730,11 +5730,11 @@
             <a:r>
               <a:rPr lang="en-US" sz="1200" b="1" dirty="0">
                 <a:solidFill>
-                  <a:srgbClr val="0B0F19"/>
-                </a:solidFill>
-                <a:latin typeface="Inter" pitchFamily="34" charset="0"/>
-                <a:ea typeface="Inter" pitchFamily="34" charset="-122"/>
-                <a:cs typeface="Inter" pitchFamily="34" charset="-120"/>
+                  <a:srgbClr val="14181A"/>
+                </a:solidFill>
+                <a:latin typeface="Public Sans" pitchFamily="34" charset="0"/>
+                <a:ea typeface="Public Sans" pitchFamily="34" charset="-122"/>
+                <a:cs typeface="Public Sans" pitchFamily="34" charset="-120"/>
               </a:rPr>
               <a:t>Volumes. </a:t>
             </a:r>
@@ -5750,11 +5750,11 @@
             <a:r>
               <a:rPr lang="en-US" sz="1200" dirty="0">
                 <a:solidFill>
-                  <a:srgbClr val="3D4556"/>
-                </a:solidFill>
-                <a:latin typeface="Inter" pitchFamily="34" charset="0"/>
-                <a:ea typeface="Inter" pitchFamily="34" charset="-122"/>
-                <a:cs typeface="Inter" pitchFamily="34" charset="-120"/>
+                  <a:srgbClr val="3A423F"/>
+                </a:solidFill>
+                <a:latin typeface="Public Sans" pitchFamily="34" charset="0"/>
+                <a:ea typeface="Public Sans" pitchFamily="34" charset="-122"/>
+                <a:cs typeface="Public Sans" pitchFamily="34" charset="-120"/>
               </a:rPr>
               <a:t>Un référentiel de plusieurs dizaines de milliers de références s'importe par lots. Pour un réseau de plusieurs centaines de magasins comptant le même jour, nous montons la capacité de la base : c'est un réglage, pas un chantier.</a:t>
             </a:r>
@@ -5789,11 +5789,11 @@
             <a:r>
               <a:rPr lang="en-US" sz="900" dirty="0">
                 <a:solidFill>
-                  <a:srgbClr val="5B6475"/>
-                </a:solidFill>
-                <a:latin typeface="Inter" pitchFamily="34" charset="0"/>
-                <a:ea typeface="Inter" pitchFamily="34" charset="-122"/>
-                <a:cs typeface="Inter" pitchFamily="34" charset="-120"/>
+                  <a:srgbClr val="575F5C"/>
+                </a:solidFill>
+                <a:latin typeface="Public Sans" pitchFamily="34" charset="0"/>
+                <a:ea typeface="Public Sans" pitchFamily="34" charset="-122"/>
+                <a:cs typeface="Public Sans" pitchFamily="34" charset="-120"/>
               </a:rPr>
               <a:t>Quantinvo · dossier technique · septembre 2026</a:t>
             </a:r>
@@ -5828,11 +5828,11 @@
             <a:r>
               <a:rPr lang="en-US" sz="900" dirty="0">
                 <a:solidFill>
-                  <a:srgbClr val="5B6475"/>
-                </a:solidFill>
-                <a:latin typeface="Inter" pitchFamily="34" charset="0"/>
-                <a:ea typeface="Inter" pitchFamily="34" charset="-122"/>
-                <a:cs typeface="Inter" pitchFamily="34" charset="-120"/>
+                  <a:srgbClr val="575F5C"/>
+                </a:solidFill>
+                <a:latin typeface="Public Sans" pitchFamily="34" charset="0"/>
+                <a:ea typeface="Public Sans" pitchFamily="34" charset="-122"/>
+                <a:cs typeface="Public Sans" pitchFamily="34" charset="-120"/>
               </a:rPr>
               <a:t>14</a:t>
             </a:r>
@@ -5923,11 +5923,11 @@
             <a:r>
               <a:rPr lang="en-US" sz="1600" b="1" dirty="0">
                 <a:solidFill>
-                  <a:srgbClr val="0B0F19"/>
-                </a:solidFill>
-                <a:latin typeface="Sora" pitchFamily="34" charset="0"/>
-                <a:ea typeface="Sora" pitchFamily="34" charset="-122"/>
-                <a:cs typeface="Sora" pitchFamily="34" charset="-120"/>
+                  <a:srgbClr val="14181A"/>
+                </a:solidFill>
+                <a:latin typeface="Archivo" pitchFamily="34" charset="0"/>
+                <a:ea typeface="Archivo" pitchFamily="34" charset="-122"/>
+                <a:cs typeface="Archivo" pitchFamily="34" charset="-120"/>
               </a:rPr>
               <a:t>Quantinvo</a:t>
             </a:r>
@@ -5962,11 +5962,11 @@
             <a:r>
               <a:rPr lang="en-US" sz="1000" dirty="0">
                 <a:solidFill>
-                  <a:srgbClr val="5B6475"/>
-                </a:solidFill>
-                <a:latin typeface="Inter" pitchFamily="34" charset="0"/>
-                <a:ea typeface="Inter" pitchFamily="34" charset="-122"/>
-                <a:cs typeface="Inter" pitchFamily="34" charset="-120"/>
+                  <a:srgbClr val="575F5C"/>
+                </a:solidFill>
+                <a:latin typeface="Public Sans" pitchFamily="34" charset="0"/>
+                <a:ea typeface="Public Sans" pitchFamily="34" charset="-122"/>
+                <a:cs typeface="Public Sans" pitchFamily="34" charset="-120"/>
               </a:rPr>
               <a:t>Protection des données</a:t>
             </a:r>
@@ -5983,17 +5983,17 @@
         <p:spPr>
           <a:xfrm>
             <a:off x="731520" y="877824"/>
-            <a:ext cx="10725912" cy="25603"/>
+            <a:ext cx="10725912" cy="10973"/>
           </a:xfrm>
           <a:prstGeom prst="rect">
             <a:avLst/>
           </a:prstGeom>
           <a:solidFill>
-            <a:srgbClr val="38C9FF"/>
+            <a:srgbClr val="E2E5E1"/>
           </a:solidFill>
           <a:ln w="12700">
             <a:solidFill>
-              <a:srgbClr val="38C9FF"/>
+              <a:srgbClr val="E2E5E1"/>
             </a:solidFill>
             <a:prstDash val="solid"/>
           </a:ln>
@@ -6029,11 +6029,11 @@
             <a:r>
               <a:rPr lang="en-US" sz="2600" b="1" dirty="0">
                 <a:solidFill>
-                  <a:srgbClr val="4636B0"/>
-                </a:solidFill>
-                <a:latin typeface="Sora" pitchFamily="34" charset="0"/>
-                <a:ea typeface="Sora" pitchFamily="34" charset="-122"/>
-                <a:cs typeface="Sora" pitchFamily="34" charset="-120"/>
+                  <a:srgbClr val="14181A"/>
+                </a:solidFill>
+                <a:latin typeface="Archivo" pitchFamily="34" charset="0"/>
+                <a:ea typeface="Archivo" pitchFamily="34" charset="-122"/>
+                <a:cs typeface="Archivo" pitchFamily="34" charset="-120"/>
               </a:rPr>
               <a:t>Qui est responsable de quoi</a:t>
             </a:r>
@@ -6068,11 +6068,11 @@
             <a:r>
               <a:rPr lang="en-US" sz="1350" b="1" dirty="0">
                 <a:solidFill>
-                  <a:srgbClr val="4636B0"/>
-                </a:solidFill>
-                <a:latin typeface="Sora" pitchFamily="34" charset="0"/>
-                <a:ea typeface="Sora" pitchFamily="34" charset="-122"/>
-                <a:cs typeface="Sora" pitchFamily="34" charset="-120"/>
+                  <a:srgbClr val="14181A"/>
+                </a:solidFill>
+                <a:latin typeface="Archivo" pitchFamily="34" charset="0"/>
+                <a:ea typeface="Archivo" pitchFamily="34" charset="-122"/>
+                <a:cs typeface="Archivo" pitchFamily="34" charset="-120"/>
               </a:rPr>
               <a:t>Vous, responsable de traitement</a:t>
             </a:r>
@@ -6107,11 +6107,11 @@
             <a:r>
               <a:rPr lang="en-US" sz="1350" b="1" dirty="0">
                 <a:solidFill>
-                  <a:srgbClr val="4636B0"/>
-                </a:solidFill>
-                <a:latin typeface="Sora" pitchFamily="34" charset="0"/>
-                <a:ea typeface="Sora" pitchFamily="34" charset="-122"/>
-                <a:cs typeface="Sora" pitchFamily="34" charset="-120"/>
+                  <a:srgbClr val="14181A"/>
+                </a:solidFill>
+                <a:latin typeface="Archivo" pitchFamily="34" charset="0"/>
+                <a:ea typeface="Archivo" pitchFamily="34" charset="-122"/>
+                <a:cs typeface="Archivo" pitchFamily="34" charset="-120"/>
               </a:rPr>
               <a:t>Devkaylab, sous-traitant</a:t>
             </a:r>
@@ -6136,7 +6136,7 @@
           <a:noFill/>
           <a:ln w="9525">
             <a:solidFill>
-              <a:srgbClr val="E3E6EE"/>
+              <a:srgbClr val="E2E5E1"/>
             </a:solidFill>
             <a:prstDash val="solid"/>
           </a:ln>
@@ -6176,11 +6176,11 @@
             <a:r>
               <a:rPr lang="en-US" sz="1150" dirty="0">
                 <a:solidFill>
-                  <a:srgbClr val="3D4556"/>
-                </a:solidFill>
-                <a:latin typeface="Inter" pitchFamily="34" charset="0"/>
-                <a:ea typeface="Inter" pitchFamily="34" charset="-122"/>
-                <a:cs typeface="Inter" pitchFamily="34" charset="-120"/>
+                  <a:srgbClr val="3A423F"/>
+                </a:solidFill>
+                <a:latin typeface="Public Sans" pitchFamily="34" charset="0"/>
+                <a:ea typeface="Public Sans" pitchFamily="34" charset="-122"/>
+                <a:cs typeface="Public Sans" pitchFamily="34" charset="-120"/>
               </a:rPr>
               <a:t>Vous décidez des inventaires, de qui compte, et de la durée de conservation des données d'inventaire.</a:t>
             </a:r>
@@ -6200,11 +6200,11 @@
             <a:r>
               <a:rPr lang="en-US" sz="1150" dirty="0">
                 <a:solidFill>
-                  <a:srgbClr val="3D4556"/>
-                </a:solidFill>
-                <a:latin typeface="Inter" pitchFamily="34" charset="0"/>
-                <a:ea typeface="Inter" pitchFamily="34" charset="-122"/>
-                <a:cs typeface="Inter" pitchFamily="34" charset="-120"/>
+                  <a:srgbClr val="3A423F"/>
+                </a:solidFill>
+                <a:latin typeface="Public Sans" pitchFamily="34" charset="0"/>
+                <a:ea typeface="Public Sans" pitchFamily="34" charset="-122"/>
+                <a:cs typeface="Public Sans" pitchFamily="34" charset="-120"/>
               </a:rPr>
               <a:t>Vous informez vos salariés (une note type vous est fournie) et consultez votre CSE si votre organisation le prévoit.</a:t>
             </a:r>
@@ -6224,11 +6224,11 @@
             <a:r>
               <a:rPr lang="en-US" sz="1150" dirty="0">
                 <a:solidFill>
-                  <a:srgbClr val="3D4556"/>
-                </a:solidFill>
-                <a:latin typeface="Inter" pitchFamily="34" charset="0"/>
-                <a:ea typeface="Inter" pitchFamily="34" charset="-122"/>
-                <a:cs typeface="Inter" pitchFamily="34" charset="-120"/>
+                  <a:srgbClr val="3A423F"/>
+                </a:solidFill>
+                <a:latin typeface="Public Sans" pitchFamily="34" charset="0"/>
+                <a:ea typeface="Public Sans" pitchFamily="34" charset="-122"/>
+                <a:cs typeface="Public Sans" pitchFamily="34" charset="-120"/>
               </a:rPr>
               <a:t>En cas de violation, c'est vous qui notifiez la CNIL sous 72 heures ; nous vous prévenons sans délai et vous donnons les éléments.</a:t>
             </a:r>
@@ -6270,11 +6270,11 @@
             <a:r>
               <a:rPr lang="en-US" sz="1150" dirty="0">
                 <a:solidFill>
-                  <a:srgbClr val="3D4556"/>
-                </a:solidFill>
-                <a:latin typeface="Inter" pitchFamily="34" charset="0"/>
-                <a:ea typeface="Inter" pitchFamily="34" charset="-122"/>
-                <a:cs typeface="Inter" pitchFamily="34" charset="-120"/>
+                  <a:srgbClr val="3A423F"/>
+                </a:solidFill>
+                <a:latin typeface="Public Sans" pitchFamily="34" charset="0"/>
+                <a:ea typeface="Public Sans" pitchFamily="34" charset="-122"/>
+                <a:cs typeface="Public Sans" pitchFamily="34" charset="-120"/>
               </a:rPr>
               <a:t>Nous hébergeons, sécurisons, sauvegardons, et n'utilisons les données que pour rendre le service. Rien n'est vendu ni réutilisé.</a:t>
             </a:r>
@@ -6294,11 +6294,11 @@
             <a:r>
               <a:rPr lang="en-US" sz="1150" dirty="0">
                 <a:solidFill>
-                  <a:srgbClr val="3D4556"/>
-                </a:solidFill>
-                <a:latin typeface="Inter" pitchFamily="34" charset="0"/>
-                <a:ea typeface="Inter" pitchFamily="34" charset="-122"/>
-                <a:cs typeface="Inter" pitchFamily="34" charset="-120"/>
+                  <a:srgbClr val="3A423F"/>
+                </a:solidFill>
+                <a:latin typeface="Public Sans" pitchFamily="34" charset="0"/>
+                <a:ea typeface="Public Sans" pitchFamily="34" charset="-122"/>
+                <a:cs typeface="Public Sans" pitchFamily="34" charset="-120"/>
               </a:rPr>
               <a:t>Les clauses de sous-traitance (article 28) sont fournies à la signature, avec la liste des sous-traitants ultérieurs.</a:t>
             </a:r>
@@ -6318,11 +6318,11 @@
             <a:r>
               <a:rPr lang="en-US" sz="1150" dirty="0">
                 <a:solidFill>
-                  <a:srgbClr val="3D4556"/>
-                </a:solidFill>
-                <a:latin typeface="Inter" pitchFamily="34" charset="0"/>
-                <a:ea typeface="Inter" pitchFamily="34" charset="-122"/>
-                <a:cs typeface="Inter" pitchFamily="34" charset="-120"/>
+                  <a:srgbClr val="3A423F"/>
+                </a:solidFill>
+                <a:latin typeface="Public Sans" pitchFamily="34" charset="0"/>
+                <a:ea typeface="Public Sans" pitchFamily="34" charset="-122"/>
+                <a:cs typeface="Public Sans" pitchFamily="34" charset="-120"/>
               </a:rPr>
               <a:t>Les droits sont outillés : chaque personne télécharge ses données depuis son compte ; la suppression d'un compte conserve les comptages mais les détache du nom.</a:t>
             </a:r>
@@ -6342,11 +6342,11 @@
             <a:r>
               <a:rPr lang="en-US" sz="1150" dirty="0">
                 <a:solidFill>
-                  <a:srgbClr val="3D4556"/>
-                </a:solidFill>
-                <a:latin typeface="Inter" pitchFamily="34" charset="0"/>
-                <a:ea typeface="Inter" pitchFamily="34" charset="-122"/>
-                <a:cs typeface="Inter" pitchFamily="34" charset="-120"/>
+                  <a:srgbClr val="3A423F"/>
+                </a:solidFill>
+                <a:latin typeface="Public Sans" pitchFamily="34" charset="0"/>
+                <a:ea typeface="Public Sans" pitchFamily="34" charset="-122"/>
+                <a:cs typeface="Public Sans" pitchFamily="34" charset="-120"/>
               </a:rPr>
               <a:t>Durées : comptes tant qu'ils sont actifs, journaux un an, demandes et invitations purgées. Le suivi en direct n'est jamais enregistré.</a:t>
             </a:r>
@@ -6367,15 +6367,15 @@
           </a:xfrm>
           <a:prstGeom prst="roundRect">
             <a:avLst>
-              <a:gd name="adj" fmla="val 8421"/>
+              <a:gd name="adj" fmla="val 4211"/>
             </a:avLst>
           </a:prstGeom>
           <a:solidFill>
-            <a:srgbClr val="F4F5F9"/>
+            <a:srgbClr val="F2F3F1"/>
           </a:solidFill>
           <a:ln w="12700">
             <a:solidFill>
-              <a:srgbClr val="F4F5F9"/>
+              <a:srgbClr val="F2F3F1"/>
             </a:solidFill>
             <a:prstDash val="solid"/>
           </a:ln>
@@ -6408,11 +6408,11 @@
             <a:r>
               <a:rPr lang="en-US" sz="950" b="1" dirty="0">
                 <a:solidFill>
-                  <a:srgbClr val="5B6475"/>
-                </a:solidFill>
-                <a:latin typeface="Inter" pitchFamily="34" charset="0"/>
-                <a:ea typeface="Inter" pitchFamily="34" charset="-122"/>
-                <a:cs typeface="Inter" pitchFamily="34" charset="-120"/>
+                  <a:srgbClr val="575F5C"/>
+                </a:solidFill>
+                <a:latin typeface="Public Sans" pitchFamily="34" charset="0"/>
+                <a:ea typeface="Public Sans" pitchFamily="34" charset="-122"/>
+                <a:cs typeface="Public Sans" pitchFamily="34" charset="-120"/>
               </a:rPr>
               <a:t>Documents remis</a:t>
             </a:r>
@@ -6450,11 +6450,11 @@
             <a:r>
               <a:rPr lang="en-US" sz="1150" i="1" dirty="0">
                 <a:solidFill>
-                  <a:srgbClr val="3D4556"/>
-                </a:solidFill>
-                <a:latin typeface="Inter" pitchFamily="34" charset="0"/>
-                <a:ea typeface="Inter" pitchFamily="34" charset="-122"/>
-                <a:cs typeface="Inter" pitchFamily="34" charset="-120"/>
+                  <a:srgbClr val="3A423F"/>
+                </a:solidFill>
+                <a:latin typeface="Public Sans" pitchFamily="34" charset="0"/>
+                <a:ea typeface="Public Sans" pitchFamily="34" charset="-122"/>
+                <a:cs typeface="Public Sans" pitchFamily="34" charset="-120"/>
               </a:rPr>
               <a:t>Politique de confidentialité (publique), clauses article 28, synthèses d'audit, note d'information aux salariés, registre des traitements sur demande de votre DPO.</a:t>
             </a:r>
@@ -6489,11 +6489,11 @@
             <a:r>
               <a:rPr lang="en-US" sz="900" dirty="0">
                 <a:solidFill>
-                  <a:srgbClr val="5B6475"/>
-                </a:solidFill>
-                <a:latin typeface="Inter" pitchFamily="34" charset="0"/>
-                <a:ea typeface="Inter" pitchFamily="34" charset="-122"/>
-                <a:cs typeface="Inter" pitchFamily="34" charset="-120"/>
+                  <a:srgbClr val="575F5C"/>
+                </a:solidFill>
+                <a:latin typeface="Public Sans" pitchFamily="34" charset="0"/>
+                <a:ea typeface="Public Sans" pitchFamily="34" charset="-122"/>
+                <a:cs typeface="Public Sans" pitchFamily="34" charset="-120"/>
               </a:rPr>
               <a:t>Quantinvo · dossier technique · septembre 2026</a:t>
             </a:r>
@@ -6528,11 +6528,11 @@
             <a:r>
               <a:rPr lang="en-US" sz="900" dirty="0">
                 <a:solidFill>
-                  <a:srgbClr val="5B6475"/>
-                </a:solidFill>
-                <a:latin typeface="Inter" pitchFamily="34" charset="0"/>
-                <a:ea typeface="Inter" pitchFamily="34" charset="-122"/>
-                <a:cs typeface="Inter" pitchFamily="34" charset="-120"/>
+                  <a:srgbClr val="575F5C"/>
+                </a:solidFill>
+                <a:latin typeface="Public Sans" pitchFamily="34" charset="0"/>
+                <a:ea typeface="Public Sans" pitchFamily="34" charset="-122"/>
+                <a:cs typeface="Public Sans" pitchFamily="34" charset="-120"/>
               </a:rPr>
               <a:t>15</a:t>
             </a:r>
@@ -6623,11 +6623,11 @@
             <a:r>
               <a:rPr lang="en-US" sz="1600" b="1" dirty="0">
                 <a:solidFill>
-                  <a:srgbClr val="0B0F19"/>
-                </a:solidFill>
-                <a:latin typeface="Sora" pitchFamily="34" charset="0"/>
-                <a:ea typeface="Sora" pitchFamily="34" charset="-122"/>
-                <a:cs typeface="Sora" pitchFamily="34" charset="-120"/>
+                  <a:srgbClr val="14181A"/>
+                </a:solidFill>
+                <a:latin typeface="Archivo" pitchFamily="34" charset="0"/>
+                <a:ea typeface="Archivo" pitchFamily="34" charset="-122"/>
+                <a:cs typeface="Archivo" pitchFamily="34" charset="-120"/>
               </a:rPr>
               <a:t>Quantinvo</a:t>
             </a:r>
@@ -6662,11 +6662,11 @@
             <a:r>
               <a:rPr lang="en-US" sz="1000" dirty="0">
                 <a:solidFill>
-                  <a:srgbClr val="5B6475"/>
-                </a:solidFill>
-                <a:latin typeface="Inter" pitchFamily="34" charset="0"/>
-                <a:ea typeface="Inter" pitchFamily="34" charset="-122"/>
-                <a:cs typeface="Inter" pitchFamily="34" charset="-120"/>
+                  <a:srgbClr val="575F5C"/>
+                </a:solidFill>
+                <a:latin typeface="Public Sans" pitchFamily="34" charset="0"/>
+                <a:ea typeface="Public Sans" pitchFamily="34" charset="-122"/>
+                <a:cs typeface="Public Sans" pitchFamily="34" charset="-120"/>
               </a:rPr>
               <a:t>Pour être clair</a:t>
             </a:r>
@@ -6683,17 +6683,17 @@
         <p:spPr>
           <a:xfrm>
             <a:off x="731520" y="877824"/>
-            <a:ext cx="10725912" cy="25603"/>
+            <a:ext cx="10725912" cy="10973"/>
           </a:xfrm>
           <a:prstGeom prst="rect">
             <a:avLst/>
           </a:prstGeom>
           <a:solidFill>
-            <a:srgbClr val="38C9FF"/>
+            <a:srgbClr val="E2E5E1"/>
           </a:solidFill>
           <a:ln w="12700">
             <a:solidFill>
-              <a:srgbClr val="38C9FF"/>
+              <a:srgbClr val="E2E5E1"/>
             </a:solidFill>
             <a:prstDash val="solid"/>
           </a:ln>
@@ -6729,11 +6729,11 @@
             <a:r>
               <a:rPr lang="en-US" sz="2600" b="1" dirty="0">
                 <a:solidFill>
-                  <a:srgbClr val="4636B0"/>
-                </a:solidFill>
-                <a:latin typeface="Sora" pitchFamily="34" charset="0"/>
-                <a:ea typeface="Sora" pitchFamily="34" charset="-122"/>
-                <a:cs typeface="Sora" pitchFamily="34" charset="-120"/>
+                  <a:srgbClr val="14181A"/>
+                </a:solidFill>
+                <a:latin typeface="Archivo" pitchFamily="34" charset="0"/>
+                <a:ea typeface="Archivo" pitchFamily="34" charset="-122"/>
+                <a:cs typeface="Archivo" pitchFamily="34" charset="-120"/>
               </a:rPr>
               <a:t>Ce qui n'existe pas encore.</a:t>
             </a:r>
@@ -6771,11 +6771,11 @@
             <a:r>
               <a:rPr lang="en-US" sz="1250" i="1" dirty="0">
                 <a:solidFill>
-                  <a:srgbClr val="5B6475"/>
-                </a:solidFill>
-                <a:latin typeface="Inter" pitchFamily="34" charset="0"/>
-                <a:ea typeface="Inter" pitchFamily="34" charset="-122"/>
-                <a:cs typeface="Inter" pitchFamily="34" charset="-120"/>
+                  <a:srgbClr val="575F5C"/>
+                </a:solidFill>
+                <a:latin typeface="Public Sans" pitchFamily="34" charset="0"/>
+                <a:ea typeface="Public Sans" pitchFamily="34" charset="-122"/>
+                <a:cs typeface="Public Sans" pitchFamily="34" charset="-120"/>
               </a:rPr>
               <a:t>Rien de tout cela n'empêche de déployer. Dites-nous ce qui est une exigence chez vous, et dans quel ordre.</a:t>
             </a:r>
@@ -6816,11 +6816,11 @@
             <a:r>
               <a:rPr lang="en-US" sz="1200" b="1" dirty="0">
                 <a:solidFill>
-                  <a:srgbClr val="0B0F19"/>
-                </a:solidFill>
-                <a:latin typeface="Inter" pitchFamily="34" charset="0"/>
-                <a:ea typeface="Inter" pitchFamily="34" charset="-122"/>
-                <a:cs typeface="Inter" pitchFamily="34" charset="-120"/>
+                  <a:srgbClr val="14181A"/>
+                </a:solidFill>
+                <a:latin typeface="Public Sans" pitchFamily="34" charset="0"/>
+                <a:ea typeface="Public Sans" pitchFamily="34" charset="-122"/>
+                <a:cs typeface="Public Sans" pitchFamily="34" charset="-120"/>
               </a:rPr>
               <a:t>Connexion par votre annuaire (SAML 2.0, Entra ID). </a:t>
             </a:r>
@@ -6836,11 +6836,11 @@
             <a:r>
               <a:rPr lang="en-US" sz="1200" dirty="0">
                 <a:solidFill>
-                  <a:srgbClr val="3D4556"/>
-                </a:solidFill>
-                <a:latin typeface="Inter" pitchFamily="34" charset="0"/>
-                <a:ea typeface="Inter" pitchFamily="34" charset="-122"/>
-                <a:cs typeface="Inter" pitchFamily="34" charset="-120"/>
+                  <a:srgbClr val="3A423F"/>
+                </a:solidFill>
+                <a:latin typeface="Public Sans" pitchFamily="34" charset="0"/>
+                <a:ea typeface="Public Sans" pitchFamily="34" charset="-122"/>
+                <a:cs typeface="Public Sans" pitchFamily="34" charset="-120"/>
               </a:rPr>
               <a:t>Les comptes sont locaux, créés par invitation. Techniquement possible ; pas planifié tant qu'un client ne le demande pas.</a:t>
             </a:r>
@@ -6859,11 +6859,11 @@
             <a:r>
               <a:rPr lang="en-US" sz="1200" b="1" dirty="0">
                 <a:solidFill>
-                  <a:srgbClr val="0B0F19"/>
-                </a:solidFill>
-                <a:latin typeface="Inter" pitchFamily="34" charset="0"/>
-                <a:ea typeface="Inter" pitchFamily="34" charset="-122"/>
-                <a:cs typeface="Inter" pitchFamily="34" charset="-120"/>
+                  <a:srgbClr val="14181A"/>
+                </a:solidFill>
+                <a:latin typeface="Public Sans" pitchFamily="34" charset="0"/>
+                <a:ea typeface="Public Sans" pitchFamily="34" charset="-122"/>
+                <a:cs typeface="Public Sans" pitchFamily="34" charset="-120"/>
               </a:rPr>
               <a:t>Configuration administrée (AppConfig). </a:t>
             </a:r>
@@ -6879,11 +6879,11 @@
             <a:r>
               <a:rPr lang="en-US" sz="1200" dirty="0">
                 <a:solidFill>
-                  <a:srgbClr val="3D4556"/>
-                </a:solidFill>
-                <a:latin typeface="Inter" pitchFamily="34" charset="0"/>
-                <a:ea typeface="Inter" pitchFamily="34" charset="-122"/>
-                <a:cs typeface="Inter" pitchFamily="34" charset="-120"/>
+                  <a:srgbClr val="3A423F"/>
+                </a:solidFill>
+                <a:latin typeface="Public Sans" pitchFamily="34" charset="0"/>
+                <a:ea typeface="Public Sans" pitchFamily="34" charset="-122"/>
+                <a:cs typeface="Public Sans" pitchFamily="34" charset="-120"/>
               </a:rPr>
               <a:t>Pré-remplir l'adresse e-mail ou le magasin depuis votre MDM, pour que la personne n'ait rien à saisir au premier lancement.</a:t>
             </a:r>
@@ -6902,11 +6902,11 @@
             <a:r>
               <a:rPr lang="en-US" sz="1200" b="1" dirty="0">
                 <a:solidFill>
-                  <a:srgbClr val="0B0F19"/>
-                </a:solidFill>
-                <a:latin typeface="Inter" pitchFamily="34" charset="0"/>
-                <a:ea typeface="Inter" pitchFamily="34" charset="-122"/>
-                <a:cs typeface="Inter" pitchFamily="34" charset="-120"/>
+                  <a:srgbClr val="14181A"/>
+                </a:solidFill>
+                <a:latin typeface="Public Sans" pitchFamily="34" charset="0"/>
+                <a:ea typeface="Public Sans" pitchFamily="34" charset="-122"/>
+                <a:cs typeface="Public Sans" pitchFamily="34" charset="-120"/>
               </a:rPr>
               <a:t>Publication sur Google Play. </a:t>
             </a:r>
@@ -6922,11 +6922,11 @@
             <a:r>
               <a:rPr lang="en-US" sz="1200" dirty="0">
                 <a:solidFill>
-                  <a:srgbClr val="3D4556"/>
-                </a:solidFill>
-                <a:latin typeface="Inter" pitchFamily="34" charset="0"/>
-                <a:ea typeface="Inter" pitchFamily="34" charset="-122"/>
-                <a:cs typeface="Inter" pitchFamily="34" charset="-120"/>
+                  <a:srgbClr val="3A423F"/>
+                </a:solidFill>
+                <a:latin typeface="Public Sans" pitchFamily="34" charset="0"/>
+                <a:ea typeface="Public Sans" pitchFamily="34" charset="-122"/>
+                <a:cs typeface="Public Sans" pitchFamily="34" charset="-120"/>
               </a:rPr>
               <a:t>L'application tourne sur Android ; sa mise en ligne est en cours. En attendant, l'APK se distribue par votre catalogue — ce qui est de toute façon le chemin d'un parc géré.</a:t>
             </a:r>
@@ -6945,11 +6945,11 @@
             <a:r>
               <a:rPr lang="en-US" sz="1200" b="1" dirty="0">
                 <a:solidFill>
-                  <a:srgbClr val="0B0F19"/>
-                </a:solidFill>
-                <a:latin typeface="Inter" pitchFamily="34" charset="0"/>
-                <a:ea typeface="Inter" pitchFamily="34" charset="-122"/>
-                <a:cs typeface="Inter" pitchFamily="34" charset="-120"/>
+                  <a:srgbClr val="14181A"/>
+                </a:solidFill>
+                <a:latin typeface="Public Sans" pitchFamily="34" charset="0"/>
+                <a:ea typeface="Public Sans" pitchFamily="34" charset="-122"/>
+                <a:cs typeface="Public Sans" pitchFamily="34" charset="-120"/>
               </a:rPr>
               <a:t>API et connecteur ERP. </a:t>
             </a:r>
@@ -6965,11 +6965,11 @@
             <a:r>
               <a:rPr lang="en-US" sz="1200" dirty="0">
                 <a:solidFill>
-                  <a:srgbClr val="3D4556"/>
-                </a:solidFill>
-                <a:latin typeface="Inter" pitchFamily="34" charset="0"/>
-                <a:ea typeface="Inter" pitchFamily="34" charset="-122"/>
-                <a:cs typeface="Inter" pitchFamily="34" charset="-120"/>
+                  <a:srgbClr val="3A423F"/>
+                </a:solidFill>
+                <a:latin typeface="Public Sans" pitchFamily="34" charset="0"/>
+                <a:ea typeface="Public Sans" pitchFamily="34" charset="-122"/>
+                <a:cs typeface="Public Sans" pitchFamily="34" charset="-120"/>
               </a:rPr>
               <a:t>L'échange se fait par fichiers : import CSV ou Excel, export Excel. Un connecteur viendra avec le premier client qui en a besoin, pas avant.</a:t>
             </a:r>
@@ -6988,11 +6988,11 @@
             <a:r>
               <a:rPr lang="en-US" sz="1200" b="1" dirty="0">
                 <a:solidFill>
-                  <a:srgbClr val="0B0F19"/>
-                </a:solidFill>
-                <a:latin typeface="Inter" pitchFamily="34" charset="0"/>
-                <a:ea typeface="Inter" pitchFamily="34" charset="-122"/>
-                <a:cs typeface="Inter" pitchFamily="34" charset="-120"/>
+                  <a:srgbClr val="14181A"/>
+                </a:solidFill>
+                <a:latin typeface="Public Sans" pitchFamily="34" charset="0"/>
+                <a:ea typeface="Public Sans" pitchFamily="34" charset="-122"/>
+                <a:cs typeface="Public Sans" pitchFamily="34" charset="-120"/>
               </a:rPr>
               <a:t>Codes de secours pour la double authentification. </a:t>
             </a:r>
@@ -7008,11 +7008,11 @@
             <a:r>
               <a:rPr lang="en-US" sz="1200" dirty="0">
                 <a:solidFill>
-                  <a:srgbClr val="3D4556"/>
-                </a:solidFill>
-                <a:latin typeface="Inter" pitchFamily="34" charset="0"/>
-                <a:ea typeface="Inter" pitchFamily="34" charset="-122"/>
-                <a:cs typeface="Inter" pitchFamily="34" charset="-120"/>
+                  <a:srgbClr val="3A423F"/>
+                </a:solidFill>
+                <a:latin typeface="Public Sans" pitchFamily="34" charset="0"/>
+                <a:ea typeface="Public Sans" pitchFamily="34" charset="-122"/>
+                <a:cs typeface="Public Sans" pitchFamily="34" charset="-120"/>
               </a:rPr>
               <a:t>Un téléphone perdu se dépanne par nous, sur demande de votre administrateur. C'est dit avant l'activation, pas après la perte.</a:t>
             </a:r>
@@ -7047,11 +7047,11 @@
             <a:r>
               <a:rPr lang="en-US" sz="900" dirty="0">
                 <a:solidFill>
-                  <a:srgbClr val="5B6475"/>
-                </a:solidFill>
-                <a:latin typeface="Inter" pitchFamily="34" charset="0"/>
-                <a:ea typeface="Inter" pitchFamily="34" charset="-122"/>
-                <a:cs typeface="Inter" pitchFamily="34" charset="-120"/>
+                  <a:srgbClr val="575F5C"/>
+                </a:solidFill>
+                <a:latin typeface="Public Sans" pitchFamily="34" charset="0"/>
+                <a:ea typeface="Public Sans" pitchFamily="34" charset="-122"/>
+                <a:cs typeface="Public Sans" pitchFamily="34" charset="-120"/>
               </a:rPr>
               <a:t>Quantinvo · dossier technique · septembre 2026</a:t>
             </a:r>
@@ -7086,11 +7086,11 @@
             <a:r>
               <a:rPr lang="en-US" sz="900" dirty="0">
                 <a:solidFill>
-                  <a:srgbClr val="5B6475"/>
-                </a:solidFill>
-                <a:latin typeface="Inter" pitchFamily="34" charset="0"/>
-                <a:ea typeface="Inter" pitchFamily="34" charset="-122"/>
-                <a:cs typeface="Inter" pitchFamily="34" charset="-120"/>
+                  <a:srgbClr val="575F5C"/>
+                </a:solidFill>
+                <a:latin typeface="Public Sans" pitchFamily="34" charset="0"/>
+                <a:ea typeface="Public Sans" pitchFamily="34" charset="-122"/>
+                <a:cs typeface="Public Sans" pitchFamily="34" charset="-120"/>
               </a:rPr>
               <a:t>16</a:t>
             </a:r>
@@ -7181,11 +7181,11 @@
             <a:r>
               <a:rPr lang="en-US" sz="2400" b="1" dirty="0">
                 <a:solidFill>
-                  <a:srgbClr val="0B0F19"/>
-                </a:solidFill>
-                <a:latin typeface="Sora" pitchFamily="34" charset="0"/>
-                <a:ea typeface="Sora" pitchFamily="34" charset="-122"/>
-                <a:cs typeface="Sora" pitchFamily="34" charset="-120"/>
+                  <a:srgbClr val="14181A"/>
+                </a:solidFill>
+                <a:latin typeface="Archivo" pitchFamily="34" charset="0"/>
+                <a:ea typeface="Archivo" pitchFamily="34" charset="-122"/>
+                <a:cs typeface="Archivo" pitchFamily="34" charset="-120"/>
               </a:rPr>
               <a:t>Quantinvo</a:t>
             </a:r>
@@ -7202,17 +7202,17 @@
         <p:spPr>
           <a:xfrm>
             <a:off x="731520" y="1481328"/>
-            <a:ext cx="2377440" cy="25603"/>
+            <a:ext cx="2011680" cy="20117"/>
           </a:xfrm>
           <a:prstGeom prst="rect">
             <a:avLst/>
           </a:prstGeom>
           <a:solidFill>
-            <a:srgbClr val="38C9FF"/>
+            <a:srgbClr val="14181A"/>
           </a:solidFill>
           <a:ln w="12700">
             <a:solidFill>
-              <a:srgbClr val="38C9FF"/>
+              <a:srgbClr val="14181A"/>
             </a:solidFill>
             <a:prstDash val="solid"/>
           </a:ln>
@@ -7248,11 +7248,11 @@
             <a:r>
               <a:rPr lang="en-US" sz="3600" b="1" dirty="0">
                 <a:solidFill>
-                  <a:srgbClr val="4636B0"/>
-                </a:solidFill>
-                <a:latin typeface="Sora" pitchFamily="34" charset="0"/>
-                <a:ea typeface="Sora" pitchFamily="34" charset="-122"/>
-                <a:cs typeface="Sora" pitchFamily="34" charset="-120"/>
+                  <a:srgbClr val="14181A"/>
+                </a:solidFill>
+                <a:latin typeface="Archivo" pitchFamily="34" charset="0"/>
+                <a:ea typeface="Archivo" pitchFamily="34" charset="-122"/>
+                <a:cs typeface="Archivo" pitchFamily="34" charset="-120"/>
               </a:rPr>
               <a:t>Ce qu’on vous remet, et à qui.</a:t>
             </a:r>
@@ -7290,11 +7290,11 @@
             <a:r>
               <a:rPr lang="en-US" sz="1450" dirty="0">
                 <a:solidFill>
-                  <a:srgbClr val="3D4556"/>
-                </a:solidFill>
-                <a:latin typeface="Inter" pitchFamily="34" charset="0"/>
-                <a:ea typeface="Inter" pitchFamily="34" charset="-122"/>
-                <a:cs typeface="Inter" pitchFamily="34" charset="-120"/>
+                  <a:srgbClr val="3A423F"/>
+                </a:solidFill>
+                <a:latin typeface="Public Sans" pitchFamily="34" charset="0"/>
+                <a:ea typeface="Public Sans" pitchFamily="34" charset="-122"/>
+                <a:cs typeface="Public Sans" pitchFamily="34" charset="-120"/>
               </a:rPr>
               <a:t>La fiche de déploiement MDM pour l'équipe parc. La politique de confidentialité, les clauses article 28 et les synthèses d'audit pour votre DPO. Le guide de prise en main pour vos superviseurs — remis en présentation, et consultable à tout moment depuis leur espace, où il s'imprime pour la réserve. La note d'information aux salariés pour vos RH. Et un interlocuteur qui répond.</a:t>
             </a:r>
@@ -7329,11 +7329,11 @@
             <a:r>
               <a:rPr lang="en-US" sz="1500" b="1" dirty="0">
                 <a:solidFill>
-                  <a:srgbClr val="4636B0"/>
-                </a:solidFill>
-                <a:latin typeface="Sora" pitchFamily="34" charset="0"/>
-                <a:ea typeface="Sora" pitchFamily="34" charset="-122"/>
-                <a:cs typeface="Sora" pitchFamily="34" charset="-120"/>
+                  <a:srgbClr val="14181A"/>
+                </a:solidFill>
+                <a:latin typeface="Archivo" pitchFamily="34" charset="0"/>
+                <a:ea typeface="Archivo" pitchFamily="34" charset="-122"/>
+                <a:cs typeface="Archivo" pitchFamily="34" charset="-120"/>
               </a:rPr>
               <a:t>contact@quantinvo.com   ·   www.quantinvo.com</a:t>
             </a:r>
@@ -7368,11 +7368,11 @@
             <a:r>
               <a:rPr lang="en-US" sz="1050" dirty="0">
                 <a:solidFill>
-                  <a:srgbClr val="5B6475"/>
-                </a:solidFill>
-                <a:latin typeface="Inter" pitchFamily="34" charset="0"/>
-                <a:ea typeface="Inter" pitchFamily="34" charset="-122"/>
-                <a:cs typeface="Inter" pitchFamily="34" charset="-120"/>
+                  <a:srgbClr val="575F5C"/>
+                </a:solidFill>
+                <a:latin typeface="Public Sans" pitchFamily="34" charset="0"/>
+                <a:ea typeface="Public Sans" pitchFamily="34" charset="-122"/>
+                <a:cs typeface="Public Sans" pitchFamily="34" charset="-120"/>
               </a:rPr>
               <a:t>Quantinvo, par Devkaylab. L’outil d’inventaire pour le commerce.</a:t>
             </a:r>
@@ -7463,11 +7463,11 @@
             <a:r>
               <a:rPr lang="en-US" sz="1600" b="1" dirty="0">
                 <a:solidFill>
-                  <a:srgbClr val="0B0F19"/>
-                </a:solidFill>
-                <a:latin typeface="Sora" pitchFamily="34" charset="0"/>
-                <a:ea typeface="Sora" pitchFamily="34" charset="-122"/>
-                <a:cs typeface="Sora" pitchFamily="34" charset="-120"/>
+                  <a:srgbClr val="14181A"/>
+                </a:solidFill>
+                <a:latin typeface="Archivo" pitchFamily="34" charset="0"/>
+                <a:ea typeface="Archivo" pitchFamily="34" charset="-122"/>
+                <a:cs typeface="Archivo" pitchFamily="34" charset="-120"/>
               </a:rPr>
               <a:t>Quantinvo</a:t>
             </a:r>
@@ -7502,11 +7502,11 @@
             <a:r>
               <a:rPr lang="en-US" sz="1000" dirty="0">
                 <a:solidFill>
-                  <a:srgbClr val="5B6475"/>
-                </a:solidFill>
-                <a:latin typeface="Inter" pitchFamily="34" charset="0"/>
-                <a:ea typeface="Inter" pitchFamily="34" charset="-122"/>
-                <a:cs typeface="Inter" pitchFamily="34" charset="-120"/>
+                  <a:srgbClr val="575F5C"/>
+                </a:solidFill>
+                <a:latin typeface="Public Sans" pitchFamily="34" charset="0"/>
+                <a:ea typeface="Public Sans" pitchFamily="34" charset="-122"/>
+                <a:cs typeface="Public Sans" pitchFamily="34" charset="-120"/>
               </a:rPr>
               <a:t>En une page</a:t>
             </a:r>
@@ -7523,17 +7523,17 @@
         <p:spPr>
           <a:xfrm>
             <a:off x="731520" y="877824"/>
-            <a:ext cx="10725912" cy="25603"/>
+            <a:ext cx="10725912" cy="10973"/>
           </a:xfrm>
           <a:prstGeom prst="rect">
             <a:avLst/>
           </a:prstGeom>
           <a:solidFill>
-            <a:srgbClr val="38C9FF"/>
+            <a:srgbClr val="E2E5E1"/>
           </a:solidFill>
           <a:ln w="12700">
             <a:solidFill>
-              <a:srgbClr val="38C9FF"/>
+              <a:srgbClr val="E2E5E1"/>
             </a:solidFill>
             <a:prstDash val="solid"/>
           </a:ln>
@@ -7569,11 +7569,11 @@
             <a:r>
               <a:rPr lang="en-US" sz="2600" b="1" dirty="0">
                 <a:solidFill>
-                  <a:srgbClr val="4636B0"/>
-                </a:solidFill>
-                <a:latin typeface="Sora" pitchFamily="34" charset="0"/>
-                <a:ea typeface="Sora" pitchFamily="34" charset="-122"/>
-                <a:cs typeface="Sora" pitchFamily="34" charset="-120"/>
+                  <a:srgbClr val="14181A"/>
+                </a:solidFill>
+                <a:latin typeface="Archivo" pitchFamily="34" charset="0"/>
+                <a:ea typeface="Archivo" pitchFamily="34" charset="-122"/>
+                <a:cs typeface="Archivo" pitchFamily="34" charset="-120"/>
               </a:rPr>
               <a:t>Une application mobile, un site web, et rien à installer chez vous.</a:t>
             </a:r>
@@ -7614,11 +7614,11 @@
             <a:r>
               <a:rPr lang="en-US" sz="1300" b="1" dirty="0">
                 <a:solidFill>
-                  <a:srgbClr val="0B0F19"/>
-                </a:solidFill>
-                <a:latin typeface="Inter" pitchFamily="34" charset="0"/>
-                <a:ea typeface="Inter" pitchFamily="34" charset="-122"/>
-                <a:cs typeface="Inter" pitchFamily="34" charset="-120"/>
+                  <a:srgbClr val="14181A"/>
+                </a:solidFill>
+                <a:latin typeface="Public Sans" pitchFamily="34" charset="0"/>
+                <a:ea typeface="Public Sans" pitchFamily="34" charset="-122"/>
+                <a:cs typeface="Public Sans" pitchFamily="34" charset="-120"/>
               </a:rPr>
               <a:t>Ce que c’est. </a:t>
             </a:r>
@@ -7634,11 +7634,11 @@
             <a:r>
               <a:rPr lang="en-US" sz="1300" dirty="0">
                 <a:solidFill>
-                  <a:srgbClr val="3D4556"/>
-                </a:solidFill>
-                <a:latin typeface="Inter" pitchFamily="34" charset="0"/>
-                <a:ea typeface="Inter" pitchFamily="34" charset="-122"/>
-                <a:cs typeface="Inter" pitchFamily="34" charset="-120"/>
+                  <a:srgbClr val="3A423F"/>
+                </a:solidFill>
+                <a:latin typeface="Public Sans" pitchFamily="34" charset="0"/>
+                <a:ea typeface="Public Sans" pitchFamily="34" charset="-122"/>
+                <a:cs typeface="Public Sans" pitchFamily="34" charset="-120"/>
               </a:rPr>
               <a:t>Une application sur iPhone (Android en cours de publication) pour les personnes qui comptent, un site web pour celles qui pilotent, et une base de données hébergée en Irlande qui relie les deux.</a:t>
             </a:r>
@@ -7657,11 +7657,11 @@
             <a:r>
               <a:rPr lang="en-US" sz="1300" b="1" dirty="0">
                 <a:solidFill>
-                  <a:srgbClr val="0B0F19"/>
-                </a:solidFill>
-                <a:latin typeface="Inter" pitchFamily="34" charset="0"/>
-                <a:ea typeface="Inter" pitchFamily="34" charset="-122"/>
-                <a:cs typeface="Inter" pitchFamily="34" charset="-120"/>
+                  <a:srgbClr val="14181A"/>
+                </a:solidFill>
+                <a:latin typeface="Public Sans" pitchFamily="34" charset="0"/>
+                <a:ea typeface="Public Sans" pitchFamily="34" charset="-122"/>
+                <a:cs typeface="Public Sans" pitchFamily="34" charset="-120"/>
               </a:rPr>
               <a:t>Ce que ça touche chez vous. </a:t>
             </a:r>
@@ -7677,11 +7677,11 @@
             <a:r>
               <a:rPr lang="en-US" sz="1300" dirty="0">
                 <a:solidFill>
-                  <a:srgbClr val="3D4556"/>
-                </a:solidFill>
-                <a:latin typeface="Inter" pitchFamily="34" charset="0"/>
-                <a:ea typeface="Inter" pitchFamily="34" charset="-122"/>
-                <a:cs typeface="Inter" pitchFamily="34" charset="-120"/>
+                  <a:srgbClr val="3A423F"/>
+                </a:solidFill>
+                <a:latin typeface="Public Sans" pitchFamily="34" charset="0"/>
+                <a:ea typeface="Public Sans" pitchFamily="34" charset="-122"/>
+                <a:cs typeface="Public Sans" pitchFamily="34" charset="-120"/>
               </a:rPr>
               <a:t>Les téléphones qui comptent, votre réseau sortant en HTTPS, et un compte nominatif par personne. C'est tout.</a:t>
             </a:r>
@@ -7700,11 +7700,11 @@
             <a:r>
               <a:rPr lang="en-US" sz="1300" b="1" dirty="0">
                 <a:solidFill>
-                  <a:srgbClr val="0B0F19"/>
-                </a:solidFill>
-                <a:latin typeface="Inter" pitchFamily="34" charset="0"/>
-                <a:ea typeface="Inter" pitchFamily="34" charset="-122"/>
-                <a:cs typeface="Inter" pitchFamily="34" charset="-120"/>
+                  <a:srgbClr val="14181A"/>
+                </a:solidFill>
+                <a:latin typeface="Public Sans" pitchFamily="34" charset="0"/>
+                <a:ea typeface="Public Sans" pitchFamily="34" charset="-122"/>
+                <a:cs typeface="Public Sans" pitchFamily="34" charset="-120"/>
               </a:rPr>
               <a:t>Ce que ça n'exige pas. </a:t>
             </a:r>
@@ -7720,11 +7720,11 @@
             <a:r>
               <a:rPr lang="en-US" sz="1300" dirty="0">
                 <a:solidFill>
-                  <a:srgbClr val="3D4556"/>
-                </a:solidFill>
-                <a:latin typeface="Inter" pitchFamily="34" charset="0"/>
-                <a:ea typeface="Inter" pitchFamily="34" charset="-122"/>
-                <a:cs typeface="Inter" pitchFamily="34" charset="-120"/>
+                  <a:srgbClr val="3A423F"/>
+                </a:solidFill>
+                <a:latin typeface="Public Sans" pitchFamily="34" charset="0"/>
+                <a:ea typeface="Public Sans" pitchFamily="34" charset="-122"/>
+                <a:cs typeface="Public Sans" pitchFamily="34" charset="-120"/>
               </a:rPr>
               <a:t>Aucun serveur chez vous, aucun VPN, aucun terminal dédié, aucune intégration obligatoire avec votre système de gestion. On importe un fichier, on rend un Excel.</a:t>
             </a:r>
@@ -7743,11 +7743,11 @@
             <a:r>
               <a:rPr lang="en-US" sz="1300" b="1" dirty="0">
                 <a:solidFill>
-                  <a:srgbClr val="0B0F19"/>
-                </a:solidFill>
-                <a:latin typeface="Inter" pitchFamily="34" charset="0"/>
-                <a:ea typeface="Inter" pitchFamily="34" charset="-122"/>
-                <a:cs typeface="Inter" pitchFamily="34" charset="-120"/>
+                  <a:srgbClr val="14181A"/>
+                </a:solidFill>
+                <a:latin typeface="Public Sans" pitchFamily="34" charset="0"/>
+                <a:ea typeface="Public Sans" pitchFamily="34" charset="-122"/>
+                <a:cs typeface="Public Sans" pitchFamily="34" charset="-120"/>
               </a:rPr>
               <a:t>Ce que ça demande de votre part. </a:t>
             </a:r>
@@ -7763,11 +7763,11 @@
             <a:r>
               <a:rPr lang="en-US" sz="1300" dirty="0">
                 <a:solidFill>
-                  <a:srgbClr val="3D4556"/>
-                </a:solidFill>
-                <a:latin typeface="Inter" pitchFamily="34" charset="0"/>
-                <a:ea typeface="Inter" pitchFamily="34" charset="-122"/>
-                <a:cs typeface="Inter" pitchFamily="34" charset="-120"/>
+                  <a:srgbClr val="3A423F"/>
+                </a:solidFill>
+                <a:latin typeface="Public Sans" pitchFamily="34" charset="0"/>
+                <a:ea typeface="Public Sans" pitchFamily="34" charset="-122"/>
+                <a:cs typeface="Public Sans" pitchFamily="34" charset="-120"/>
               </a:rPr>
               <a:t>Autoriser l'application dans votre catalogue, laisser la caméra et trois adresses réseau accessibles, et ne pas effacer un téléphone pendant un comptage hors ligne. Les pages suivantes détaillent chacun de ces points.</a:t>
             </a:r>
@@ -7802,11 +7802,11 @@
             <a:r>
               <a:rPr lang="en-US" sz="900" dirty="0">
                 <a:solidFill>
-                  <a:srgbClr val="5B6475"/>
-                </a:solidFill>
-                <a:latin typeface="Inter" pitchFamily="34" charset="0"/>
-                <a:ea typeface="Inter" pitchFamily="34" charset="-122"/>
-                <a:cs typeface="Inter" pitchFamily="34" charset="-120"/>
+                  <a:srgbClr val="575F5C"/>
+                </a:solidFill>
+                <a:latin typeface="Public Sans" pitchFamily="34" charset="0"/>
+                <a:ea typeface="Public Sans" pitchFamily="34" charset="-122"/>
+                <a:cs typeface="Public Sans" pitchFamily="34" charset="-120"/>
               </a:rPr>
               <a:t>Quantinvo · dossier technique · septembre 2026</a:t>
             </a:r>
@@ -7841,11 +7841,11 @@
             <a:r>
               <a:rPr lang="en-US" sz="900" dirty="0">
                 <a:solidFill>
-                  <a:srgbClr val="5B6475"/>
-                </a:solidFill>
-                <a:latin typeface="Inter" pitchFamily="34" charset="0"/>
-                <a:ea typeface="Inter" pitchFamily="34" charset="-122"/>
-                <a:cs typeface="Inter" pitchFamily="34" charset="-120"/>
+                  <a:srgbClr val="575F5C"/>
+                </a:solidFill>
+                <a:latin typeface="Public Sans" pitchFamily="34" charset="0"/>
+                <a:ea typeface="Public Sans" pitchFamily="34" charset="-122"/>
+                <a:cs typeface="Public Sans" pitchFamily="34" charset="-120"/>
               </a:rPr>
               <a:t>2</a:t>
             </a:r>
@@ -7936,11 +7936,11 @@
             <a:r>
               <a:rPr lang="en-US" sz="1600" b="1" dirty="0">
                 <a:solidFill>
-                  <a:srgbClr val="0B0F19"/>
-                </a:solidFill>
-                <a:latin typeface="Sora" pitchFamily="34" charset="0"/>
-                <a:ea typeface="Sora" pitchFamily="34" charset="-122"/>
-                <a:cs typeface="Sora" pitchFamily="34" charset="-120"/>
+                  <a:srgbClr val="14181A"/>
+                </a:solidFill>
+                <a:latin typeface="Archivo" pitchFamily="34" charset="0"/>
+                <a:ea typeface="Archivo" pitchFamily="34" charset="-122"/>
+                <a:cs typeface="Archivo" pitchFamily="34" charset="-120"/>
               </a:rPr>
               <a:t>Quantinvo</a:t>
             </a:r>
@@ -7975,11 +7975,11 @@
             <a:r>
               <a:rPr lang="en-US" sz="1000" dirty="0">
                 <a:solidFill>
-                  <a:srgbClr val="5B6475"/>
-                </a:solidFill>
-                <a:latin typeface="Inter" pitchFamily="34" charset="0"/>
-                <a:ea typeface="Inter" pitchFamily="34" charset="-122"/>
-                <a:cs typeface="Inter" pitchFamily="34" charset="-120"/>
+                  <a:srgbClr val="575F5C"/>
+                </a:solidFill>
+                <a:latin typeface="Public Sans" pitchFamily="34" charset="0"/>
+                <a:ea typeface="Public Sans" pitchFamily="34" charset="-122"/>
+                <a:cs typeface="Public Sans" pitchFamily="34" charset="-120"/>
               </a:rPr>
               <a:t>Architecture</a:t>
             </a:r>
@@ -7996,17 +7996,17 @@
         <p:spPr>
           <a:xfrm>
             <a:off x="731520" y="877824"/>
-            <a:ext cx="10725912" cy="25603"/>
+            <a:ext cx="10725912" cy="10973"/>
           </a:xfrm>
           <a:prstGeom prst="rect">
             <a:avLst/>
           </a:prstGeom>
           <a:solidFill>
-            <a:srgbClr val="38C9FF"/>
+            <a:srgbClr val="E2E5E1"/>
           </a:solidFill>
           <a:ln w="12700">
             <a:solidFill>
-              <a:srgbClr val="38C9FF"/>
+              <a:srgbClr val="E2E5E1"/>
             </a:solidFill>
             <a:prstDash val="solid"/>
           </a:ln>
@@ -8042,11 +8042,11 @@
             <a:r>
               <a:rPr lang="en-US" sz="2600" b="1" dirty="0">
                 <a:solidFill>
-                  <a:srgbClr val="4636B0"/>
-                </a:solidFill>
-                <a:latin typeface="Sora" pitchFamily="34" charset="0"/>
-                <a:ea typeface="Sora" pitchFamily="34" charset="-122"/>
-                <a:cs typeface="Sora" pitchFamily="34" charset="-120"/>
+                  <a:srgbClr val="14181A"/>
+                </a:solidFill>
+                <a:latin typeface="Archivo" pitchFamily="34" charset="0"/>
+                <a:ea typeface="Archivo" pitchFamily="34" charset="-122"/>
+                <a:cs typeface="Archivo" pitchFamily="34" charset="-120"/>
               </a:rPr>
               <a:t>Comment les pièces se parlent</a:t>
             </a:r>
@@ -8067,15 +8067,15 @@
           </a:xfrm>
           <a:prstGeom prst="roundRect">
             <a:avLst>
-              <a:gd name="adj" fmla="val 5405"/>
+              <a:gd name="adj" fmla="val 2162"/>
             </a:avLst>
           </a:prstGeom>
           <a:solidFill>
-            <a:srgbClr val="F4F5F9"/>
+            <a:srgbClr val="F2F3F1"/>
           </a:solidFill>
           <a:ln w="12700">
             <a:solidFill>
-              <a:srgbClr val="E3E6EE"/>
+              <a:srgbClr val="E2E5E1"/>
             </a:solidFill>
             <a:prstDash val="solid"/>
           </a:ln>
@@ -8108,11 +8108,11 @@
             <a:r>
               <a:rPr lang="en-US" sz="1250" b="1" dirty="0">
                 <a:solidFill>
-                  <a:srgbClr val="0B0F19"/>
-                </a:solidFill>
-                <a:latin typeface="Sora" pitchFamily="34" charset="0"/>
-                <a:ea typeface="Sora" pitchFamily="34" charset="-122"/>
-                <a:cs typeface="Sora" pitchFamily="34" charset="-120"/>
+                  <a:srgbClr val="14181A"/>
+                </a:solidFill>
+                <a:latin typeface="Archivo" pitchFamily="34" charset="0"/>
+                <a:ea typeface="Archivo" pitchFamily="34" charset="-122"/>
+                <a:cs typeface="Archivo" pitchFamily="34" charset="-120"/>
               </a:rPr>
               <a:t>Téléphones des compteurs</a:t>
             </a:r>
@@ -8150,11 +8150,11 @@
             <a:r>
               <a:rPr lang="en-US" sz="1050" dirty="0">
                 <a:solidFill>
-                  <a:srgbClr val="3D4556"/>
-                </a:solidFill>
-                <a:latin typeface="Inter" pitchFamily="34" charset="0"/>
-                <a:ea typeface="Inter" pitchFamily="34" charset="-122"/>
-                <a:cs typeface="Inter" pitchFamily="34" charset="-120"/>
+                  <a:srgbClr val="3A423F"/>
+                </a:solidFill>
+                <a:latin typeface="Public Sans" pitchFamily="34" charset="0"/>
+                <a:ea typeface="Public Sans" pitchFamily="34" charset="-122"/>
+                <a:cs typeface="Public Sans" pitchFamily="34" charset="-120"/>
               </a:rPr>
               <a:t>Application Quantinvo (iOS, Android en cours de publication).</a:t>
             </a:r>
@@ -8170,11 +8170,11 @@
             <a:r>
               <a:rPr lang="en-US" sz="1050" dirty="0">
                 <a:solidFill>
-                  <a:srgbClr val="3D4556"/>
-                </a:solidFill>
-                <a:latin typeface="Inter" pitchFamily="34" charset="0"/>
-                <a:ea typeface="Inter" pitchFamily="34" charset="-122"/>
-                <a:cs typeface="Inter" pitchFamily="34" charset="-120"/>
+                  <a:srgbClr val="3A423F"/>
+                </a:solidFill>
+                <a:latin typeface="Public Sans" pitchFamily="34" charset="0"/>
+                <a:ea typeface="Public Sans" pitchFamily="34" charset="-122"/>
+                <a:cs typeface="Public Sans" pitchFamily="34" charset="-120"/>
               </a:rPr>
               <a:t>Scan par la caméra ; comptages gardés sur l’appareil hors réseau, renvoyés au retour.</a:t>
             </a:r>
@@ -8195,15 +8195,15 @@
           </a:xfrm>
           <a:prstGeom prst="roundRect">
             <a:avLst>
-              <a:gd name="adj" fmla="val 5405"/>
+              <a:gd name="adj" fmla="val 2162"/>
             </a:avLst>
           </a:prstGeom>
           <a:solidFill>
-            <a:srgbClr val="EEEEFC"/>
+            <a:srgbClr val="E7EDE9"/>
           </a:solidFill>
           <a:ln w="12700">
             <a:solidFill>
-              <a:srgbClr val="6366F1"/>
+              <a:srgbClr val="1E4D3B"/>
             </a:solidFill>
             <a:prstDash val="solid"/>
           </a:ln>
@@ -8236,11 +8236,11 @@
             <a:r>
               <a:rPr lang="en-US" sz="1250" b="1" dirty="0">
                 <a:solidFill>
-                  <a:srgbClr val="0B0F19"/>
-                </a:solidFill>
-                <a:latin typeface="Sora" pitchFamily="34" charset="0"/>
-                <a:ea typeface="Sora" pitchFamily="34" charset="-122"/>
-                <a:cs typeface="Sora" pitchFamily="34" charset="-120"/>
+                  <a:srgbClr val="14181A"/>
+                </a:solidFill>
+                <a:latin typeface="Archivo" pitchFamily="34" charset="0"/>
+                <a:ea typeface="Archivo" pitchFamily="34" charset="-122"/>
+                <a:cs typeface="Archivo" pitchFamily="34" charset="-120"/>
               </a:rPr>
               <a:t>Base et services, Irlande</a:t>
             </a:r>
@@ -8278,11 +8278,11 @@
             <a:r>
               <a:rPr lang="en-US" sz="1050" dirty="0">
                 <a:solidFill>
-                  <a:srgbClr val="3D4556"/>
-                </a:solidFill>
-                <a:latin typeface="Inter" pitchFamily="34" charset="0"/>
-                <a:ea typeface="Inter" pitchFamily="34" charset="-122"/>
-                <a:cs typeface="Inter" pitchFamily="34" charset="-120"/>
+                  <a:srgbClr val="3A423F"/>
+                </a:solidFill>
+                <a:latin typeface="Public Sans" pitchFamily="34" charset="0"/>
+                <a:ea typeface="Public Sans" pitchFamily="34" charset="-122"/>
+                <a:cs typeface="Public Sans" pitchFamily="34" charset="-120"/>
               </a:rPr>
               <a:t>Postgres, authentification, temps réel, fonctions serveur. Hébergé par Supabase, région eu-west-1.</a:t>
             </a:r>
@@ -8298,11 +8298,11 @@
             <a:r>
               <a:rPr lang="en-US" sz="1050" dirty="0">
                 <a:solidFill>
-                  <a:srgbClr val="3D4556"/>
-                </a:solidFill>
-                <a:latin typeface="Inter" pitchFamily="34" charset="0"/>
-                <a:ea typeface="Inter" pitchFamily="34" charset="-122"/>
-                <a:cs typeface="Inter" pitchFamily="34" charset="-120"/>
+                  <a:srgbClr val="3A423F"/>
+                </a:solidFill>
+                <a:latin typeface="Public Sans" pitchFamily="34" charset="0"/>
+                <a:ea typeface="Public Sans" pitchFamily="34" charset="-122"/>
+                <a:cs typeface="Public Sans" pitchFamily="34" charset="-120"/>
               </a:rPr>
               <a:t>Chaque requête est filtrée côté serveur, par entreprise et par rôle.</a:t>
             </a:r>
@@ -8323,15 +8323,15 @@
           </a:xfrm>
           <a:prstGeom prst="roundRect">
             <a:avLst>
-              <a:gd name="adj" fmla="val 5405"/>
+              <a:gd name="adj" fmla="val 2162"/>
             </a:avLst>
           </a:prstGeom>
           <a:solidFill>
-            <a:srgbClr val="F4F5F9"/>
+            <a:srgbClr val="F2F3F1"/>
           </a:solidFill>
           <a:ln w="12700">
             <a:solidFill>
-              <a:srgbClr val="E3E6EE"/>
+              <a:srgbClr val="E2E5E1"/>
             </a:solidFill>
             <a:prstDash val="solid"/>
           </a:ln>
@@ -8364,11 +8364,11 @@
             <a:r>
               <a:rPr lang="en-US" sz="1250" b="1" dirty="0">
                 <a:solidFill>
-                  <a:srgbClr val="0B0F19"/>
-                </a:solidFill>
-                <a:latin typeface="Sora" pitchFamily="34" charset="0"/>
-                <a:ea typeface="Sora" pitchFamily="34" charset="-122"/>
-                <a:cs typeface="Sora" pitchFamily="34" charset="-120"/>
+                  <a:srgbClr val="14181A"/>
+                </a:solidFill>
+                <a:latin typeface="Archivo" pitchFamily="34" charset="0"/>
+                <a:ea typeface="Archivo" pitchFamily="34" charset="-122"/>
+                <a:cs typeface="Archivo" pitchFamily="34" charset="-120"/>
               </a:rPr>
               <a:t>Postes des superviseurs</a:t>
             </a:r>
@@ -8406,11 +8406,11 @@
             <a:r>
               <a:rPr lang="en-US" sz="1050" dirty="0">
                 <a:solidFill>
-                  <a:srgbClr val="3D4556"/>
-                </a:solidFill>
-                <a:latin typeface="Inter" pitchFamily="34" charset="0"/>
-                <a:ea typeface="Inter" pitchFamily="34" charset="-122"/>
-                <a:cs typeface="Inter" pitchFamily="34" charset="-120"/>
+                  <a:srgbClr val="3A423F"/>
+                </a:solidFill>
+                <a:latin typeface="Public Sans" pitchFamily="34" charset="0"/>
+                <a:ea typeface="Public Sans" pitchFamily="34" charset="-122"/>
+                <a:cs typeface="Public Sans" pitchFamily="34" charset="-120"/>
               </a:rPr>
               <a:t>Site web www.quantinvo.com, sans installation.</a:t>
             </a:r>
@@ -8426,11 +8426,11 @@
             <a:r>
               <a:rPr lang="en-US" sz="1050" dirty="0">
                 <a:solidFill>
-                  <a:srgbClr val="3D4556"/>
-                </a:solidFill>
-                <a:latin typeface="Inter" pitchFamily="34" charset="0"/>
-                <a:ea typeface="Inter" pitchFamily="34" charset="-122"/>
-                <a:cs typeface="Inter" pitchFamily="34" charset="-120"/>
+                  <a:srgbClr val="3A423F"/>
+                </a:solidFill>
+                <a:latin typeface="Public Sans" pitchFamily="34" charset="0"/>
+                <a:ea typeface="Public Sans" pitchFamily="34" charset="-122"/>
+                <a:cs typeface="Public Sans" pitchFamily="34" charset="-120"/>
               </a:rPr>
               <a:t>Tableau de bord, imports, rapports. Hébergé par Vercel.</a:t>
             </a:r>
@@ -8455,7 +8455,7 @@
           <a:noFill/>
           <a:ln w="12700">
             <a:solidFill>
-              <a:srgbClr val="5B6475"/>
+              <a:srgbClr val="575F5C"/>
             </a:solidFill>
             <a:prstDash val="dash"/>
           </a:ln>
@@ -8488,11 +8488,11 @@
             <a:r>
               <a:rPr lang="en-US" sz="850" dirty="0">
                 <a:solidFill>
-                  <a:srgbClr val="5B6475"/>
-                </a:solidFill>
-                <a:latin typeface="Inter" pitchFamily="34" charset="0"/>
-                <a:ea typeface="Inter" pitchFamily="34" charset="-122"/>
-                <a:cs typeface="Inter" pitchFamily="34" charset="-120"/>
+                  <a:srgbClr val="575F5C"/>
+                </a:solidFill>
+                <a:latin typeface="Public Sans" pitchFamily="34" charset="0"/>
+                <a:ea typeface="Public Sans" pitchFamily="34" charset="-122"/>
+                <a:cs typeface="Public Sans" pitchFamily="34" charset="-120"/>
               </a:rPr>
               <a:t>HTTPS 443</a:t>
             </a:r>
@@ -8517,7 +8517,7 @@
           <a:noFill/>
           <a:ln w="12700">
             <a:solidFill>
-              <a:srgbClr val="5B6475"/>
+              <a:srgbClr val="575F5C"/>
             </a:solidFill>
             <a:prstDash val="dash"/>
           </a:ln>
@@ -8550,11 +8550,11 @@
             <a:r>
               <a:rPr lang="en-US" sz="850" dirty="0">
                 <a:solidFill>
-                  <a:srgbClr val="5B6475"/>
-                </a:solidFill>
-                <a:latin typeface="Inter" pitchFamily="34" charset="0"/>
-                <a:ea typeface="Inter" pitchFamily="34" charset="-122"/>
-                <a:cs typeface="Inter" pitchFamily="34" charset="-120"/>
+                  <a:srgbClr val="575F5C"/>
+                </a:solidFill>
+                <a:latin typeface="Public Sans" pitchFamily="34" charset="0"/>
+                <a:ea typeface="Public Sans" pitchFamily="34" charset="-122"/>
+                <a:cs typeface="Public Sans" pitchFamily="34" charset="-120"/>
               </a:rPr>
               <a:t>HTTPS, WebSocket</a:t>
             </a:r>
@@ -8575,15 +8575,15 @@
           </a:xfrm>
           <a:prstGeom prst="roundRect">
             <a:avLst>
-              <a:gd name="adj" fmla="val 7692"/>
+              <a:gd name="adj" fmla="val 3077"/>
             </a:avLst>
           </a:prstGeom>
           <a:solidFill>
-            <a:srgbClr val="F4F5F9"/>
+            <a:srgbClr val="F2F3F1"/>
           </a:solidFill>
           <a:ln w="12700">
             <a:solidFill>
-              <a:srgbClr val="E3E6EE"/>
+              <a:srgbClr val="E2E5E1"/>
             </a:solidFill>
             <a:prstDash val="solid"/>
           </a:ln>
@@ -8616,11 +8616,11 @@
             <a:r>
               <a:rPr lang="en-US" sz="1250" b="1" dirty="0">
                 <a:solidFill>
-                  <a:srgbClr val="0B0F19"/>
-                </a:solidFill>
-                <a:latin typeface="Sora" pitchFamily="34" charset="0"/>
-                <a:ea typeface="Sora" pitchFamily="34" charset="-122"/>
-                <a:cs typeface="Sora" pitchFamily="34" charset="-120"/>
+                  <a:srgbClr val="14181A"/>
+                </a:solidFill>
+                <a:latin typeface="Archivo" pitchFamily="34" charset="0"/>
+                <a:ea typeface="Archivo" pitchFamily="34" charset="-122"/>
+                <a:cs typeface="Archivo" pitchFamily="34" charset="-120"/>
               </a:rPr>
               <a:t>Notifications</a:t>
             </a:r>
@@ -8658,11 +8658,11 @@
             <a:r>
               <a:rPr lang="en-US" sz="1050" dirty="0">
                 <a:solidFill>
-                  <a:srgbClr val="3D4556"/>
-                </a:solidFill>
-                <a:latin typeface="Inter" pitchFamily="34" charset="0"/>
-                <a:ea typeface="Inter" pitchFamily="34" charset="-122"/>
-                <a:cs typeface="Inter" pitchFamily="34" charset="-120"/>
+                  <a:srgbClr val="3A423F"/>
+                </a:solidFill>
+                <a:latin typeface="Public Sans" pitchFamily="34" charset="0"/>
+                <a:ea typeface="Public Sans" pitchFamily="34" charset="-122"/>
+                <a:cs typeface="Public Sans" pitchFamily="34" charset="-120"/>
               </a:rPr>
               <a:t>Jeton obtenu via Expo (exp.host), puis APNs / FCM. Sert à prévenir d’une invitation.</a:t>
             </a:r>
@@ -8683,15 +8683,15 @@
           </a:xfrm>
           <a:prstGeom prst="roundRect">
             <a:avLst>
-              <a:gd name="adj" fmla="val 7692"/>
+              <a:gd name="adj" fmla="val 3077"/>
             </a:avLst>
           </a:prstGeom>
           <a:solidFill>
-            <a:srgbClr val="F4F5F9"/>
+            <a:srgbClr val="F2F3F1"/>
           </a:solidFill>
           <a:ln w="12700">
             <a:solidFill>
-              <a:srgbClr val="E3E6EE"/>
+              <a:srgbClr val="E2E5E1"/>
             </a:solidFill>
             <a:prstDash val="solid"/>
           </a:ln>
@@ -8724,11 +8724,11 @@
             <a:r>
               <a:rPr lang="en-US" sz="1250" b="1" dirty="0">
                 <a:solidFill>
-                  <a:srgbClr val="0B0F19"/>
-                </a:solidFill>
-                <a:latin typeface="Sora" pitchFamily="34" charset="0"/>
-                <a:ea typeface="Sora" pitchFamily="34" charset="-122"/>
-                <a:cs typeface="Sora" pitchFamily="34" charset="-120"/>
+                  <a:srgbClr val="14181A"/>
+                </a:solidFill>
+                <a:latin typeface="Archivo" pitchFamily="34" charset="0"/>
+                <a:ea typeface="Archivo" pitchFamily="34" charset="-122"/>
+                <a:cs typeface="Archivo" pitchFamily="34" charset="-120"/>
               </a:rPr>
               <a:t>E-mails de service</a:t>
             </a:r>
@@ -8766,11 +8766,11 @@
             <a:r>
               <a:rPr lang="en-US" sz="1050" dirty="0">
                 <a:solidFill>
-                  <a:srgbClr val="3D4556"/>
-                </a:solidFill>
-                <a:latin typeface="Inter" pitchFamily="34" charset="0"/>
-                <a:ea typeface="Inter" pitchFamily="34" charset="-122"/>
-                <a:cs typeface="Inter" pitchFamily="34" charset="-120"/>
+                  <a:srgbClr val="3A423F"/>
+                </a:solidFill>
+                <a:latin typeface="Public Sans" pitchFamily="34" charset="0"/>
+                <a:ea typeface="Public Sans" pitchFamily="34" charset="-122"/>
+                <a:cs typeface="Public Sans" pitchFamily="34" charset="-120"/>
               </a:rPr>
               <a:t>Invitations, factures, accusés. Envoyés par Resend, depuis send.quantinvo.com. Jamais de code d’accès par e-mail.</a:t>
             </a:r>
@@ -8791,15 +8791,15 @@
           </a:xfrm>
           <a:prstGeom prst="roundRect">
             <a:avLst>
-              <a:gd name="adj" fmla="val 7692"/>
+              <a:gd name="adj" fmla="val 3077"/>
             </a:avLst>
           </a:prstGeom>
           <a:solidFill>
-            <a:srgbClr val="F4F5F9"/>
+            <a:srgbClr val="F2F3F1"/>
           </a:solidFill>
           <a:ln w="12700">
             <a:solidFill>
-              <a:srgbClr val="E3E6EE"/>
+              <a:srgbClr val="E2E5E1"/>
             </a:solidFill>
             <a:prstDash val="solid"/>
           </a:ln>
@@ -8832,11 +8832,11 @@
             <a:r>
               <a:rPr lang="en-US" sz="1250" b="1" dirty="0">
                 <a:solidFill>
-                  <a:srgbClr val="0B0F19"/>
-                </a:solidFill>
-                <a:latin typeface="Sora" pitchFamily="34" charset="0"/>
-                <a:ea typeface="Sora" pitchFamily="34" charset="-122"/>
-                <a:cs typeface="Sora" pitchFamily="34" charset="-120"/>
+                  <a:srgbClr val="14181A"/>
+                </a:solidFill>
+                <a:latin typeface="Archivo" pitchFamily="34" charset="0"/>
+                <a:ea typeface="Archivo" pitchFamily="34" charset="-122"/>
+                <a:cs typeface="Archivo" pitchFamily="34" charset="-120"/>
               </a:rPr>
               <a:t>Ce qui n’existe pas</a:t>
             </a:r>
@@ -8874,11 +8874,11 @@
             <a:r>
               <a:rPr lang="en-US" sz="1050" dirty="0">
                 <a:solidFill>
-                  <a:srgbClr val="3D4556"/>
-                </a:solidFill>
-                <a:latin typeface="Inter" pitchFamily="34" charset="0"/>
-                <a:ea typeface="Inter" pitchFamily="34" charset="-122"/>
-                <a:cs typeface="Inter" pitchFamily="34" charset="-120"/>
+                  <a:srgbClr val="3A423F"/>
+                </a:solidFill>
+                <a:latin typeface="Public Sans" pitchFamily="34" charset="0"/>
+                <a:ea typeface="Public Sans" pitchFamily="34" charset="-122"/>
+                <a:cs typeface="Public Sans" pitchFamily="34" charset="-120"/>
               </a:rPr>
               <a:t>Pas d’API publique, pas de connecteur ERP, pas de SSO. L’échange se fait par fichiers.</a:t>
             </a:r>
@@ -8903,7 +8903,7 @@
           <a:noFill/>
           <a:ln w="12700">
             <a:solidFill>
-              <a:srgbClr val="5B6475"/>
+              <a:srgbClr val="575F5C"/>
             </a:solidFill>
             <a:prstDash val="dash"/>
           </a:ln>
@@ -8926,7 +8926,7 @@
           <a:noFill/>
           <a:ln w="12700">
             <a:solidFill>
-              <a:srgbClr val="5B6475"/>
+              <a:srgbClr val="575F5C"/>
             </a:solidFill>
             <a:prstDash val="dash"/>
           </a:ln>
@@ -8962,11 +8962,11 @@
             <a:r>
               <a:rPr lang="en-US" sz="1150" i="1" dirty="0">
                 <a:solidFill>
-                  <a:srgbClr val="5B6475"/>
-                </a:solidFill>
-                <a:latin typeface="Inter" pitchFamily="34" charset="0"/>
-                <a:ea typeface="Inter" pitchFamily="34" charset="-122"/>
-                <a:cs typeface="Inter" pitchFamily="34" charset="-120"/>
+                  <a:srgbClr val="575F5C"/>
+                </a:solidFill>
+                <a:latin typeface="Public Sans" pitchFamily="34" charset="0"/>
+                <a:ea typeface="Public Sans" pitchFamily="34" charset="-122"/>
+                <a:cs typeface="Public Sans" pitchFamily="34" charset="-120"/>
               </a:rPr>
               <a:t>Tout le trafic sort de chez vous en HTTPS sur le port 443. Rien n'entre. Aucun composant n'est installé sur votre réseau.</a:t>
             </a:r>
@@ -9001,11 +9001,11 @@
             <a:r>
               <a:rPr lang="en-US" sz="900" dirty="0">
                 <a:solidFill>
-                  <a:srgbClr val="5B6475"/>
-                </a:solidFill>
-                <a:latin typeface="Inter" pitchFamily="34" charset="0"/>
-                <a:ea typeface="Inter" pitchFamily="34" charset="-122"/>
-                <a:cs typeface="Inter" pitchFamily="34" charset="-120"/>
+                  <a:srgbClr val="575F5C"/>
+                </a:solidFill>
+                <a:latin typeface="Public Sans" pitchFamily="34" charset="0"/>
+                <a:ea typeface="Public Sans" pitchFamily="34" charset="-122"/>
+                <a:cs typeface="Public Sans" pitchFamily="34" charset="-120"/>
               </a:rPr>
               <a:t>Quantinvo · dossier technique · septembre 2026</a:t>
             </a:r>
@@ -9040,11 +9040,11 @@
             <a:r>
               <a:rPr lang="en-US" sz="900" dirty="0">
                 <a:solidFill>
-                  <a:srgbClr val="5B6475"/>
-                </a:solidFill>
-                <a:latin typeface="Inter" pitchFamily="34" charset="0"/>
-                <a:ea typeface="Inter" pitchFamily="34" charset="-122"/>
-                <a:cs typeface="Inter" pitchFamily="34" charset="-120"/>
+                  <a:srgbClr val="575F5C"/>
+                </a:solidFill>
+                <a:latin typeface="Public Sans" pitchFamily="34" charset="0"/>
+                <a:ea typeface="Public Sans" pitchFamily="34" charset="-122"/>
+                <a:cs typeface="Public Sans" pitchFamily="34" charset="-120"/>
               </a:rPr>
               <a:t>3</a:t>
             </a:r>
@@ -9135,11 +9135,11 @@
             <a:r>
               <a:rPr lang="en-US" sz="1600" b="1" dirty="0">
                 <a:solidFill>
-                  <a:srgbClr val="0B0F19"/>
-                </a:solidFill>
-                <a:latin typeface="Sora" pitchFamily="34" charset="0"/>
-                <a:ea typeface="Sora" pitchFamily="34" charset="-122"/>
-                <a:cs typeface="Sora" pitchFamily="34" charset="-120"/>
+                  <a:srgbClr val="14181A"/>
+                </a:solidFill>
+                <a:latin typeface="Archivo" pitchFamily="34" charset="0"/>
+                <a:ea typeface="Archivo" pitchFamily="34" charset="-122"/>
+                <a:cs typeface="Archivo" pitchFamily="34" charset="-120"/>
               </a:rPr>
               <a:t>Quantinvo</a:t>
             </a:r>
@@ -9174,11 +9174,11 @@
             <a:r>
               <a:rPr lang="en-US" sz="1000" dirty="0">
                 <a:solidFill>
-                  <a:srgbClr val="5B6475"/>
-                </a:solidFill>
-                <a:latin typeface="Inter" pitchFamily="34" charset="0"/>
-                <a:ea typeface="Inter" pitchFamily="34" charset="-122"/>
-                <a:cs typeface="Inter" pitchFamily="34" charset="-120"/>
+                  <a:srgbClr val="575F5C"/>
+                </a:solidFill>
+                <a:latin typeface="Public Sans" pitchFamily="34" charset="0"/>
+                <a:ea typeface="Public Sans" pitchFamily="34" charset="-122"/>
+                <a:cs typeface="Public Sans" pitchFamily="34" charset="-120"/>
               </a:rPr>
               <a:t>Hébergement</a:t>
             </a:r>
@@ -9195,17 +9195,17 @@
         <p:spPr>
           <a:xfrm>
             <a:off x="731520" y="877824"/>
-            <a:ext cx="10725912" cy="25603"/>
+            <a:ext cx="10725912" cy="10973"/>
           </a:xfrm>
           <a:prstGeom prst="rect">
             <a:avLst/>
           </a:prstGeom>
           <a:solidFill>
-            <a:srgbClr val="38C9FF"/>
+            <a:srgbClr val="E2E5E1"/>
           </a:solidFill>
           <a:ln w="12700">
             <a:solidFill>
-              <a:srgbClr val="38C9FF"/>
+              <a:srgbClr val="E2E5E1"/>
             </a:solidFill>
             <a:prstDash val="solid"/>
           </a:ln>
@@ -9241,11 +9241,11 @@
             <a:r>
               <a:rPr lang="en-US" sz="2600" b="1" dirty="0">
                 <a:solidFill>
-                  <a:srgbClr val="4636B0"/>
-                </a:solidFill>
-                <a:latin typeface="Sora" pitchFamily="34" charset="0"/>
-                <a:ea typeface="Sora" pitchFamily="34" charset="-122"/>
-                <a:cs typeface="Sora" pitchFamily="34" charset="-120"/>
+                  <a:srgbClr val="14181A"/>
+                </a:solidFill>
+                <a:latin typeface="Archivo" pitchFamily="34" charset="0"/>
+                <a:ea typeface="Archivo" pitchFamily="34" charset="-122"/>
+                <a:cs typeface="Archivo" pitchFamily="34" charset="-120"/>
               </a:rPr>
               <a:t>Où sont les données, et qui les traite.</a:t>
             </a:r>
@@ -9283,11 +9283,11 @@
             <a:r>
               <a:rPr lang="en-US" sz="1200" dirty="0">
                 <a:solidFill>
-                  <a:srgbClr val="3D4556"/>
-                </a:solidFill>
-                <a:latin typeface="Inter" pitchFamily="34" charset="0"/>
-                <a:ea typeface="Inter" pitchFamily="34" charset="-122"/>
-                <a:cs typeface="Inter" pitchFamily="34" charset="-120"/>
+                  <a:srgbClr val="3A423F"/>
+                </a:solidFill>
+                <a:latin typeface="Public Sans" pitchFamily="34" charset="0"/>
+                <a:ea typeface="Public Sans" pitchFamily="34" charset="-122"/>
+                <a:cs typeface="Public Sans" pitchFamily="34" charset="-120"/>
               </a:rPr>
               <a:t>Les données d'inventaire, les comptes et les journaux sont stockés en Irlande et n'en sortent pas. Les services annexes (site, e-mails, notifications, paiement) font appel à des prestataires établis aux États-Unis, sur la base de leurs clauses contractuelles types.</a:t>
             </a:r>
@@ -9322,11 +9322,11 @@
             <a:r>
               <a:rPr lang="en-US" sz="1000" b="1" dirty="0">
                 <a:solidFill>
-                  <a:srgbClr val="5B6475"/>
-                </a:solidFill>
-                <a:latin typeface="Inter" pitchFamily="34" charset="0"/>
-                <a:ea typeface="Inter" pitchFamily="34" charset="-122"/>
-                <a:cs typeface="Inter" pitchFamily="34" charset="-120"/>
+                  <a:srgbClr val="575F5C"/>
+                </a:solidFill>
+                <a:latin typeface="Public Sans" pitchFamily="34" charset="0"/>
+                <a:ea typeface="Public Sans" pitchFamily="34" charset="-122"/>
+                <a:cs typeface="Public Sans" pitchFamily="34" charset="-120"/>
               </a:rPr>
               <a:t>Prestataire</a:t>
             </a:r>
@@ -9361,11 +9361,11 @@
             <a:r>
               <a:rPr lang="en-US" sz="1000" b="1" dirty="0">
                 <a:solidFill>
-                  <a:srgbClr val="5B6475"/>
-                </a:solidFill>
-                <a:latin typeface="Inter" pitchFamily="34" charset="0"/>
-                <a:ea typeface="Inter" pitchFamily="34" charset="-122"/>
-                <a:cs typeface="Inter" pitchFamily="34" charset="-120"/>
+                  <a:srgbClr val="575F5C"/>
+                </a:solidFill>
+                <a:latin typeface="Public Sans" pitchFamily="34" charset="0"/>
+                <a:ea typeface="Public Sans" pitchFamily="34" charset="-122"/>
+                <a:cs typeface="Public Sans" pitchFamily="34" charset="-120"/>
               </a:rPr>
               <a:t>Rôle</a:t>
             </a:r>
@@ -9400,11 +9400,11 @@
             <a:r>
               <a:rPr lang="en-US" sz="1000" b="1" dirty="0">
                 <a:solidFill>
-                  <a:srgbClr val="5B6475"/>
-                </a:solidFill>
-                <a:latin typeface="Inter" pitchFamily="34" charset="0"/>
-                <a:ea typeface="Inter" pitchFamily="34" charset="-122"/>
-                <a:cs typeface="Inter" pitchFamily="34" charset="-120"/>
+                  <a:srgbClr val="575F5C"/>
+                </a:solidFill>
+                <a:latin typeface="Public Sans" pitchFamily="34" charset="0"/>
+                <a:ea typeface="Public Sans" pitchFamily="34" charset="-122"/>
+                <a:cs typeface="Public Sans" pitchFamily="34" charset="-120"/>
               </a:rPr>
               <a:t>Localisation</a:t>
             </a:r>
@@ -9429,7 +9429,7 @@
           <a:noFill/>
           <a:ln w="9525">
             <a:solidFill>
-              <a:srgbClr val="E3E6EE"/>
+              <a:srgbClr val="E2E5E1"/>
             </a:solidFill>
             <a:prstDash val="solid"/>
           </a:ln>
@@ -9465,11 +9465,11 @@
             <a:r>
               <a:rPr lang="en-US" sz="1150" b="1" dirty="0">
                 <a:solidFill>
-                  <a:srgbClr val="0B0F19"/>
-                </a:solidFill>
-                <a:latin typeface="Sora" pitchFamily="34" charset="0"/>
-                <a:ea typeface="Sora" pitchFamily="34" charset="-122"/>
-                <a:cs typeface="Sora" pitchFamily="34" charset="-120"/>
+                  <a:srgbClr val="14181A"/>
+                </a:solidFill>
+                <a:latin typeface="Archivo" pitchFamily="34" charset="0"/>
+                <a:ea typeface="Archivo" pitchFamily="34" charset="-122"/>
+                <a:cs typeface="Archivo" pitchFamily="34" charset="-120"/>
               </a:rPr>
               <a:t>Supabase</a:t>
             </a:r>
@@ -9507,11 +9507,11 @@
             <a:r>
               <a:rPr lang="en-US" sz="1150" dirty="0">
                 <a:solidFill>
-                  <a:srgbClr val="3D4556"/>
-                </a:solidFill>
-                <a:latin typeface="Inter" pitchFamily="34" charset="0"/>
-                <a:ea typeface="Inter" pitchFamily="34" charset="-122"/>
-                <a:cs typeface="Inter" pitchFamily="34" charset="-120"/>
+                  <a:srgbClr val="3A423F"/>
+                </a:solidFill>
+                <a:latin typeface="Public Sans" pitchFamily="34" charset="0"/>
+                <a:ea typeface="Public Sans" pitchFamily="34" charset="-122"/>
+                <a:cs typeface="Public Sans" pitchFamily="34" charset="-120"/>
               </a:rPr>
               <a:t>Base de données, authentification, temps réel, fonctions</a:t>
             </a:r>
@@ -9549,11 +9549,11 @@
             <a:r>
               <a:rPr lang="en-US" sz="1150" dirty="0">
                 <a:solidFill>
-                  <a:srgbClr val="3D4556"/>
-                </a:solidFill>
-                <a:latin typeface="Inter" pitchFamily="34" charset="0"/>
-                <a:ea typeface="Inter" pitchFamily="34" charset="-122"/>
-                <a:cs typeface="Inter" pitchFamily="34" charset="-120"/>
+                  <a:srgbClr val="3A423F"/>
+                </a:solidFill>
+                <a:latin typeface="Public Sans" pitchFamily="34" charset="0"/>
+                <a:ea typeface="Public Sans" pitchFamily="34" charset="-122"/>
+                <a:cs typeface="Public Sans" pitchFamily="34" charset="-120"/>
               </a:rPr>
               <a:t>Irlande (eu-west-1)</a:t>
             </a:r>
@@ -9578,7 +9578,7 @@
           <a:noFill/>
           <a:ln w="9525">
             <a:solidFill>
-              <a:srgbClr val="E3E6EE"/>
+              <a:srgbClr val="E2E5E1"/>
             </a:solidFill>
             <a:prstDash val="solid"/>
           </a:ln>
@@ -9614,11 +9614,11 @@
             <a:r>
               <a:rPr lang="en-US" sz="1150" b="1" dirty="0">
                 <a:solidFill>
-                  <a:srgbClr val="0B0F19"/>
-                </a:solidFill>
-                <a:latin typeface="Sora" pitchFamily="34" charset="0"/>
-                <a:ea typeface="Sora" pitchFamily="34" charset="-122"/>
-                <a:cs typeface="Sora" pitchFamily="34" charset="-120"/>
+                  <a:srgbClr val="14181A"/>
+                </a:solidFill>
+                <a:latin typeface="Archivo" pitchFamily="34" charset="0"/>
+                <a:ea typeface="Archivo" pitchFamily="34" charset="-122"/>
+                <a:cs typeface="Archivo" pitchFamily="34" charset="-120"/>
               </a:rPr>
               <a:t>Vercel</a:t>
             </a:r>
@@ -9656,11 +9656,11 @@
             <a:r>
               <a:rPr lang="en-US" sz="1150" dirty="0">
                 <a:solidFill>
-                  <a:srgbClr val="3D4556"/>
-                </a:solidFill>
-                <a:latin typeface="Inter" pitchFamily="34" charset="0"/>
-                <a:ea typeface="Inter" pitchFamily="34" charset="-122"/>
-                <a:cs typeface="Inter" pitchFamily="34" charset="-120"/>
+                  <a:srgbClr val="3A423F"/>
+                </a:solidFill>
+                <a:latin typeface="Public Sans" pitchFamily="34" charset="0"/>
+                <a:ea typeface="Public Sans" pitchFamily="34" charset="-122"/>
+                <a:cs typeface="Public Sans" pitchFamily="34" charset="-120"/>
               </a:rPr>
               <a:t>Hébergement du site www.quantinvo.com</a:t>
             </a:r>
@@ -9698,11 +9698,11 @@
             <a:r>
               <a:rPr lang="en-US" sz="1150" dirty="0">
                 <a:solidFill>
-                  <a:srgbClr val="3D4556"/>
-                </a:solidFill>
-                <a:latin typeface="Inter" pitchFamily="34" charset="0"/>
-                <a:ea typeface="Inter" pitchFamily="34" charset="-122"/>
-                <a:cs typeface="Inter" pitchFamily="34" charset="-120"/>
+                  <a:srgbClr val="3A423F"/>
+                </a:solidFill>
+                <a:latin typeface="Public Sans" pitchFamily="34" charset="0"/>
+                <a:ea typeface="Public Sans" pitchFamily="34" charset="-122"/>
+                <a:cs typeface="Public Sans" pitchFamily="34" charset="-120"/>
               </a:rPr>
               <a:t>États-Unis</a:t>
             </a:r>
@@ -9727,7 +9727,7 @@
           <a:noFill/>
           <a:ln w="9525">
             <a:solidFill>
-              <a:srgbClr val="E3E6EE"/>
+              <a:srgbClr val="E2E5E1"/>
             </a:solidFill>
             <a:prstDash val="solid"/>
           </a:ln>
@@ -9763,11 +9763,11 @@
             <a:r>
               <a:rPr lang="en-US" sz="1150" b="1" dirty="0">
                 <a:solidFill>
-                  <a:srgbClr val="0B0F19"/>
-                </a:solidFill>
-                <a:latin typeface="Sora" pitchFamily="34" charset="0"/>
-                <a:ea typeface="Sora" pitchFamily="34" charset="-122"/>
-                <a:cs typeface="Sora" pitchFamily="34" charset="-120"/>
+                  <a:srgbClr val="14181A"/>
+                </a:solidFill>
+                <a:latin typeface="Archivo" pitchFamily="34" charset="0"/>
+                <a:ea typeface="Archivo" pitchFamily="34" charset="-122"/>
+                <a:cs typeface="Archivo" pitchFamily="34" charset="-120"/>
               </a:rPr>
               <a:t>Resend</a:t>
             </a:r>
@@ -9805,11 +9805,11 @@
             <a:r>
               <a:rPr lang="en-US" sz="1150" dirty="0">
                 <a:solidFill>
-                  <a:srgbClr val="3D4556"/>
-                </a:solidFill>
-                <a:latin typeface="Inter" pitchFamily="34" charset="0"/>
-                <a:ea typeface="Inter" pitchFamily="34" charset="-122"/>
-                <a:cs typeface="Inter" pitchFamily="34" charset="-120"/>
+                  <a:srgbClr val="3A423F"/>
+                </a:solidFill>
+                <a:latin typeface="Public Sans" pitchFamily="34" charset="0"/>
+                <a:ea typeface="Public Sans" pitchFamily="34" charset="-122"/>
+                <a:cs typeface="Public Sans" pitchFamily="34" charset="-120"/>
               </a:rPr>
               <a:t>Acheminement des e-mails de service</a:t>
             </a:r>
@@ -9847,11 +9847,11 @@
             <a:r>
               <a:rPr lang="en-US" sz="1150" dirty="0">
                 <a:solidFill>
-                  <a:srgbClr val="3D4556"/>
-                </a:solidFill>
-                <a:latin typeface="Inter" pitchFamily="34" charset="0"/>
-                <a:ea typeface="Inter" pitchFamily="34" charset="-122"/>
-                <a:cs typeface="Inter" pitchFamily="34" charset="-120"/>
+                  <a:srgbClr val="3A423F"/>
+                </a:solidFill>
+                <a:latin typeface="Public Sans" pitchFamily="34" charset="0"/>
+                <a:ea typeface="Public Sans" pitchFamily="34" charset="-122"/>
+                <a:cs typeface="Public Sans" pitchFamily="34" charset="-120"/>
               </a:rPr>
               <a:t>États-Unis</a:t>
             </a:r>
@@ -9876,7 +9876,7 @@
           <a:noFill/>
           <a:ln w="9525">
             <a:solidFill>
-              <a:srgbClr val="E3E6EE"/>
+              <a:srgbClr val="E2E5E1"/>
             </a:solidFill>
             <a:prstDash val="solid"/>
           </a:ln>
@@ -9912,11 +9912,11 @@
             <a:r>
               <a:rPr lang="en-US" sz="1150" b="1" dirty="0">
                 <a:solidFill>
-                  <a:srgbClr val="0B0F19"/>
-                </a:solidFill>
-                <a:latin typeface="Sora" pitchFamily="34" charset="0"/>
-                <a:ea typeface="Sora" pitchFamily="34" charset="-122"/>
-                <a:cs typeface="Sora" pitchFamily="34" charset="-120"/>
+                  <a:srgbClr val="14181A"/>
+                </a:solidFill>
+                <a:latin typeface="Archivo" pitchFamily="34" charset="0"/>
+                <a:ea typeface="Archivo" pitchFamily="34" charset="-122"/>
+                <a:cs typeface="Archivo" pitchFamily="34" charset="-120"/>
               </a:rPr>
               <a:t>Stripe</a:t>
             </a:r>
@@ -9954,11 +9954,11 @@
             <a:r>
               <a:rPr lang="en-US" sz="1150" dirty="0">
                 <a:solidFill>
-                  <a:srgbClr val="3D4556"/>
-                </a:solidFill>
-                <a:latin typeface="Inter" pitchFamily="34" charset="0"/>
-                <a:ea typeface="Inter" pitchFamily="34" charset="-122"/>
-                <a:cs typeface="Inter" pitchFamily="34" charset="-120"/>
+                  <a:srgbClr val="3A423F"/>
+                </a:solidFill>
+                <a:latin typeface="Public Sans" pitchFamily="34" charset="0"/>
+                <a:ea typeface="Public Sans" pitchFamily="34" charset="-122"/>
+                <a:cs typeface="Public Sans" pitchFamily="34" charset="-120"/>
               </a:rPr>
               <a:t>Paiement de la licence et facturation</a:t>
             </a:r>
@@ -9996,11 +9996,11 @@
             <a:r>
               <a:rPr lang="en-US" sz="1150" dirty="0">
                 <a:solidFill>
-                  <a:srgbClr val="3D4556"/>
-                </a:solidFill>
-                <a:latin typeface="Inter" pitchFamily="34" charset="0"/>
-                <a:ea typeface="Inter" pitchFamily="34" charset="-122"/>
-                <a:cs typeface="Inter" pitchFamily="34" charset="-120"/>
+                  <a:srgbClr val="3A423F"/>
+                </a:solidFill>
+                <a:latin typeface="Public Sans" pitchFamily="34" charset="0"/>
+                <a:ea typeface="Public Sans" pitchFamily="34" charset="-122"/>
+                <a:cs typeface="Public Sans" pitchFamily="34" charset="-120"/>
               </a:rPr>
               <a:t>Irlande, États-Unis</a:t>
             </a:r>
@@ -10025,7 +10025,7 @@
           <a:noFill/>
           <a:ln w="9525">
             <a:solidFill>
-              <a:srgbClr val="E3E6EE"/>
+              <a:srgbClr val="E2E5E1"/>
             </a:solidFill>
             <a:prstDash val="solid"/>
           </a:ln>
@@ -10061,11 +10061,11 @@
             <a:r>
               <a:rPr lang="en-US" sz="1150" b="1" dirty="0">
                 <a:solidFill>
-                  <a:srgbClr val="0B0F19"/>
-                </a:solidFill>
-                <a:latin typeface="Sora" pitchFamily="34" charset="0"/>
-                <a:ea typeface="Sora" pitchFamily="34" charset="-122"/>
-                <a:cs typeface="Sora" pitchFamily="34" charset="-120"/>
+                  <a:srgbClr val="14181A"/>
+                </a:solidFill>
+                <a:latin typeface="Archivo" pitchFamily="34" charset="0"/>
+                <a:ea typeface="Archivo" pitchFamily="34" charset="-122"/>
+                <a:cs typeface="Archivo" pitchFamily="34" charset="-120"/>
               </a:rPr>
               <a:t>Expo</a:t>
             </a:r>
@@ -10103,11 +10103,11 @@
             <a:r>
               <a:rPr lang="en-US" sz="1150" dirty="0">
                 <a:solidFill>
-                  <a:srgbClr val="3D4556"/>
-                </a:solidFill>
-                <a:latin typeface="Inter" pitchFamily="34" charset="0"/>
-                <a:ea typeface="Inter" pitchFamily="34" charset="-122"/>
-                <a:cs typeface="Inter" pitchFamily="34" charset="-120"/>
+                  <a:srgbClr val="3A423F"/>
+                </a:solidFill>
+                <a:latin typeface="Public Sans" pitchFamily="34" charset="0"/>
+                <a:ea typeface="Public Sans" pitchFamily="34" charset="-122"/>
+                <a:cs typeface="Public Sans" pitchFamily="34" charset="-120"/>
               </a:rPr>
               <a:t>Obtention du jeton de notification de l'appareil</a:t>
             </a:r>
@@ -10145,11 +10145,11 @@
             <a:r>
               <a:rPr lang="en-US" sz="1150" dirty="0">
                 <a:solidFill>
-                  <a:srgbClr val="3D4556"/>
-                </a:solidFill>
-                <a:latin typeface="Inter" pitchFamily="34" charset="0"/>
-                <a:ea typeface="Inter" pitchFamily="34" charset="-122"/>
-                <a:cs typeface="Inter" pitchFamily="34" charset="-120"/>
+                  <a:srgbClr val="3A423F"/>
+                </a:solidFill>
+                <a:latin typeface="Public Sans" pitchFamily="34" charset="0"/>
+                <a:ea typeface="Public Sans" pitchFamily="34" charset="-122"/>
+                <a:cs typeface="Public Sans" pitchFamily="34" charset="-120"/>
               </a:rPr>
               <a:t>États-Unis</a:t>
             </a:r>
@@ -10174,7 +10174,7 @@
           <a:noFill/>
           <a:ln w="9525">
             <a:solidFill>
-              <a:srgbClr val="E3E6EE"/>
+              <a:srgbClr val="E2E5E1"/>
             </a:solidFill>
             <a:prstDash val="solid"/>
           </a:ln>
@@ -10210,11 +10210,11 @@
             <a:r>
               <a:rPr lang="en-US" sz="1150" b="1" dirty="0">
                 <a:solidFill>
-                  <a:srgbClr val="0B0F19"/>
-                </a:solidFill>
-                <a:latin typeface="Sora" pitchFamily="34" charset="0"/>
-                <a:ea typeface="Sora" pitchFamily="34" charset="-122"/>
-                <a:cs typeface="Sora" pitchFamily="34" charset="-120"/>
+                  <a:srgbClr val="14181A"/>
+                </a:solidFill>
+                <a:latin typeface="Archivo" pitchFamily="34" charset="0"/>
+                <a:ea typeface="Archivo" pitchFamily="34" charset="-122"/>
+                <a:cs typeface="Archivo" pitchFamily="34" charset="-120"/>
               </a:rPr>
               <a:t>Apple, Google</a:t>
             </a:r>
@@ -10252,11 +10252,11 @@
             <a:r>
               <a:rPr lang="en-US" sz="1150" dirty="0">
                 <a:solidFill>
-                  <a:srgbClr val="3D4556"/>
-                </a:solidFill>
-                <a:latin typeface="Inter" pitchFamily="34" charset="0"/>
-                <a:ea typeface="Inter" pitchFamily="34" charset="-122"/>
-                <a:cs typeface="Inter" pitchFamily="34" charset="-120"/>
+                  <a:srgbClr val="3A423F"/>
+                </a:solidFill>
+                <a:latin typeface="Public Sans" pitchFamily="34" charset="0"/>
+                <a:ea typeface="Public Sans" pitchFamily="34" charset="-122"/>
+                <a:cs typeface="Public Sans" pitchFamily="34" charset="-120"/>
               </a:rPr>
               <a:t>Distribution de l'application mobile</a:t>
             </a:r>
@@ -10294,11 +10294,11 @@
             <a:r>
               <a:rPr lang="en-US" sz="1150" dirty="0">
                 <a:solidFill>
-                  <a:srgbClr val="3D4556"/>
-                </a:solidFill>
-                <a:latin typeface="Inter" pitchFamily="34" charset="0"/>
-                <a:ea typeface="Inter" pitchFamily="34" charset="-122"/>
-                <a:cs typeface="Inter" pitchFamily="34" charset="-120"/>
+                  <a:srgbClr val="3A423F"/>
+                </a:solidFill>
+                <a:latin typeface="Public Sans" pitchFamily="34" charset="0"/>
+                <a:ea typeface="Public Sans" pitchFamily="34" charset="-122"/>
+                <a:cs typeface="Public Sans" pitchFamily="34" charset="-120"/>
               </a:rPr>
               <a:t>États-Unis</a:t>
             </a:r>
@@ -10323,7 +10323,7 @@
           <a:noFill/>
           <a:ln w="9525">
             <a:solidFill>
-              <a:srgbClr val="E3E6EE"/>
+              <a:srgbClr val="E2E5E1"/>
             </a:solidFill>
             <a:prstDash val="solid"/>
           </a:ln>
@@ -10342,15 +10342,15 @@
           </a:xfrm>
           <a:prstGeom prst="roundRect">
             <a:avLst>
-              <a:gd name="adj" fmla="val 6667"/>
+              <a:gd name="adj" fmla="val 3333"/>
             </a:avLst>
           </a:prstGeom>
           <a:solidFill>
-            <a:srgbClr val="F4F5F9"/>
+            <a:srgbClr val="F2F3F1"/>
           </a:solidFill>
           <a:ln w="12700">
             <a:solidFill>
-              <a:srgbClr val="F4F5F9"/>
+              <a:srgbClr val="F2F3F1"/>
             </a:solidFill>
             <a:prstDash val="solid"/>
           </a:ln>
@@ -10383,11 +10383,11 @@
             <a:r>
               <a:rPr lang="en-US" sz="950" b="1" dirty="0">
                 <a:solidFill>
-                  <a:srgbClr val="5B6475"/>
-                </a:solidFill>
-                <a:latin typeface="Inter" pitchFamily="34" charset="0"/>
-                <a:ea typeface="Inter" pitchFamily="34" charset="-122"/>
-                <a:cs typeface="Inter" pitchFamily="34" charset="-120"/>
+                  <a:srgbClr val="575F5C"/>
+                </a:solidFill>
+                <a:latin typeface="Public Sans" pitchFamily="34" charset="0"/>
+                <a:ea typeface="Public Sans" pitchFamily="34" charset="-122"/>
+                <a:cs typeface="Public Sans" pitchFamily="34" charset="-120"/>
               </a:rPr>
               <a:t>À savoir</a:t>
             </a:r>
@@ -10425,11 +10425,11 @@
             <a:r>
               <a:rPr lang="en-US" sz="1150" i="1" dirty="0">
                 <a:solidFill>
-                  <a:srgbClr val="3D4556"/>
-                </a:solidFill>
-                <a:latin typeface="Inter" pitchFamily="34" charset="0"/>
-                <a:ea typeface="Inter" pitchFamily="34" charset="-122"/>
-                <a:cs typeface="Inter" pitchFamily="34" charset="-120"/>
+                  <a:srgbClr val="3A423F"/>
+                </a:solidFill>
+                <a:latin typeface="Public Sans" pitchFamily="34" charset="0"/>
+                <a:ea typeface="Public Sans" pitchFamily="34" charset="-122"/>
+                <a:cs typeface="Public Sans" pitchFamily="34" charset="-120"/>
               </a:rPr>
               <a:t>La liste est celle de la politique de confidentialité publiée. Un test automatique empêche d'ajouter un prestataire au produit sans le déclarer. Aucune donnée bancaire ne transite par nos serveurs : la carte se saisit chez Stripe.</a:t>
             </a:r>
@@ -10464,11 +10464,11 @@
             <a:r>
               <a:rPr lang="en-US" sz="900" dirty="0">
                 <a:solidFill>
-                  <a:srgbClr val="5B6475"/>
-                </a:solidFill>
-                <a:latin typeface="Inter" pitchFamily="34" charset="0"/>
-                <a:ea typeface="Inter" pitchFamily="34" charset="-122"/>
-                <a:cs typeface="Inter" pitchFamily="34" charset="-120"/>
+                  <a:srgbClr val="575F5C"/>
+                </a:solidFill>
+                <a:latin typeface="Public Sans" pitchFamily="34" charset="0"/>
+                <a:ea typeface="Public Sans" pitchFamily="34" charset="-122"/>
+                <a:cs typeface="Public Sans" pitchFamily="34" charset="-120"/>
               </a:rPr>
               <a:t>Quantinvo · dossier technique · septembre 2026</a:t>
             </a:r>
@@ -10503,11 +10503,11 @@
             <a:r>
               <a:rPr lang="en-US" sz="900" dirty="0">
                 <a:solidFill>
-                  <a:srgbClr val="5B6475"/>
-                </a:solidFill>
-                <a:latin typeface="Inter" pitchFamily="34" charset="0"/>
-                <a:ea typeface="Inter" pitchFamily="34" charset="-122"/>
-                <a:cs typeface="Inter" pitchFamily="34" charset="-120"/>
+                  <a:srgbClr val="575F5C"/>
+                </a:solidFill>
+                <a:latin typeface="Public Sans" pitchFamily="34" charset="0"/>
+                <a:ea typeface="Public Sans" pitchFamily="34" charset="-122"/>
+                <a:cs typeface="Public Sans" pitchFamily="34" charset="-120"/>
               </a:rPr>
               <a:t>4</a:t>
             </a:r>
@@ -10598,11 +10598,11 @@
             <a:r>
               <a:rPr lang="en-US" sz="1600" b="1" dirty="0">
                 <a:solidFill>
-                  <a:srgbClr val="0B0F19"/>
-                </a:solidFill>
-                <a:latin typeface="Sora" pitchFamily="34" charset="0"/>
-                <a:ea typeface="Sora" pitchFamily="34" charset="-122"/>
-                <a:cs typeface="Sora" pitchFamily="34" charset="-120"/>
+                  <a:srgbClr val="14181A"/>
+                </a:solidFill>
+                <a:latin typeface="Archivo" pitchFamily="34" charset="0"/>
+                <a:ea typeface="Archivo" pitchFamily="34" charset="-122"/>
+                <a:cs typeface="Archivo" pitchFamily="34" charset="-120"/>
               </a:rPr>
               <a:t>Quantinvo</a:t>
             </a:r>
@@ -10637,11 +10637,11 @@
             <a:r>
               <a:rPr lang="en-US" sz="1000" dirty="0">
                 <a:solidFill>
-                  <a:srgbClr val="5B6475"/>
-                </a:solidFill>
-                <a:latin typeface="Inter" pitchFamily="34" charset="0"/>
-                <a:ea typeface="Inter" pitchFamily="34" charset="-122"/>
-                <a:cs typeface="Inter" pitchFamily="34" charset="-120"/>
+                  <a:srgbClr val="575F5C"/>
+                </a:solidFill>
+                <a:latin typeface="Public Sans" pitchFamily="34" charset="0"/>
+                <a:ea typeface="Public Sans" pitchFamily="34" charset="-122"/>
+                <a:cs typeface="Public Sans" pitchFamily="34" charset="-120"/>
               </a:rPr>
               <a:t>Où prendre l’application</a:t>
             </a:r>
@@ -10658,17 +10658,17 @@
         <p:spPr>
           <a:xfrm>
             <a:off x="731520" y="877824"/>
-            <a:ext cx="10725912" cy="25603"/>
+            <a:ext cx="10725912" cy="10973"/>
           </a:xfrm>
           <a:prstGeom prst="rect">
             <a:avLst/>
           </a:prstGeom>
           <a:solidFill>
-            <a:srgbClr val="38C9FF"/>
+            <a:srgbClr val="E2E5E1"/>
           </a:solidFill>
           <a:ln w="12700">
             <a:solidFill>
-              <a:srgbClr val="38C9FF"/>
+              <a:srgbClr val="E2E5E1"/>
             </a:solidFill>
             <a:prstDash val="solid"/>
           </a:ln>
@@ -10704,11 +10704,11 @@
             <a:r>
               <a:rPr lang="en-US" sz="2400" b="1" dirty="0">
                 <a:solidFill>
-                  <a:srgbClr val="4636B0"/>
-                </a:solidFill>
-                <a:latin typeface="Sora" pitchFamily="34" charset="0"/>
-                <a:ea typeface="Sora" pitchFamily="34" charset="-122"/>
-                <a:cs typeface="Sora" pitchFamily="34" charset="-120"/>
+                  <a:srgbClr val="14181A"/>
+                </a:solidFill>
+                <a:latin typeface="Archivo" pitchFamily="34" charset="0"/>
+                <a:ea typeface="Archivo" pitchFamily="34" charset="-122"/>
+                <a:cs typeface="Archivo" pitchFamily="34" charset="-120"/>
               </a:rPr>
               <a:t>Une seule adresse, quel que soit l’appareil.</a:t>
             </a:r>
@@ -10749,11 +10749,11 @@
             <a:r>
               <a:rPr lang="en-US" sz="1200" b="1" dirty="0">
                 <a:solidFill>
-                  <a:srgbClr val="0B0F19"/>
-                </a:solidFill>
-                <a:latin typeface="Inter" pitchFamily="34" charset="0"/>
-                <a:ea typeface="Inter" pitchFamily="34" charset="-122"/>
-                <a:cs typeface="Inter" pitchFamily="34" charset="-120"/>
+                  <a:srgbClr val="14181A"/>
+                </a:solidFill>
+                <a:latin typeface="Public Sans" pitchFamily="34" charset="0"/>
+                <a:ea typeface="Public Sans" pitchFamily="34" charset="-122"/>
+                <a:cs typeface="Public Sans" pitchFamily="34" charset="-120"/>
               </a:rPr>
               <a:t>www.quantinvo.com/open </a:t>
             </a:r>
@@ -10769,11 +10769,11 @@
             <a:r>
               <a:rPr lang="en-US" sz="1200" dirty="0">
                 <a:solidFill>
-                  <a:srgbClr val="3D4556"/>
-                </a:solidFill>
-                <a:latin typeface="Inter" pitchFamily="34" charset="0"/>
-                <a:ea typeface="Inter" pitchFamily="34" charset="-122"/>
-                <a:cs typeface="Inter" pitchFamily="34" charset="-120"/>
+                  <a:srgbClr val="3A423F"/>
+                </a:solidFill>
+                <a:latin typeface="Public Sans" pitchFamily="34" charset="0"/>
+                <a:ea typeface="Public Sans" pitchFamily="34" charset="-122"/>
+                <a:cs typeface="Public Sans" pitchFamily="34" charset="-120"/>
               </a:rPr>
               <a:t>L'adresse à diffuser à vos équipes. Ouverte depuis un téléphone, elle lance l'application si elle est installée, et propose les deux boutiques sinon. Depuis un poste, elle mène à l'espace web.</a:t>
             </a:r>
@@ -10792,11 +10792,11 @@
             <a:r>
               <a:rPr lang="en-US" sz="1200" b="1" dirty="0">
                 <a:solidFill>
-                  <a:srgbClr val="0B0F19"/>
-                </a:solidFill>
-                <a:latin typeface="Inter" pitchFamily="34" charset="0"/>
-                <a:ea typeface="Inter" pitchFamily="34" charset="-122"/>
-                <a:cs typeface="Inter" pitchFamily="34" charset="-120"/>
+                  <a:srgbClr val="14181A"/>
+                </a:solidFill>
+                <a:latin typeface="Public Sans" pitchFamily="34" charset="0"/>
+                <a:ea typeface="Public Sans" pitchFamily="34" charset="-122"/>
+                <a:cs typeface="Public Sans" pitchFamily="34" charset="-120"/>
               </a:rPr>
               <a:t>Le lien d’invitation y mène tout seul. </a:t>
             </a:r>
@@ -10812,11 +10812,11 @@
             <a:r>
               <a:rPr lang="en-US" sz="1200" dirty="0">
                 <a:solidFill>
-                  <a:srgbClr val="3D4556"/>
-                </a:solidFill>
-                <a:latin typeface="Inter" pitchFamily="34" charset="0"/>
-                <a:ea typeface="Inter" pitchFamily="34" charset="-122"/>
-                <a:cs typeface="Inter" pitchFamily="34" charset="-120"/>
+                  <a:srgbClr val="3A423F"/>
+                </a:solidFill>
+                <a:latin typeface="Public Sans" pitchFamily="34" charset="0"/>
+                <a:ea typeface="Public Sans" pitchFamily="34" charset="-122"/>
+                <a:cs typeface="Public Sans" pitchFamily="34" charset="-120"/>
               </a:rPr>
               <a:t>Chaque personne invitée reçoit un e-mail qui la conduit à choisir son mot de passe, puis à l'application. Il n'y a pas de notice à écrire, pas de code à faire circuler.</a:t>
             </a:r>
@@ -10835,11 +10835,11 @@
             <a:r>
               <a:rPr lang="en-US" sz="1200" b="1" dirty="0">
                 <a:solidFill>
-                  <a:srgbClr val="0B0F19"/>
-                </a:solidFill>
-                <a:latin typeface="Inter" pitchFamily="34" charset="0"/>
-                <a:ea typeface="Inter" pitchFamily="34" charset="-122"/>
-                <a:cs typeface="Inter" pitchFamily="34" charset="-120"/>
+                  <a:srgbClr val="14181A"/>
+                </a:solidFill>
+                <a:latin typeface="Public Sans" pitchFamily="34" charset="0"/>
+                <a:ea typeface="Public Sans" pitchFamily="34" charset="-122"/>
+                <a:cs typeface="Public Sans" pitchFamily="34" charset="-120"/>
               </a:rPr>
               <a:t>Par votre catalogue, l’étape disparaît. </a:t>
             </a:r>
@@ -10855,55 +10855,21 @@
             <a:r>
               <a:rPr lang="en-US" sz="1200" dirty="0">
                 <a:solidFill>
-                  <a:srgbClr val="3D4556"/>
-                </a:solidFill>
-                <a:latin typeface="Inter" pitchFamily="34" charset="0"/>
-                <a:ea typeface="Inter" pitchFamily="34" charset="-122"/>
-                <a:cs typeface="Inter" pitchFamily="34" charset="-120"/>
+                  <a:srgbClr val="3A423F"/>
+                </a:solidFill>
+                <a:latin typeface="Public Sans" pitchFamily="34" charset="0"/>
+                <a:ea typeface="Public Sans" pitchFamily="34" charset="-122"/>
+                <a:cs typeface="Public Sans" pitchFamily="34" charset="-120"/>
               </a:rPr>
               <a:t>Si vous distribuez par MDM, l'application est déjà là quand la personne ouvre son lien. C'est le chemin recommandé pour un parc géré — la page suivante le détaille.</a:t>
             </a:r>
             <a:endParaRPr lang="en-US" sz="1200" dirty="0"/>
           </a:p>
         </p:txBody>
-      </p:sp>
-      <p:sp>
-        <p:nvSpPr>
-          <p:cNvPr id="8" name="Shape 5"/>
-          <p:cNvSpPr/>
-          <p:nvPr/>
-        </p:nvSpPr>
-        <p:spPr>
-          <a:xfrm>
-            <a:off x="6858000" y="1371600"/>
-            <a:ext cx="2044624" cy="4297680"/>
-          </a:xfrm>
-          <a:prstGeom prst="roundRect">
-            <a:avLst>
-              <a:gd name="adj" fmla="val 13417"/>
-            </a:avLst>
-          </a:prstGeom>
-          <a:solidFill>
-            <a:srgbClr val="FFFFFF"/>
-          </a:solidFill>
-          <a:ln w="12700">
-            <a:solidFill>
-              <a:srgbClr val="FFFFFF"/>
-            </a:solidFill>
-            <a:prstDash val="solid"/>
-          </a:ln>
-          <a:effectLst>
-            <a:outerShdw sx="100000" sy="100000" kx="0" ky="0" algn="bl" rotWithShape="0" blurRad="177800" dist="38100" dir="5400000">
-              <a:srgbClr val="0B0F19">
-                <a:alpha val="18000"/>
-              </a:srgbClr>
-            </a:outerShdw>
-          </a:effectLst>
-        </p:spPr>
       </p:sp>
       <p:pic>
         <p:nvPicPr>
-          <p:cNvPr id="9" name="Image 1" descr="preencoded.png">    </p:cNvPr>
+          <p:cNvPr id="8" name="Image 1" descr="preencoded.png">    </p:cNvPr>
           <p:cNvPicPr>
             <a:picLocks noChangeAspect="1"/>
           </p:cNvPicPr>
@@ -10927,7 +10893,7 @@
       </p:pic>
       <p:sp>
         <p:nvSpPr>
-          <p:cNvPr id="10" name="Text 6"/>
+          <p:cNvPr id="9" name="Text 5"/>
           <p:cNvSpPr/>
           <p:nvPr/>
         </p:nvSpPr>
@@ -10952,11 +10918,11 @@
             <a:r>
               <a:rPr lang="en-US" sz="1000" i="1" dirty="0">
                 <a:solidFill>
-                  <a:srgbClr val="5B6475"/>
-                </a:solidFill>
-                <a:latin typeface="Inter" pitchFamily="34" charset="0"/>
-                <a:ea typeface="Inter" pitchFamily="34" charset="-122"/>
-                <a:cs typeface="Inter" pitchFamily="34" charset="-120"/>
+                  <a:srgbClr val="575F5C"/>
+                </a:solidFill>
+                <a:latin typeface="Public Sans" pitchFamily="34" charset="0"/>
+                <a:ea typeface="Public Sans" pitchFamily="34" charset="-122"/>
+                <a:cs typeface="Public Sans" pitchFamily="34" charset="-120"/>
               </a:rPr>
               <a:t>www.quantinvo.com/open, vu d’un téléphone.</a:t>
             </a:r>
@@ -10966,7 +10932,7 @@
       </p:sp>
       <p:sp>
         <p:nvSpPr>
-          <p:cNvPr id="11" name="Text 7"/>
+          <p:cNvPr id="10" name="Text 6"/>
           <p:cNvSpPr/>
           <p:nvPr/>
         </p:nvSpPr>
@@ -10991,11 +10957,11 @@
             <a:r>
               <a:rPr lang="en-US" sz="900" dirty="0">
                 <a:solidFill>
-                  <a:srgbClr val="5B6475"/>
-                </a:solidFill>
-                <a:latin typeface="Inter" pitchFamily="34" charset="0"/>
-                <a:ea typeface="Inter" pitchFamily="34" charset="-122"/>
-                <a:cs typeface="Inter" pitchFamily="34" charset="-120"/>
+                  <a:srgbClr val="575F5C"/>
+                </a:solidFill>
+                <a:latin typeface="Public Sans" pitchFamily="34" charset="0"/>
+                <a:ea typeface="Public Sans" pitchFamily="34" charset="-122"/>
+                <a:cs typeface="Public Sans" pitchFamily="34" charset="-120"/>
               </a:rPr>
               <a:t>Quantinvo · dossier technique · septembre 2026</a:t>
             </a:r>
@@ -11005,7 +10971,7 @@
       </p:sp>
       <p:sp>
         <p:nvSpPr>
-          <p:cNvPr id="12" name="Text 8"/>
+          <p:cNvPr id="11" name="Text 7"/>
           <p:cNvSpPr/>
           <p:nvPr/>
         </p:nvSpPr>
@@ -11030,11 +10996,11 @@
             <a:r>
               <a:rPr lang="en-US" sz="900" dirty="0">
                 <a:solidFill>
-                  <a:srgbClr val="5B6475"/>
-                </a:solidFill>
-                <a:latin typeface="Inter" pitchFamily="34" charset="0"/>
-                <a:ea typeface="Inter" pitchFamily="34" charset="-122"/>
-                <a:cs typeface="Inter" pitchFamily="34" charset="-120"/>
+                  <a:srgbClr val="575F5C"/>
+                </a:solidFill>
+                <a:latin typeface="Public Sans" pitchFamily="34" charset="0"/>
+                <a:ea typeface="Public Sans" pitchFamily="34" charset="-122"/>
+                <a:cs typeface="Public Sans" pitchFamily="34" charset="-120"/>
               </a:rPr>
               <a:t>5</a:t>
             </a:r>
@@ -11125,11 +11091,11 @@
             <a:r>
               <a:rPr lang="en-US" sz="1600" b="1" dirty="0">
                 <a:solidFill>
-                  <a:srgbClr val="0B0F19"/>
-                </a:solidFill>
-                <a:latin typeface="Sora" pitchFamily="34" charset="0"/>
-                <a:ea typeface="Sora" pitchFamily="34" charset="-122"/>
-                <a:cs typeface="Sora" pitchFamily="34" charset="-120"/>
+                  <a:srgbClr val="14181A"/>
+                </a:solidFill>
+                <a:latin typeface="Archivo" pitchFamily="34" charset="0"/>
+                <a:ea typeface="Archivo" pitchFamily="34" charset="-122"/>
+                <a:cs typeface="Archivo" pitchFamily="34" charset="-120"/>
               </a:rPr>
               <a:t>Quantinvo</a:t>
             </a:r>
@@ -11164,11 +11130,11 @@
             <a:r>
               <a:rPr lang="en-US" sz="1000" dirty="0">
                 <a:solidFill>
-                  <a:srgbClr val="5B6475"/>
-                </a:solidFill>
-                <a:latin typeface="Inter" pitchFamily="34" charset="0"/>
-                <a:ea typeface="Inter" pitchFamily="34" charset="-122"/>
-                <a:cs typeface="Inter" pitchFamily="34" charset="-120"/>
+                  <a:srgbClr val="575F5C"/>
+                </a:solidFill>
+                <a:latin typeface="Public Sans" pitchFamily="34" charset="0"/>
+                <a:ea typeface="Public Sans" pitchFamily="34" charset="-122"/>
+                <a:cs typeface="Public Sans" pitchFamily="34" charset="-120"/>
               </a:rPr>
               <a:t>Déploiement</a:t>
             </a:r>
@@ -11185,17 +11151,17 @@
         <p:spPr>
           <a:xfrm>
             <a:off x="731520" y="877824"/>
-            <a:ext cx="10725912" cy="25603"/>
+            <a:ext cx="10725912" cy="10973"/>
           </a:xfrm>
           <a:prstGeom prst="rect">
             <a:avLst/>
           </a:prstGeom>
           <a:solidFill>
-            <a:srgbClr val="38C9FF"/>
+            <a:srgbClr val="E2E5E1"/>
           </a:solidFill>
           <a:ln w="12700">
             <a:solidFill>
-              <a:srgbClr val="38C9FF"/>
+              <a:srgbClr val="E2E5E1"/>
             </a:solidFill>
             <a:prstDash val="solid"/>
           </a:ln>
@@ -11231,11 +11197,11 @@
             <a:r>
               <a:rPr lang="en-US" sz="2600" b="1" dirty="0">
                 <a:solidFill>
-                  <a:srgbClr val="4636B0"/>
-                </a:solidFill>
-                <a:latin typeface="Sora" pitchFamily="34" charset="0"/>
-                <a:ea typeface="Sora" pitchFamily="34" charset="-122"/>
-                <a:cs typeface="Sora" pitchFamily="34" charset="-120"/>
+                  <a:srgbClr val="14181A"/>
+                </a:solidFill>
+                <a:latin typeface="Archivo" pitchFamily="34" charset="0"/>
+                <a:ea typeface="Archivo" pitchFamily="34" charset="-122"/>
+                <a:cs typeface="Archivo" pitchFamily="34" charset="-120"/>
               </a:rPr>
               <a:t>Par votre catalogue d’entreprise, comme n’importe quelle application.</a:t>
             </a:r>
@@ -11273,11 +11239,11 @@
             <a:r>
               <a:rPr lang="en-US" sz="1200" dirty="0">
                 <a:solidFill>
-                  <a:srgbClr val="3D4556"/>
-                </a:solidFill>
-                <a:latin typeface="Inter" pitchFamily="34" charset="0"/>
-                <a:ea typeface="Inter" pitchFamily="34" charset="-122"/>
-                <a:cs typeface="Inter" pitchFamily="34" charset="-120"/>
+                  <a:srgbClr val="3A423F"/>
+                </a:solidFill>
+                <a:latin typeface="Public Sans" pitchFamily="34" charset="0"/>
+                <a:ea typeface="Public Sans" pitchFamily="34" charset="-122"/>
+                <a:cs typeface="Public Sans" pitchFamily="34" charset="-120"/>
               </a:rPr>
               <a:t>Workspace ONE, Intune, SOTI, Ivanti, Jamf ou autre : il n'y a pas de version spéciale à demander, pas d'installation manuelle, pas de compte Apple ou Google personnel sur les appareils.</a:t>
             </a:r>
@@ -11312,11 +11278,11 @@
             <a:r>
               <a:rPr lang="en-US" sz="1000" b="1" dirty="0">
                 <a:solidFill>
-                  <a:srgbClr val="5B6475"/>
-                </a:solidFill>
-                <a:latin typeface="Inter" pitchFamily="34" charset="0"/>
-                <a:ea typeface="Inter" pitchFamily="34" charset="-122"/>
-                <a:cs typeface="Inter" pitchFamily="34" charset="-120"/>
+                  <a:srgbClr val="575F5C"/>
+                </a:solidFill>
+                <a:latin typeface="Public Sans" pitchFamily="34" charset="0"/>
+                <a:ea typeface="Public Sans" pitchFamily="34" charset="-122"/>
+                <a:cs typeface="Public Sans" pitchFamily="34" charset="-120"/>
               </a:rPr>
               <a:t>Identifiants de l'application</a:t>
             </a:r>
@@ -11369,7 +11335,7 @@
           <a:noFill/>
           <a:ln w="9525">
             <a:solidFill>
-              <a:srgbClr val="E3E6EE"/>
+              <a:srgbClr val="E2E5E1"/>
             </a:solidFill>
             <a:prstDash val="solid"/>
           </a:ln>
@@ -11405,11 +11371,11 @@
             <a:r>
               <a:rPr lang="en-US" sz="1100" b="1" dirty="0">
                 <a:solidFill>
-                  <a:srgbClr val="0B0F19"/>
-                </a:solidFill>
-                <a:latin typeface="Sora" pitchFamily="34" charset="0"/>
-                <a:ea typeface="Sora" pitchFamily="34" charset="-122"/>
-                <a:cs typeface="Sora" pitchFamily="34" charset="-120"/>
+                  <a:srgbClr val="14181A"/>
+                </a:solidFill>
+                <a:latin typeface="Archivo" pitchFamily="34" charset="0"/>
+                <a:ea typeface="Archivo" pitchFamily="34" charset="-122"/>
+                <a:cs typeface="Archivo" pitchFamily="34" charset="-120"/>
               </a:rPr>
               <a:t>Nom</a:t>
             </a:r>
@@ -11447,11 +11413,11 @@
             <a:r>
               <a:rPr lang="en-US" sz="1100" dirty="0">
                 <a:solidFill>
-                  <a:srgbClr val="3D4556"/>
-                </a:solidFill>
-                <a:latin typeface="Inter" pitchFamily="34" charset="0"/>
-                <a:ea typeface="Inter" pitchFamily="34" charset="-122"/>
-                <a:cs typeface="Inter" pitchFamily="34" charset="-120"/>
+                  <a:srgbClr val="3A423F"/>
+                </a:solidFill>
+                <a:latin typeface="Public Sans" pitchFamily="34" charset="0"/>
+                <a:ea typeface="Public Sans" pitchFamily="34" charset="-122"/>
+                <a:cs typeface="Public Sans" pitchFamily="34" charset="-120"/>
               </a:rPr>
               <a:t>Quantinvo</a:t>
             </a:r>
@@ -11476,7 +11442,7 @@
           <a:noFill/>
           <a:ln w="9525">
             <a:solidFill>
-              <a:srgbClr val="E3E6EE"/>
+              <a:srgbClr val="E2E5E1"/>
             </a:solidFill>
             <a:prstDash val="solid"/>
           </a:ln>
@@ -11512,11 +11478,11 @@
             <a:r>
               <a:rPr lang="en-US" sz="1100" b="1" dirty="0">
                 <a:solidFill>
-                  <a:srgbClr val="0B0F19"/>
-                </a:solidFill>
-                <a:latin typeface="Sora" pitchFamily="34" charset="0"/>
-                <a:ea typeface="Sora" pitchFamily="34" charset="-122"/>
-                <a:cs typeface="Sora" pitchFamily="34" charset="-120"/>
+                  <a:srgbClr val="14181A"/>
+                </a:solidFill>
+                <a:latin typeface="Archivo" pitchFamily="34" charset="0"/>
+                <a:ea typeface="Archivo" pitchFamily="34" charset="-122"/>
+                <a:cs typeface="Archivo" pitchFamily="34" charset="-120"/>
               </a:rPr>
               <a:t>Identifiant iOS</a:t>
             </a:r>
@@ -11554,11 +11520,11 @@
             <a:r>
               <a:rPr lang="en-US" sz="1100" dirty="0">
                 <a:solidFill>
-                  <a:srgbClr val="3D4556"/>
-                </a:solidFill>
-                <a:latin typeface="Inter" pitchFamily="34" charset="0"/>
-                <a:ea typeface="Inter" pitchFamily="34" charset="-122"/>
-                <a:cs typeface="Inter" pitchFamily="34" charset="-120"/>
+                  <a:srgbClr val="3A423F"/>
+                </a:solidFill>
+                <a:latin typeface="Public Sans" pitchFamily="34" charset="0"/>
+                <a:ea typeface="Public Sans" pitchFamily="34" charset="-122"/>
+                <a:cs typeface="Public Sans" pitchFamily="34" charset="-120"/>
               </a:rPr>
               <a:t>com.quantinvo.app</a:t>
             </a:r>
@@ -11583,7 +11549,7 @@
           <a:noFill/>
           <a:ln w="9525">
             <a:solidFill>
-              <a:srgbClr val="E3E6EE"/>
+              <a:srgbClr val="E2E5E1"/>
             </a:solidFill>
             <a:prstDash val="solid"/>
           </a:ln>
@@ -11619,11 +11585,11 @@
             <a:r>
               <a:rPr lang="en-US" sz="1100" b="1" dirty="0">
                 <a:solidFill>
-                  <a:srgbClr val="0B0F19"/>
-                </a:solidFill>
-                <a:latin typeface="Sora" pitchFamily="34" charset="0"/>
-                <a:ea typeface="Sora" pitchFamily="34" charset="-122"/>
-                <a:cs typeface="Sora" pitchFamily="34" charset="-120"/>
+                  <a:srgbClr val="14181A"/>
+                </a:solidFill>
+                <a:latin typeface="Archivo" pitchFamily="34" charset="0"/>
+                <a:ea typeface="Archivo" pitchFamily="34" charset="-122"/>
+                <a:cs typeface="Archivo" pitchFamily="34" charset="-120"/>
               </a:rPr>
               <a:t>Identifiant Android</a:t>
             </a:r>
@@ -11661,11 +11627,11 @@
             <a:r>
               <a:rPr lang="en-US" sz="1100" dirty="0">
                 <a:solidFill>
-                  <a:srgbClr val="3D4556"/>
-                </a:solidFill>
-                <a:latin typeface="Inter" pitchFamily="34" charset="0"/>
-                <a:ea typeface="Inter" pitchFamily="34" charset="-122"/>
-                <a:cs typeface="Inter" pitchFamily="34" charset="-120"/>
+                  <a:srgbClr val="3A423F"/>
+                </a:solidFill>
+                <a:latin typeface="Public Sans" pitchFamily="34" charset="0"/>
+                <a:ea typeface="Public Sans" pitchFamily="34" charset="-122"/>
+                <a:cs typeface="Public Sans" pitchFamily="34" charset="-120"/>
               </a:rPr>
               <a:t>com.quantinvo.app</a:t>
             </a:r>
@@ -11690,7 +11656,7 @@
           <a:noFill/>
           <a:ln w="9525">
             <a:solidFill>
-              <a:srgbClr val="E3E6EE"/>
+              <a:srgbClr val="E2E5E1"/>
             </a:solidFill>
             <a:prstDash val="solid"/>
           </a:ln>
@@ -11726,11 +11692,11 @@
             <a:r>
               <a:rPr lang="en-US" sz="1100" b="1" dirty="0">
                 <a:solidFill>
-                  <a:srgbClr val="0B0F19"/>
-                </a:solidFill>
-                <a:latin typeface="Sora" pitchFamily="34" charset="0"/>
-                <a:ea typeface="Sora" pitchFamily="34" charset="-122"/>
-                <a:cs typeface="Sora" pitchFamily="34" charset="-120"/>
+                  <a:srgbClr val="14181A"/>
+                </a:solidFill>
+                <a:latin typeface="Archivo" pitchFamily="34" charset="0"/>
+                <a:ea typeface="Archivo" pitchFamily="34" charset="-122"/>
+                <a:cs typeface="Archivo" pitchFamily="34" charset="-120"/>
               </a:rPr>
               <a:t>Version minimale iOS</a:t>
             </a:r>
@@ -11768,11 +11734,11 @@
             <a:r>
               <a:rPr lang="en-US" sz="1100" dirty="0">
                 <a:solidFill>
-                  <a:srgbClr val="3D4556"/>
-                </a:solidFill>
-                <a:latin typeface="Inter" pitchFamily="34" charset="0"/>
-                <a:ea typeface="Inter" pitchFamily="34" charset="-122"/>
-                <a:cs typeface="Inter" pitchFamily="34" charset="-120"/>
+                  <a:srgbClr val="3A423F"/>
+                </a:solidFill>
+                <a:latin typeface="Public Sans" pitchFamily="34" charset="0"/>
+                <a:ea typeface="Public Sans" pitchFamily="34" charset="-122"/>
+                <a:cs typeface="Public Sans" pitchFamily="34" charset="-120"/>
               </a:rPr>
               <a:t>16.4</a:t>
             </a:r>
@@ -11797,7 +11763,7 @@
           <a:noFill/>
           <a:ln w="9525">
             <a:solidFill>
-              <a:srgbClr val="E3E6EE"/>
+              <a:srgbClr val="E2E5E1"/>
             </a:solidFill>
             <a:prstDash val="solid"/>
           </a:ln>
@@ -11833,11 +11799,11 @@
             <a:r>
               <a:rPr lang="en-US" sz="1100" b="1" dirty="0">
                 <a:solidFill>
-                  <a:srgbClr val="0B0F19"/>
-                </a:solidFill>
-                <a:latin typeface="Sora" pitchFamily="34" charset="0"/>
-                <a:ea typeface="Sora" pitchFamily="34" charset="-122"/>
-                <a:cs typeface="Sora" pitchFamily="34" charset="-120"/>
+                  <a:srgbClr val="14181A"/>
+                </a:solidFill>
+                <a:latin typeface="Archivo" pitchFamily="34" charset="0"/>
+                <a:ea typeface="Archivo" pitchFamily="34" charset="-122"/>
+                <a:cs typeface="Archivo" pitchFamily="34" charset="-120"/>
               </a:rPr>
               <a:t>Version minimale Android</a:t>
             </a:r>
@@ -11875,11 +11841,11 @@
             <a:r>
               <a:rPr lang="en-US" sz="1100" dirty="0">
                 <a:solidFill>
-                  <a:srgbClr val="3D4556"/>
-                </a:solidFill>
-                <a:latin typeface="Inter" pitchFamily="34" charset="0"/>
-                <a:ea typeface="Inter" pitchFamily="34" charset="-122"/>
-                <a:cs typeface="Inter" pitchFamily="34" charset="-120"/>
+                  <a:srgbClr val="3A423F"/>
+                </a:solidFill>
+                <a:latin typeface="Public Sans" pitchFamily="34" charset="0"/>
+                <a:ea typeface="Public Sans" pitchFamily="34" charset="-122"/>
+                <a:cs typeface="Public Sans" pitchFamily="34" charset="-120"/>
               </a:rPr>
               <a:t>7.0, à confirmer</a:t>
             </a:r>
@@ -11904,7 +11870,7 @@
           <a:noFill/>
           <a:ln w="9525">
             <a:solidFill>
-              <a:srgbClr val="E3E6EE"/>
+              <a:srgbClr val="E2E5E1"/>
             </a:solidFill>
             <a:prstDash val="solid"/>
           </a:ln>
@@ -11940,11 +11906,11 @@
             <a:r>
               <a:rPr lang="en-US" sz="1100" b="1" dirty="0">
                 <a:solidFill>
-                  <a:srgbClr val="0B0F19"/>
-                </a:solidFill>
-                <a:latin typeface="Sora" pitchFamily="34" charset="0"/>
-                <a:ea typeface="Sora" pitchFamily="34" charset="-122"/>
-                <a:cs typeface="Sora" pitchFamily="34" charset="-120"/>
+                  <a:srgbClr val="14181A"/>
+                </a:solidFill>
+                <a:latin typeface="Archivo" pitchFamily="34" charset="0"/>
+                <a:ea typeface="Archivo" pitchFamily="34" charset="-122"/>
+                <a:cs typeface="Archivo" pitchFamily="34" charset="-120"/>
               </a:rPr>
               <a:t>Éditeur</a:t>
             </a:r>
@@ -11982,11 +11948,11 @@
             <a:r>
               <a:rPr lang="en-US" sz="1100" dirty="0">
                 <a:solidFill>
-                  <a:srgbClr val="3D4556"/>
-                </a:solidFill>
-                <a:latin typeface="Inter" pitchFamily="34" charset="0"/>
-                <a:ea typeface="Inter" pitchFamily="34" charset="-122"/>
-                <a:cs typeface="Inter" pitchFamily="34" charset="-120"/>
+                  <a:srgbClr val="3A423F"/>
+                </a:solidFill>
+                <a:latin typeface="Public Sans" pitchFamily="34" charset="0"/>
+                <a:ea typeface="Public Sans" pitchFamily="34" charset="-122"/>
+                <a:cs typeface="Public Sans" pitchFamily="34" charset="-120"/>
               </a:rPr>
               <a:t>Devkaylab</a:t>
             </a:r>
@@ -12011,7 +11977,7 @@
           <a:noFill/>
           <a:ln w="9525">
             <a:solidFill>
-              <a:srgbClr val="E3E6EE"/>
+              <a:srgbClr val="E2E5E1"/>
             </a:solidFill>
             <a:prstDash val="solid"/>
           </a:ln>
@@ -12050,11 +12016,11 @@
             <a:r>
               <a:rPr lang="en-US" sz="1150" b="1" dirty="0">
                 <a:solidFill>
-                  <a:srgbClr val="0B0F19"/>
-                </a:solidFill>
-                <a:latin typeface="Inter" pitchFamily="34" charset="0"/>
-                <a:ea typeface="Inter" pitchFamily="34" charset="-122"/>
-                <a:cs typeface="Inter" pitchFamily="34" charset="-120"/>
+                  <a:srgbClr val="14181A"/>
+                </a:solidFill>
+                <a:latin typeface="Public Sans" pitchFamily="34" charset="0"/>
+                <a:ea typeface="Public Sans" pitchFamily="34" charset="-122"/>
+                <a:cs typeface="Public Sans" pitchFamily="34" charset="-120"/>
               </a:rPr>
               <a:t>iPhone et iPad. </a:t>
             </a:r>
@@ -12070,11 +12036,11 @@
             <a:r>
               <a:rPr lang="en-US" sz="1150" dirty="0">
                 <a:solidFill>
-                  <a:srgbClr val="3D4556"/>
-                </a:solidFill>
-                <a:latin typeface="Inter" pitchFamily="34" charset="0"/>
-                <a:ea typeface="Inter" pitchFamily="34" charset="-122"/>
-                <a:cs typeface="Inter" pitchFamily="34" charset="-120"/>
+                  <a:srgbClr val="3A423F"/>
+                </a:solidFill>
+                <a:latin typeface="Public Sans" pitchFamily="34" charset="0"/>
+                <a:ea typeface="Public Sans" pitchFamily="34" charset="-122"/>
+                <a:cs typeface="Public Sans" pitchFamily="34" charset="-120"/>
               </a:rPr>
               <a:t>Depuis Apple Business Manager, « Apps et livres » : vous attribuez les licences, votre MDM distribue, l'installation est silencieuse. Si votre politique interdit les applications publiques, nous publions une application personnalisée réservée à votre organisation.</a:t>
             </a:r>
@@ -12093,11 +12059,11 @@
             <a:r>
               <a:rPr lang="en-US" sz="1150" b="1" dirty="0">
                 <a:solidFill>
-                  <a:srgbClr val="0B0F19"/>
-                </a:solidFill>
-                <a:latin typeface="Inter" pitchFamily="34" charset="0"/>
-                <a:ea typeface="Inter" pitchFamily="34" charset="-122"/>
-                <a:cs typeface="Inter" pitchFamily="34" charset="-120"/>
+                  <a:srgbClr val="14181A"/>
+                </a:solidFill>
+                <a:latin typeface="Public Sans" pitchFamily="34" charset="0"/>
+                <a:ea typeface="Public Sans" pitchFamily="34" charset="-122"/>
+                <a:cs typeface="Public Sans" pitchFamily="34" charset="-120"/>
               </a:rPr>
               <a:t>Android et terminaux durcis. </a:t>
             </a:r>
@@ -12113,13 +12079,13 @@
             <a:r>
               <a:rPr lang="en-US" sz="1150" dirty="0">
                 <a:solidFill>
-                  <a:srgbClr val="3D4556"/>
-                </a:solidFill>
-                <a:latin typeface="Inter" pitchFamily="34" charset="0"/>
-                <a:ea typeface="Inter" pitchFamily="34" charset="-122"/>
-                <a:cs typeface="Inter" pitchFamily="34" charset="-120"/>
-              </a:rPr>
-              <a:t>Par Managed Google Play, ou en chargeant l'APK que nous vous remettons comme application interne. Zebra, Honeywell et Datalogic fonctionnent ; le mode « application unique » est compatible.</a:t>
+                  <a:srgbClr val="3A423F"/>
+                </a:solidFill>
+                <a:latin typeface="Public Sans" pitchFamily="34" charset="0"/>
+                <a:ea typeface="Public Sans" pitchFamily="34" charset="-122"/>
+                <a:cs typeface="Public Sans" pitchFamily="34" charset="-120"/>
+              </a:rPr>
+              <a:t>Par Managed Google Play, ou en chargeant l'APK que nous vous remettons comme application interne. Le mode « application unique » est compatible. Nous n'avons pas éprouvé nous-mêmes les terminaux durcis du marché.</a:t>
             </a:r>
             <a:endParaRPr lang="en-US" sz="1150" dirty="0"/>
           </a:p>
@@ -12152,11 +12118,11 @@
             <a:r>
               <a:rPr lang="en-US" sz="900" dirty="0">
                 <a:solidFill>
-                  <a:srgbClr val="5B6475"/>
-                </a:solidFill>
-                <a:latin typeface="Inter" pitchFamily="34" charset="0"/>
-                <a:ea typeface="Inter" pitchFamily="34" charset="-122"/>
-                <a:cs typeface="Inter" pitchFamily="34" charset="-120"/>
+                  <a:srgbClr val="575F5C"/>
+                </a:solidFill>
+                <a:latin typeface="Public Sans" pitchFamily="34" charset="0"/>
+                <a:ea typeface="Public Sans" pitchFamily="34" charset="-122"/>
+                <a:cs typeface="Public Sans" pitchFamily="34" charset="-120"/>
               </a:rPr>
               <a:t>Quantinvo · dossier technique · septembre 2026</a:t>
             </a:r>
@@ -12191,11 +12157,11 @@
             <a:r>
               <a:rPr lang="en-US" sz="900" dirty="0">
                 <a:solidFill>
-                  <a:srgbClr val="5B6475"/>
-                </a:solidFill>
-                <a:latin typeface="Inter" pitchFamily="34" charset="0"/>
-                <a:ea typeface="Inter" pitchFamily="34" charset="-122"/>
-                <a:cs typeface="Inter" pitchFamily="34" charset="-120"/>
+                  <a:srgbClr val="575F5C"/>
+                </a:solidFill>
+                <a:latin typeface="Public Sans" pitchFamily="34" charset="0"/>
+                <a:ea typeface="Public Sans" pitchFamily="34" charset="-122"/>
+                <a:cs typeface="Public Sans" pitchFamily="34" charset="-120"/>
               </a:rPr>
               <a:t>6</a:t>
             </a:r>
@@ -12286,11 +12252,11 @@
             <a:r>
               <a:rPr lang="en-US" sz="1600" b="1" dirty="0">
                 <a:solidFill>
-                  <a:srgbClr val="0B0F19"/>
-                </a:solidFill>
-                <a:latin typeface="Sora" pitchFamily="34" charset="0"/>
-                <a:ea typeface="Sora" pitchFamily="34" charset="-122"/>
-                <a:cs typeface="Sora" pitchFamily="34" charset="-120"/>
+                  <a:srgbClr val="14181A"/>
+                </a:solidFill>
+                <a:latin typeface="Archivo" pitchFamily="34" charset="0"/>
+                <a:ea typeface="Archivo" pitchFamily="34" charset="-122"/>
+                <a:cs typeface="Archivo" pitchFamily="34" charset="-120"/>
               </a:rPr>
               <a:t>Quantinvo</a:t>
             </a:r>
@@ -12325,11 +12291,11 @@
             <a:r>
               <a:rPr lang="en-US" sz="1000" dirty="0">
                 <a:solidFill>
-                  <a:srgbClr val="5B6475"/>
-                </a:solidFill>
-                <a:latin typeface="Inter" pitchFamily="34" charset="0"/>
-                <a:ea typeface="Inter" pitchFamily="34" charset="-122"/>
-                <a:cs typeface="Inter" pitchFamily="34" charset="-120"/>
+                  <a:srgbClr val="575F5C"/>
+                </a:solidFill>
+                <a:latin typeface="Public Sans" pitchFamily="34" charset="0"/>
+                <a:ea typeface="Public Sans" pitchFamily="34" charset="-122"/>
+                <a:cs typeface="Public Sans" pitchFamily="34" charset="-120"/>
               </a:rPr>
               <a:t>Profil de restrictions</a:t>
             </a:r>
@@ -12346,17 +12312,17 @@
         <p:spPr>
           <a:xfrm>
             <a:off x="731520" y="877824"/>
-            <a:ext cx="10725912" cy="25603"/>
+            <a:ext cx="10725912" cy="10973"/>
           </a:xfrm>
           <a:prstGeom prst="rect">
             <a:avLst/>
           </a:prstGeom>
           <a:solidFill>
-            <a:srgbClr val="38C9FF"/>
+            <a:srgbClr val="E2E5E1"/>
           </a:solidFill>
           <a:ln w="12700">
             <a:solidFill>
-              <a:srgbClr val="38C9FF"/>
+              <a:srgbClr val="E2E5E1"/>
             </a:solidFill>
             <a:prstDash val="solid"/>
           </a:ln>
@@ -12392,11 +12358,11 @@
             <a:r>
               <a:rPr lang="en-US" sz="2600" b="1" dirty="0">
                 <a:solidFill>
-                  <a:srgbClr val="4636B0"/>
-                </a:solidFill>
-                <a:latin typeface="Sora" pitchFamily="34" charset="0"/>
-                <a:ea typeface="Sora" pitchFamily="34" charset="-122"/>
-                <a:cs typeface="Sora" pitchFamily="34" charset="-120"/>
+                  <a:srgbClr val="14181A"/>
+                </a:solidFill>
+                <a:latin typeface="Archivo" pitchFamily="34" charset="0"/>
+                <a:ea typeface="Archivo" pitchFamily="34" charset="-122"/>
+                <a:cs typeface="Archivo" pitchFamily="34" charset="-120"/>
               </a:rPr>
               <a:t>Quatre points à vérifier. Trois bloquent en silence.</a:t>
             </a:r>
@@ -12434,11 +12400,11 @@
             <a:r>
               <a:rPr lang="en-US" sz="1200" dirty="0">
                 <a:solidFill>
-                  <a:srgbClr val="3D4556"/>
-                </a:solidFill>
-                <a:latin typeface="Inter" pitchFamily="34" charset="0"/>
-                <a:ea typeface="Inter" pitchFamily="34" charset="-122"/>
-                <a:cs typeface="Inter" pitchFamily="34" charset="-120"/>
+                  <a:srgbClr val="3A423F"/>
+                </a:solidFill>
+                <a:latin typeface="Public Sans" pitchFamily="34" charset="0"/>
+                <a:ea typeface="Public Sans" pitchFamily="34" charset="-122"/>
+                <a:cs typeface="Public Sans" pitchFamily="34" charset="-120"/>
               </a:rPr>
               <a:t>Sans les trois premiers, l'application s'installe et ne sert à rien. Personne ne vous le dira : le compteur verra juste un écran noir, ou un téléphone qui ne synchronise pas.</a:t>
             </a:r>
@@ -12461,11 +12427,11 @@
             <a:avLst/>
           </a:prstGeom>
           <a:solidFill>
-            <a:srgbClr val="4636B0"/>
+            <a:srgbClr val="14181A"/>
           </a:solidFill>
           <a:ln>
             <a:solidFill>
-              <a:srgbClr val="4636B0"/>
+              <a:srgbClr val="14181A"/>
             </a:solidFill>
           </a:ln>
         </p:spPr>
@@ -12481,9 +12447,9 @@
                 <a:solidFill>
                   <a:srgbClr val="FFFFFF"/>
                 </a:solidFill>
-                <a:latin typeface="Sora" pitchFamily="34" charset="0"/>
-                <a:ea typeface="Sora" pitchFamily="34" charset="-122"/>
-                <a:cs typeface="Sora" pitchFamily="34" charset="-120"/>
+                <a:latin typeface="Archivo" pitchFamily="34" charset="0"/>
+                <a:ea typeface="Archivo" pitchFamily="34" charset="-122"/>
+                <a:cs typeface="Archivo" pitchFamily="34" charset="-120"/>
               </a:rPr>
               <a:t>1</a:t>
             </a:r>
@@ -12518,11 +12484,11 @@
             <a:r>
               <a:rPr lang="en-US" sz="1300" b="1" dirty="0">
                 <a:solidFill>
-                  <a:srgbClr val="0B0F19"/>
-                </a:solidFill>
-                <a:latin typeface="Sora" pitchFamily="34" charset="0"/>
-                <a:ea typeface="Sora" pitchFamily="34" charset="-122"/>
-                <a:cs typeface="Sora" pitchFamily="34" charset="-120"/>
+                  <a:srgbClr val="14181A"/>
+                </a:solidFill>
+                <a:latin typeface="Archivo" pitchFamily="34" charset="0"/>
+                <a:ea typeface="Archivo" pitchFamily="34" charset="-122"/>
+                <a:cs typeface="Archivo" pitchFamily="34" charset="-120"/>
               </a:rPr>
               <a:t>La caméra reste autorisée.</a:t>
             </a:r>
@@ -12560,11 +12526,11 @@
             <a:r>
               <a:rPr lang="en-US" sz="1150" dirty="0">
                 <a:solidFill>
-                  <a:srgbClr val="3D4556"/>
-                </a:solidFill>
-                <a:latin typeface="Inter" pitchFamily="34" charset="0"/>
-                <a:ea typeface="Inter" pitchFamily="34" charset="-122"/>
-                <a:cs typeface="Inter" pitchFamily="34" charset="-120"/>
+                  <a:srgbClr val="3A423F"/>
+                </a:solidFill>
+                <a:latin typeface="Public Sans" pitchFamily="34" charset="0"/>
+                <a:ea typeface="Public Sans" pitchFamily="34" charset="-122"/>
+                <a:cs typeface="Public Sans" pitchFamily="34" charset="-120"/>
               </a:rPr>
               <a:t>C'est le lecteur de codes-barres. Une restriction qui coupe l'appareil photo rend le comptage impossible. Les douchettes Bluetooth marchent aussi, en complément.</a:t>
             </a:r>
@@ -12587,11 +12553,11 @@
             <a:avLst/>
           </a:prstGeom>
           <a:solidFill>
-            <a:srgbClr val="4636B0"/>
+            <a:srgbClr val="14181A"/>
           </a:solidFill>
           <a:ln>
             <a:solidFill>
-              <a:srgbClr val="4636B0"/>
+              <a:srgbClr val="14181A"/>
             </a:solidFill>
           </a:ln>
         </p:spPr>
@@ -12607,9 +12573,9 @@
                 <a:solidFill>
                   <a:srgbClr val="FFFFFF"/>
                 </a:solidFill>
-                <a:latin typeface="Sora" pitchFamily="34" charset="0"/>
-                <a:ea typeface="Sora" pitchFamily="34" charset="-122"/>
-                <a:cs typeface="Sora" pitchFamily="34" charset="-120"/>
+                <a:latin typeface="Archivo" pitchFamily="34" charset="0"/>
+                <a:ea typeface="Archivo" pitchFamily="34" charset="-122"/>
+                <a:cs typeface="Archivo" pitchFamily="34" charset="-120"/>
               </a:rPr>
               <a:t>2</a:t>
             </a:r>
@@ -12644,11 +12610,11 @@
             <a:r>
               <a:rPr lang="en-US" sz="1300" b="1" dirty="0">
                 <a:solidFill>
-                  <a:srgbClr val="0B0F19"/>
-                </a:solidFill>
-                <a:latin typeface="Sora" pitchFamily="34" charset="0"/>
-                <a:ea typeface="Sora" pitchFamily="34" charset="-122"/>
-                <a:cs typeface="Sora" pitchFamily="34" charset="-120"/>
+                  <a:srgbClr val="14181A"/>
+                </a:solidFill>
+                <a:latin typeface="Archivo" pitchFamily="34" charset="0"/>
+                <a:ea typeface="Archivo" pitchFamily="34" charset="-122"/>
+                <a:cs typeface="Archivo" pitchFamily="34" charset="-120"/>
               </a:rPr>
               <a:t>Trois adresses joignables en HTTPS, port 443.</a:t>
             </a:r>
@@ -12686,11 +12652,11 @@
             <a:r>
               <a:rPr lang="en-US" sz="1150" dirty="0">
                 <a:solidFill>
-                  <a:srgbClr val="3D4556"/>
-                </a:solidFill>
-                <a:latin typeface="Inter" pitchFamily="34" charset="0"/>
-                <a:ea typeface="Inter" pitchFamily="34" charset="-122"/>
-                <a:cs typeface="Inter" pitchFamily="34" charset="-120"/>
+                  <a:srgbClr val="3A423F"/>
+                </a:solidFill>
+                <a:latin typeface="Public Sans" pitchFamily="34" charset="0"/>
+                <a:ea typeface="Public Sans" pitchFamily="34" charset="-122"/>
+                <a:cs typeface="Public Sans" pitchFamily="34" charset="-120"/>
               </a:rPr>
               <a:t>heabesqvlinzarqenymj.supabase.co (données, authentification, temps réel, WebSocket compris) · exp.host (jeton de notification, au premier lancement) · www.quantinvo.com (liens reçus par e-mail). APNs et FCM sont ouverts par défaut presque partout.</a:t>
             </a:r>
@@ -12713,11 +12679,11 @@
             <a:avLst/>
           </a:prstGeom>
           <a:solidFill>
-            <a:srgbClr val="4636B0"/>
+            <a:srgbClr val="14181A"/>
           </a:solidFill>
           <a:ln>
             <a:solidFill>
-              <a:srgbClr val="4636B0"/>
+              <a:srgbClr val="14181A"/>
             </a:solidFill>
           </a:ln>
         </p:spPr>
@@ -12733,9 +12699,9 @@
                 <a:solidFill>
                   <a:srgbClr val="FFFFFF"/>
                 </a:solidFill>
-                <a:latin typeface="Sora" pitchFamily="34" charset="0"/>
-                <a:ea typeface="Sora" pitchFamily="34" charset="-122"/>
-                <a:cs typeface="Sora" pitchFamily="34" charset="-120"/>
+                <a:latin typeface="Archivo" pitchFamily="34" charset="0"/>
+                <a:ea typeface="Archivo" pitchFamily="34" charset="-122"/>
+                <a:cs typeface="Archivo" pitchFamily="34" charset="-120"/>
               </a:rPr>
               <a:t>3</a:t>
             </a:r>
@@ -12770,11 +12736,11 @@
             <a:r>
               <a:rPr lang="en-US" sz="1300" b="1" dirty="0">
                 <a:solidFill>
-                  <a:srgbClr val="0B0F19"/>
-                </a:solidFill>
-                <a:latin typeface="Sora" pitchFamily="34" charset="0"/>
-                <a:ea typeface="Sora" pitchFamily="34" charset="-122"/>
-                <a:cs typeface="Sora" pitchFamily="34" charset="-120"/>
+                  <a:srgbClr val="14181A"/>
+                </a:solidFill>
+                <a:latin typeface="Archivo" pitchFamily="34" charset="0"/>
+                <a:ea typeface="Archivo" pitchFamily="34" charset="-122"/>
+                <a:cs typeface="Archivo" pitchFamily="34" charset="-120"/>
               </a:rPr>
               <a:t>Pas d'effacement à distance pendant un inventaire.</a:t>
             </a:r>
@@ -12812,11 +12778,11 @@
             <a:r>
               <a:rPr lang="en-US" sz="1150" dirty="0">
                 <a:solidFill>
-                  <a:srgbClr val="3D4556"/>
-                </a:solidFill>
-                <a:latin typeface="Inter" pitchFamily="34" charset="0"/>
-                <a:ea typeface="Inter" pitchFamily="34" charset="-122"/>
-                <a:cs typeface="Inter" pitchFamily="34" charset="-120"/>
+                  <a:srgbClr val="3A423F"/>
+                </a:solidFill>
+                <a:latin typeface="Public Sans" pitchFamily="34" charset="0"/>
+                <a:ea typeface="Public Sans" pitchFamily="34" charset="-122"/>
+                <a:cs typeface="Public Sans" pitchFamily="34" charset="-120"/>
               </a:rPr>
               <a:t>L'application fonctionne hors ligne : en réserve, en chambre froide, les comptages attendent sur l'appareil et partent au retour du réseau. Un effacement ou une désinstallation pendant cette fenêtre perd ce travail. C'est propre à Quantinvo, et c'est le point qu'on oublie.</a:t>
             </a:r>
@@ -12839,11 +12805,11 @@
             <a:avLst/>
           </a:prstGeom>
           <a:solidFill>
-            <a:srgbClr val="5B6475"/>
+            <a:srgbClr val="575F5C"/>
           </a:solidFill>
           <a:ln>
             <a:solidFill>
-              <a:srgbClr val="5B6475"/>
+              <a:srgbClr val="575F5C"/>
             </a:solidFill>
           </a:ln>
         </p:spPr>
@@ -12859,9 +12825,9 @@
                 <a:solidFill>
                   <a:srgbClr val="FFFFFF"/>
                 </a:solidFill>
-                <a:latin typeface="Sora" pitchFamily="34" charset="0"/>
-                <a:ea typeface="Sora" pitchFamily="34" charset="-122"/>
-                <a:cs typeface="Sora" pitchFamily="34" charset="-120"/>
+                <a:latin typeface="Archivo" pitchFamily="34" charset="0"/>
+                <a:ea typeface="Archivo" pitchFamily="34" charset="-122"/>
+                <a:cs typeface="Archivo" pitchFamily="34" charset="-120"/>
               </a:rPr>
               <a:t>4</a:t>
             </a:r>
@@ -12896,11 +12862,11 @@
             <a:r>
               <a:rPr lang="en-US" sz="1300" b="1" dirty="0">
                 <a:solidFill>
-                  <a:srgbClr val="0B0F19"/>
-                </a:solidFill>
-                <a:latin typeface="Sora" pitchFamily="34" charset="0"/>
-                <a:ea typeface="Sora" pitchFamily="34" charset="-122"/>
-                <a:cs typeface="Sora" pitchFamily="34" charset="-120"/>
+                  <a:srgbClr val="14181A"/>
+                </a:solidFill>
+                <a:latin typeface="Archivo" pitchFamily="34" charset="0"/>
+                <a:ea typeface="Archivo" pitchFamily="34" charset="-122"/>
+                <a:cs typeface="Archivo" pitchFamily="34" charset="-120"/>
               </a:rPr>
               <a:t>Les notifications, recommandées.</a:t>
             </a:r>
@@ -12938,11 +12904,11 @@
             <a:r>
               <a:rPr lang="en-US" sz="1150" dirty="0">
                 <a:solidFill>
-                  <a:srgbClr val="3D4556"/>
-                </a:solidFill>
-                <a:latin typeface="Inter" pitchFamily="34" charset="0"/>
-                <a:ea typeface="Inter" pitchFamily="34" charset="-122"/>
-                <a:cs typeface="Inter" pitchFamily="34" charset="-120"/>
+                  <a:srgbClr val="3A423F"/>
+                </a:solidFill>
+                <a:latin typeface="Public Sans" pitchFamily="34" charset="0"/>
+                <a:ea typeface="Public Sans" pitchFamily="34" charset="-122"/>
+                <a:cs typeface="Public Sans" pitchFamily="34" charset="-120"/>
               </a:rPr>
               <a:t>Elles servent à prévenir quelqu'un qu'il a été invité à un inventaire. Sans elles, tout fonctionne ; la personne ouvre simplement l'application pour voir.</a:t>
             </a:r>
@@ -12977,11 +12943,11 @@
             <a:r>
               <a:rPr lang="en-US" sz="900" dirty="0">
                 <a:solidFill>
-                  <a:srgbClr val="5B6475"/>
-                </a:solidFill>
-                <a:latin typeface="Inter" pitchFamily="34" charset="0"/>
-                <a:ea typeface="Inter" pitchFamily="34" charset="-122"/>
-                <a:cs typeface="Inter" pitchFamily="34" charset="-120"/>
+                  <a:srgbClr val="575F5C"/>
+                </a:solidFill>
+                <a:latin typeface="Public Sans" pitchFamily="34" charset="0"/>
+                <a:ea typeface="Public Sans" pitchFamily="34" charset="-122"/>
+                <a:cs typeface="Public Sans" pitchFamily="34" charset="-120"/>
               </a:rPr>
               <a:t>Quantinvo · dossier technique · septembre 2026</a:t>
             </a:r>
@@ -13016,11 +12982,11 @@
             <a:r>
               <a:rPr lang="en-US" sz="900" dirty="0">
                 <a:solidFill>
-                  <a:srgbClr val="5B6475"/>
-                </a:solidFill>
-                <a:latin typeface="Inter" pitchFamily="34" charset="0"/>
-                <a:ea typeface="Inter" pitchFamily="34" charset="-122"/>
-                <a:cs typeface="Inter" pitchFamily="34" charset="-120"/>
+                  <a:srgbClr val="575F5C"/>
+                </a:solidFill>
+                <a:latin typeface="Public Sans" pitchFamily="34" charset="0"/>
+                <a:ea typeface="Public Sans" pitchFamily="34" charset="-122"/>
+                <a:cs typeface="Public Sans" pitchFamily="34" charset="-120"/>
               </a:rPr>
               <a:t>7</a:t>
             </a:r>
@@ -13111,11 +13077,11 @@
             <a:r>
               <a:rPr lang="en-US" sz="1600" b="1" dirty="0">
                 <a:solidFill>
-                  <a:srgbClr val="0B0F19"/>
-                </a:solidFill>
-                <a:latin typeface="Sora" pitchFamily="34" charset="0"/>
-                <a:ea typeface="Sora" pitchFamily="34" charset="-122"/>
-                <a:cs typeface="Sora" pitchFamily="34" charset="-120"/>
+                  <a:srgbClr val="14181A"/>
+                </a:solidFill>
+                <a:latin typeface="Archivo" pitchFamily="34" charset="0"/>
+                <a:ea typeface="Archivo" pitchFamily="34" charset="-122"/>
+                <a:cs typeface="Archivo" pitchFamily="34" charset="-120"/>
               </a:rPr>
               <a:t>Quantinvo</a:t>
             </a:r>
@@ -13150,11 +13116,11 @@
             <a:r>
               <a:rPr lang="en-US" sz="1000" dirty="0">
                 <a:solidFill>
-                  <a:srgbClr val="5B6475"/>
-                </a:solidFill>
-                <a:latin typeface="Inter" pitchFamily="34" charset="0"/>
-                <a:ea typeface="Inter" pitchFamily="34" charset="-122"/>
-                <a:cs typeface="Inter" pitchFamily="34" charset="-120"/>
+                  <a:srgbClr val="575F5C"/>
+                </a:solidFill>
+                <a:latin typeface="Public Sans" pitchFamily="34" charset="0"/>
+                <a:ea typeface="Public Sans" pitchFamily="34" charset="-122"/>
+                <a:cs typeface="Public Sans" pitchFamily="34" charset="-120"/>
               </a:rPr>
               <a:t>La mise en place</a:t>
             </a:r>
@@ -13171,17 +13137,17 @@
         <p:spPr>
           <a:xfrm>
             <a:off x="731520" y="877824"/>
-            <a:ext cx="10725912" cy="25603"/>
+            <a:ext cx="10725912" cy="10973"/>
           </a:xfrm>
           <a:prstGeom prst="rect">
             <a:avLst/>
           </a:prstGeom>
           <a:solidFill>
-            <a:srgbClr val="38C9FF"/>
+            <a:srgbClr val="E2E5E1"/>
           </a:solidFill>
           <a:ln w="12700">
             <a:solidFill>
-              <a:srgbClr val="38C9FF"/>
+              <a:srgbClr val="E2E5E1"/>
             </a:solidFill>
             <a:prstDash val="solid"/>
           </a:ln>
@@ -13217,11 +13183,11 @@
             <a:r>
               <a:rPr lang="en-US" sz="2600" b="1" dirty="0">
                 <a:solidFill>
-                  <a:srgbClr val="4636B0"/>
-                </a:solidFill>
-                <a:latin typeface="Sora" pitchFamily="34" charset="0"/>
-                <a:ea typeface="Sora" pitchFamily="34" charset="-122"/>
-                <a:cs typeface="Sora" pitchFamily="34" charset="-120"/>
+                  <a:srgbClr val="14181A"/>
+                </a:solidFill>
+                <a:latin typeface="Archivo" pitchFamily="34" charset="0"/>
+                <a:ea typeface="Archivo" pitchFamily="34" charset="-122"/>
+                <a:cs typeface="Archivo" pitchFamily="34" charset="-120"/>
               </a:rPr>
               <a:t>De la signature au premier comptage</a:t>
             </a:r>
@@ -13246,7 +13212,7 @@
           <a:noFill/>
           <a:ln w="9525">
             <a:solidFill>
-              <a:srgbClr val="E3E6EE"/>
+              <a:srgbClr val="E2E5E1"/>
             </a:solidFill>
             <a:prstDash val="solid"/>
           </a:ln>
@@ -13267,11 +13233,11 @@
             <a:avLst/>
           </a:prstGeom>
           <a:solidFill>
-            <a:srgbClr val="4636B0"/>
+            <a:srgbClr val="1E4D3B"/>
           </a:solidFill>
           <a:ln>
             <a:solidFill>
-              <a:srgbClr val="4636B0"/>
+              <a:srgbClr val="1E4D3B"/>
             </a:solidFill>
           </a:ln>
         </p:spPr>
@@ -13287,9 +13253,9 @@
                 <a:solidFill>
                   <a:srgbClr val="FFFFFF"/>
                 </a:solidFill>
-                <a:latin typeface="Sora" pitchFamily="34" charset="0"/>
-                <a:ea typeface="Sora" pitchFamily="34" charset="-122"/>
-                <a:cs typeface="Sora" pitchFamily="34" charset="-120"/>
+                <a:latin typeface="Archivo" pitchFamily="34" charset="0"/>
+                <a:ea typeface="Archivo" pitchFamily="34" charset="-122"/>
+                <a:cs typeface="Archivo" pitchFamily="34" charset="-120"/>
               </a:rPr>
               <a:t>1</a:t>
             </a:r>
@@ -13324,11 +13290,11 @@
             <a:r>
               <a:rPr lang="en-US" sz="1600" b="1" dirty="0">
                 <a:solidFill>
-                  <a:srgbClr val="4636B0"/>
-                </a:solidFill>
-                <a:latin typeface="Sora" pitchFamily="34" charset="0"/>
-                <a:ea typeface="Sora" pitchFamily="34" charset="-122"/>
-                <a:cs typeface="Sora" pitchFamily="34" charset="-120"/>
+                  <a:srgbClr val="14181A"/>
+                </a:solidFill>
+                <a:latin typeface="Archivo" pitchFamily="34" charset="0"/>
+                <a:ea typeface="Archivo" pitchFamily="34" charset="-122"/>
+                <a:cs typeface="Archivo" pitchFamily="34" charset="-120"/>
               </a:rPr>
               <a:t>Les comptes</a:t>
             </a:r>
@@ -13366,11 +13332,11 @@
             <a:r>
               <a:rPr lang="en-US" sz="1150" dirty="0">
                 <a:solidFill>
-                  <a:srgbClr val="3D4556"/>
-                </a:solidFill>
-                <a:latin typeface="Inter" pitchFamily="34" charset="0"/>
-                <a:ea typeface="Inter" pitchFamily="34" charset="-122"/>
-                <a:cs typeface="Inter" pitchFamily="34" charset="-120"/>
+                  <a:srgbClr val="3A423F"/>
+                </a:solidFill>
+                <a:latin typeface="Public Sans" pitchFamily="34" charset="0"/>
+                <a:ea typeface="Public Sans" pitchFamily="34" charset="-122"/>
+                <a:cs typeface="Public Sans" pitchFamily="34" charset="-120"/>
               </a:rPr>
               <a:t>L'administrateur d'entreprise est créé à la souscription. Il invite ses superviseurs, qui invitent leurs compteurs : prénom, nom, adresse professionnelle. Chacun reçoit son lien et choisit son mot de passe.</a:t>
             </a:r>
@@ -13393,11 +13359,11 @@
             <a:avLst/>
           </a:prstGeom>
           <a:solidFill>
-            <a:srgbClr val="4636B0"/>
+            <a:srgbClr val="1E4D3B"/>
           </a:solidFill>
           <a:ln>
             <a:solidFill>
-              <a:srgbClr val="4636B0"/>
+              <a:srgbClr val="1E4D3B"/>
             </a:solidFill>
           </a:ln>
         </p:spPr>
@@ -13413,9 +13379,9 @@
                 <a:solidFill>
                   <a:srgbClr val="FFFFFF"/>
                 </a:solidFill>
-                <a:latin typeface="Sora" pitchFamily="34" charset="0"/>
-                <a:ea typeface="Sora" pitchFamily="34" charset="-122"/>
-                <a:cs typeface="Sora" pitchFamily="34" charset="-120"/>
+                <a:latin typeface="Archivo" pitchFamily="34" charset="0"/>
+                <a:ea typeface="Archivo" pitchFamily="34" charset="-122"/>
+                <a:cs typeface="Archivo" pitchFamily="34" charset="-120"/>
               </a:rPr>
               <a:t>2</a:t>
             </a:r>
@@ -13450,11 +13416,11 @@
             <a:r>
               <a:rPr lang="en-US" sz="1600" b="1" dirty="0">
                 <a:solidFill>
-                  <a:srgbClr val="4636B0"/>
-                </a:solidFill>
-                <a:latin typeface="Sora" pitchFamily="34" charset="0"/>
-                <a:ea typeface="Sora" pitchFamily="34" charset="-122"/>
-                <a:cs typeface="Sora" pitchFamily="34" charset="-120"/>
+                  <a:srgbClr val="14181A"/>
+                </a:solidFill>
+                <a:latin typeface="Archivo" pitchFamily="34" charset="0"/>
+                <a:ea typeface="Archivo" pitchFamily="34" charset="-122"/>
+                <a:cs typeface="Archivo" pitchFamily="34" charset="-120"/>
               </a:rPr>
               <a:t>L'application</a:t>
             </a:r>
@@ -13492,11 +13458,11 @@
             <a:r>
               <a:rPr lang="en-US" sz="1150" dirty="0">
                 <a:solidFill>
-                  <a:srgbClr val="3D4556"/>
-                </a:solidFill>
-                <a:latin typeface="Inter" pitchFamily="34" charset="0"/>
-                <a:ea typeface="Inter" pitchFamily="34" charset="-122"/>
-                <a:cs typeface="Inter" pitchFamily="34" charset="-120"/>
+                  <a:srgbClr val="3A423F"/>
+                </a:solidFill>
+                <a:latin typeface="Public Sans" pitchFamily="34" charset="0"/>
+                <a:ea typeface="Public Sans" pitchFamily="34" charset="-122"/>
+                <a:cs typeface="Public Sans" pitchFamily="34" charset="-120"/>
               </a:rPr>
               <a:t>Vous la poussez par votre catalogue, ou chacun l'installe depuis /open. Rien à configurer à l'ouverture : adresse e-mail et mot de passe.</a:t>
             </a:r>
@@ -13519,11 +13485,11 @@
             <a:avLst/>
           </a:prstGeom>
           <a:solidFill>
-            <a:srgbClr val="4636B0"/>
+            <a:srgbClr val="1E4D3B"/>
           </a:solidFill>
           <a:ln>
             <a:solidFill>
-              <a:srgbClr val="4636B0"/>
+              <a:srgbClr val="1E4D3B"/>
             </a:solidFill>
           </a:ln>
         </p:spPr>
@@ -13539,9 +13505,9 @@
                 <a:solidFill>
                   <a:srgbClr val="FFFFFF"/>
                 </a:solidFill>
-                <a:latin typeface="Sora" pitchFamily="34" charset="0"/>
-                <a:ea typeface="Sora" pitchFamily="34" charset="-122"/>
-                <a:cs typeface="Sora" pitchFamily="34" charset="-120"/>
+                <a:latin typeface="Archivo" pitchFamily="34" charset="0"/>
+                <a:ea typeface="Archivo" pitchFamily="34" charset="-122"/>
+                <a:cs typeface="Archivo" pitchFamily="34" charset="-120"/>
               </a:rPr>
               <a:t>3</a:t>
             </a:r>
@@ -13576,11 +13542,11 @@
             <a:r>
               <a:rPr lang="en-US" sz="1600" b="1" dirty="0">
                 <a:solidFill>
-                  <a:srgbClr val="4636B0"/>
-                </a:solidFill>
-                <a:latin typeface="Sora" pitchFamily="34" charset="0"/>
-                <a:ea typeface="Sora" pitchFamily="34" charset="-122"/>
-                <a:cs typeface="Sora" pitchFamily="34" charset="-120"/>
+                  <a:srgbClr val="14181A"/>
+                </a:solidFill>
+                <a:latin typeface="Archivo" pitchFamily="34" charset="0"/>
+                <a:ea typeface="Archivo" pitchFamily="34" charset="-122"/>
+                <a:cs typeface="Archivo" pitchFamily="34" charset="-120"/>
               </a:rPr>
               <a:t>Les fichiers</a:t>
             </a:r>
@@ -13618,11 +13584,11 @@
             <a:r>
               <a:rPr lang="en-US" sz="1150" dirty="0">
                 <a:solidFill>
-                  <a:srgbClr val="3D4556"/>
-                </a:solidFill>
-                <a:latin typeface="Inter" pitchFamily="34" charset="0"/>
-                <a:ea typeface="Inter" pitchFamily="34" charset="-122"/>
-                <a:cs typeface="Inter" pitchFamily="34" charset="-120"/>
+                  <a:srgbClr val="3A423F"/>
+                </a:solidFill>
+                <a:latin typeface="Public Sans" pitchFamily="34" charset="0"/>
+                <a:ea typeface="Public Sans" pitchFamily="34" charset="-122"/>
+                <a:cs typeface="Public Sans" pitchFamily="34" charset="-120"/>
               </a:rPr>
               <a:t>Le superviseur importe le référentiel articles et le stock théorique, en CSV ou Excel, tels qu'ils sortent de votre système. Les noms de colonnes usuels sont reconnus.</a:t>
             </a:r>
@@ -13645,11 +13611,11 @@
             <a:avLst/>
           </a:prstGeom>
           <a:solidFill>
-            <a:srgbClr val="4636B0"/>
+            <a:srgbClr val="1E4D3B"/>
           </a:solidFill>
           <a:ln>
             <a:solidFill>
-              <a:srgbClr val="4636B0"/>
+              <a:srgbClr val="1E4D3B"/>
             </a:solidFill>
           </a:ln>
         </p:spPr>
@@ -13665,9 +13631,9 @@
                 <a:solidFill>
                   <a:srgbClr val="FFFFFF"/>
                 </a:solidFill>
-                <a:latin typeface="Sora" pitchFamily="34" charset="0"/>
-                <a:ea typeface="Sora" pitchFamily="34" charset="-122"/>
-                <a:cs typeface="Sora" pitchFamily="34" charset="-120"/>
+                <a:latin typeface="Archivo" pitchFamily="34" charset="0"/>
+                <a:ea typeface="Archivo" pitchFamily="34" charset="-122"/>
+                <a:cs typeface="Archivo" pitchFamily="34" charset="-120"/>
               </a:rPr>
               <a:t>4</a:t>
             </a:r>
@@ -13702,11 +13668,11 @@
             <a:r>
               <a:rPr lang="en-US" sz="1600" b="1" dirty="0">
                 <a:solidFill>
-                  <a:srgbClr val="4636B0"/>
-                </a:solidFill>
-                <a:latin typeface="Sora" pitchFamily="34" charset="0"/>
-                <a:ea typeface="Sora" pitchFamily="34" charset="-122"/>
-                <a:cs typeface="Sora" pitchFamily="34" charset="-120"/>
+                  <a:srgbClr val="14181A"/>
+                </a:solidFill>
+                <a:latin typeface="Archivo" pitchFamily="34" charset="0"/>
+                <a:ea typeface="Archivo" pitchFamily="34" charset="-122"/>
+                <a:cs typeface="Archivo" pitchFamily="34" charset="-120"/>
               </a:rPr>
               <a:t>Les zones</a:t>
             </a:r>
@@ -13744,11 +13710,11 @@
             <a:r>
               <a:rPr lang="en-US" sz="1150" dirty="0">
                 <a:solidFill>
-                  <a:srgbClr val="3D4556"/>
-                </a:solidFill>
-                <a:latin typeface="Inter" pitchFamily="34" charset="0"/>
-                <a:ea typeface="Inter" pitchFamily="34" charset="-122"/>
-                <a:cs typeface="Inter" pitchFamily="34" charset="-120"/>
+                  <a:srgbClr val="3A423F"/>
+                </a:solidFill>
+                <a:latin typeface="Public Sans" pitchFamily="34" charset="0"/>
+                <a:ea typeface="Public Sans" pitchFamily="34" charset="-122"/>
+                <a:cs typeface="Public Sans" pitchFamily="34" charset="-120"/>
               </a:rPr>
               <a:t>Il imprime une planche de balises — des étiquettes numérotées en PDF —, les colle en rayon et affecte les plages aux emplacements.</a:t>
             </a:r>
@@ -13769,15 +13735,15 @@
           </a:xfrm>
           <a:prstGeom prst="roundRect">
             <a:avLst>
-              <a:gd name="adj" fmla="val 7619"/>
+              <a:gd name="adj" fmla="val 3810"/>
             </a:avLst>
           </a:prstGeom>
           <a:solidFill>
-            <a:srgbClr val="F4F5F9"/>
+            <a:srgbClr val="F2F3F1"/>
           </a:solidFill>
           <a:ln w="12700">
             <a:solidFill>
-              <a:srgbClr val="F4F5F9"/>
+              <a:srgbClr val="F2F3F1"/>
             </a:solidFill>
             <a:prstDash val="solid"/>
           </a:ln>
@@ -13810,11 +13776,11 @@
             <a:r>
               <a:rPr lang="en-US" sz="950" b="1" dirty="0">
                 <a:solidFill>
-                  <a:srgbClr val="5B6475"/>
-                </a:solidFill>
-                <a:latin typeface="Inter" pitchFamily="34" charset="0"/>
-                <a:ea typeface="Inter" pitchFamily="34" charset="-122"/>
-                <a:cs typeface="Inter" pitchFamily="34" charset="-120"/>
+                  <a:srgbClr val="575F5C"/>
+                </a:solidFill>
+                <a:latin typeface="Public Sans" pitchFamily="34" charset="0"/>
+                <a:ea typeface="Public Sans" pitchFamily="34" charset="-122"/>
+                <a:cs typeface="Public Sans" pitchFamily="34" charset="-120"/>
               </a:rPr>
               <a:t>Ce que ça vous coûte en temps</a:t>
             </a:r>
@@ -13852,11 +13818,11 @@
             <a:r>
               <a:rPr lang="en-US" sz="1150" i="1" dirty="0">
                 <a:solidFill>
-                  <a:srgbClr val="3D4556"/>
-                </a:solidFill>
-                <a:latin typeface="Inter" pitchFamily="34" charset="0"/>
-                <a:ea typeface="Inter" pitchFamily="34" charset="-122"/>
-                <a:cs typeface="Inter" pitchFamily="34" charset="-120"/>
+                  <a:srgbClr val="3A423F"/>
+                </a:solidFill>
+                <a:latin typeface="Public Sans" pitchFamily="34" charset="0"/>
+                <a:ea typeface="Public Sans" pitchFamily="34" charset="-122"/>
+                <a:cs typeface="Public Sans" pitchFamily="34" charset="-120"/>
               </a:rPr>
               <a:t>Une demi-journée pour un premier magasin, le plus long étant l'export de vos fichiers depuis votre système. Il n'y a ni serveur à provisionner, ni recette à organiser, ni fenêtre de bascule à réserver.</a:t>
             </a:r>
@@ -13891,11 +13857,11 @@
             <a:r>
               <a:rPr lang="en-US" sz="900" dirty="0">
                 <a:solidFill>
-                  <a:srgbClr val="5B6475"/>
-                </a:solidFill>
-                <a:latin typeface="Inter" pitchFamily="34" charset="0"/>
-                <a:ea typeface="Inter" pitchFamily="34" charset="-122"/>
-                <a:cs typeface="Inter" pitchFamily="34" charset="-120"/>
+                  <a:srgbClr val="575F5C"/>
+                </a:solidFill>
+                <a:latin typeface="Public Sans" pitchFamily="34" charset="0"/>
+                <a:ea typeface="Public Sans" pitchFamily="34" charset="-122"/>
+                <a:cs typeface="Public Sans" pitchFamily="34" charset="-120"/>
               </a:rPr>
               <a:t>Quantinvo · dossier technique · septembre 2026</a:t>
             </a:r>
@@ -13930,11 +13896,11 @@
             <a:r>
               <a:rPr lang="en-US" sz="900" dirty="0">
                 <a:solidFill>
-                  <a:srgbClr val="5B6475"/>
-                </a:solidFill>
-                <a:latin typeface="Inter" pitchFamily="34" charset="0"/>
-                <a:ea typeface="Inter" pitchFamily="34" charset="-122"/>
-                <a:cs typeface="Inter" pitchFamily="34" charset="-120"/>
+                  <a:srgbClr val="575F5C"/>
+                </a:solidFill>
+                <a:latin typeface="Public Sans" pitchFamily="34" charset="0"/>
+                <a:ea typeface="Public Sans" pitchFamily="34" charset="-122"/>
+                <a:cs typeface="Public Sans" pitchFamily="34" charset="-120"/>
               </a:rPr>
               <a:t>8</a:t>
             </a:r>
@@ -14025,11 +13991,11 @@
             <a:r>
               <a:rPr lang="en-US" sz="1600" b="1" dirty="0">
                 <a:solidFill>
-                  <a:srgbClr val="0B0F19"/>
-                </a:solidFill>
-                <a:latin typeface="Sora" pitchFamily="34" charset="0"/>
-                <a:ea typeface="Sora" pitchFamily="34" charset="-122"/>
-                <a:cs typeface="Sora" pitchFamily="34" charset="-120"/>
+                  <a:srgbClr val="14181A"/>
+                </a:solidFill>
+                <a:latin typeface="Archivo" pitchFamily="34" charset="0"/>
+                <a:ea typeface="Archivo" pitchFamily="34" charset="-122"/>
+                <a:cs typeface="Archivo" pitchFamily="34" charset="-120"/>
               </a:rPr>
               <a:t>Quantinvo</a:t>
             </a:r>
@@ -14064,11 +14030,11 @@
             <a:r>
               <a:rPr lang="en-US" sz="1000" dirty="0">
                 <a:solidFill>
-                  <a:srgbClr val="5B6475"/>
-                </a:solidFill>
-                <a:latin typeface="Inter" pitchFamily="34" charset="0"/>
-                <a:ea typeface="Inter" pitchFamily="34" charset="-122"/>
-                <a:cs typeface="Inter" pitchFamily="34" charset="-120"/>
+                  <a:srgbClr val="575F5C"/>
+                </a:solidFill>
+                <a:latin typeface="Public Sans" pitchFamily="34" charset="0"/>
+                <a:ea typeface="Public Sans" pitchFamily="34" charset="-122"/>
+                <a:cs typeface="Public Sans" pitchFamily="34" charset="-120"/>
               </a:rPr>
               <a:t>La préparation</a:t>
             </a:r>
@@ -14085,17 +14051,17 @@
         <p:spPr>
           <a:xfrm>
             <a:off x="731520" y="877824"/>
-            <a:ext cx="10725912" cy="25603"/>
+            <a:ext cx="10725912" cy="10973"/>
           </a:xfrm>
           <a:prstGeom prst="rect">
             <a:avLst/>
           </a:prstGeom>
           <a:solidFill>
-            <a:srgbClr val="38C9FF"/>
+            <a:srgbClr val="E2E5E1"/>
           </a:solidFill>
           <a:ln w="12700">
             <a:solidFill>
-              <a:srgbClr val="38C9FF"/>
+              <a:srgbClr val="E2E5E1"/>
             </a:solidFill>
             <a:prstDash val="solid"/>
           </a:ln>
@@ -14131,11 +14097,11 @@
             <a:r>
               <a:rPr lang="en-US" sz="2400" b="1" dirty="0">
                 <a:solidFill>
-                  <a:srgbClr val="4636B0"/>
-                </a:solidFill>
-                <a:latin typeface="Sora" pitchFamily="34" charset="0"/>
-                <a:ea typeface="Sora" pitchFamily="34" charset="-122"/>
-                <a:cs typeface="Sora" pitchFamily="34" charset="-120"/>
+                  <a:srgbClr val="14181A"/>
+                </a:solidFill>
+                <a:latin typeface="Archivo" pitchFamily="34" charset="0"/>
+                <a:ea typeface="Archivo" pitchFamily="34" charset="-122"/>
+                <a:cs typeface="Archivo" pitchFamily="34" charset="-120"/>
               </a:rPr>
               <a:t>Tout se prépare depuis le navigateur.</a:t>
             </a:r>
@@ -14176,11 +14142,11 @@
             <a:r>
               <a:rPr lang="en-US" sz="1200" b="1" dirty="0">
                 <a:solidFill>
-                  <a:srgbClr val="0B0F19"/>
-                </a:solidFill>
-                <a:latin typeface="Inter" pitchFamily="34" charset="0"/>
-                <a:ea typeface="Inter" pitchFamily="34" charset="-122"/>
-                <a:cs typeface="Inter" pitchFamily="34" charset="-120"/>
+                  <a:srgbClr val="14181A"/>
+                </a:solidFill>
+                <a:latin typeface="Public Sans" pitchFamily="34" charset="0"/>
+                <a:ea typeface="Public Sans" pitchFamily="34" charset="-122"/>
+                <a:cs typeface="Public Sans" pitchFamily="34" charset="-120"/>
               </a:rPr>
               <a:t>Aucune installation sur les postes. </a:t>
             </a:r>
@@ -14196,11 +14162,11 @@
             <a:r>
               <a:rPr lang="en-US" sz="1200" dirty="0">
                 <a:solidFill>
-                  <a:srgbClr val="3D4556"/>
-                </a:solidFill>
-                <a:latin typeface="Inter" pitchFamily="34" charset="0"/>
-                <a:ea typeface="Inter" pitchFamily="34" charset="-122"/>
-                <a:cs typeface="Inter" pitchFamily="34" charset="-120"/>
+                  <a:srgbClr val="3A423F"/>
+                </a:solidFill>
+                <a:latin typeface="Public Sans" pitchFamily="34" charset="0"/>
+                <a:ea typeface="Public Sans" pitchFamily="34" charset="-122"/>
+                <a:cs typeface="Public Sans" pitchFamily="34" charset="-120"/>
               </a:rPr>
               <a:t>Le superviseur travaille sur www.quantinvo.com, dans le navigateur qu'il a déjà. Rien à déployer, rien à mettre à jour, rien à ouvrir sur le poste.</a:t>
             </a:r>
@@ -14219,11 +14185,11 @@
             <a:r>
               <a:rPr lang="en-US" sz="1200" b="1" dirty="0">
                 <a:solidFill>
-                  <a:srgbClr val="0B0F19"/>
-                </a:solidFill>
-                <a:latin typeface="Inter" pitchFamily="34" charset="0"/>
-                <a:ea typeface="Inter" pitchFamily="34" charset="-122"/>
-                <a:cs typeface="Inter" pitchFamily="34" charset="-120"/>
+                  <a:srgbClr val="14181A"/>
+                </a:solidFill>
+                <a:latin typeface="Public Sans" pitchFamily="34" charset="0"/>
+                <a:ea typeface="Public Sans" pitchFamily="34" charset="-122"/>
+                <a:cs typeface="Public Sans" pitchFamily="34" charset="-120"/>
               </a:rPr>
               <a:t>Deux fichiers, et c’est prêt. </a:t>
             </a:r>
@@ -14239,11 +14205,11 @@
             <a:r>
               <a:rPr lang="en-US" sz="1200" dirty="0">
                 <a:solidFill>
-                  <a:srgbClr val="3D4556"/>
-                </a:solidFill>
-                <a:latin typeface="Inter" pitchFamily="34" charset="0"/>
-                <a:ea typeface="Inter" pitchFamily="34" charset="-122"/>
-                <a:cs typeface="Inter" pitchFamily="34" charset="-120"/>
+                  <a:srgbClr val="3A423F"/>
+                </a:solidFill>
+                <a:latin typeface="Public Sans" pitchFamily="34" charset="0"/>
+                <a:ea typeface="Public Sans" pitchFamily="34" charset="-122"/>
+                <a:cs typeface="Public Sans" pitchFamily="34" charset="-120"/>
               </a:rPr>
               <a:t>Le référentiel articles donne les libellés et les prix d'achat ; le stock théorique donne l'attendu. L'écran indique ce qui manque encore avant de pouvoir commencer.</a:t>
             </a:r>
@@ -14262,11 +14228,11 @@
             <a:r>
               <a:rPr lang="en-US" sz="1200" b="1" dirty="0">
                 <a:solidFill>
-                  <a:srgbClr val="0B0F19"/>
-                </a:solidFill>
-                <a:latin typeface="Inter" pitchFamily="34" charset="0"/>
-                <a:ea typeface="Inter" pitchFamily="34" charset="-122"/>
-                <a:cs typeface="Inter" pitchFamily="34" charset="-120"/>
+                  <a:srgbClr val="14181A"/>
+                </a:solidFill>
+                <a:latin typeface="Public Sans" pitchFamily="34" charset="0"/>
+                <a:ea typeface="Public Sans" pitchFamily="34" charset="-122"/>
+                <a:cs typeface="Public Sans" pitchFamily="34" charset="-120"/>
               </a:rPr>
               <a:t>Les balises sortent en PDF. </a:t>
             </a:r>
@@ -14282,11 +14248,11 @@
             <a:r>
               <a:rPr lang="en-US" sz="1200" dirty="0">
                 <a:solidFill>
-                  <a:srgbClr val="3D4556"/>
-                </a:solidFill>
-                <a:latin typeface="Inter" pitchFamily="34" charset="0"/>
-                <a:ea typeface="Inter" pitchFamily="34" charset="-122"/>
-                <a:cs typeface="Inter" pitchFamily="34" charset="-120"/>
+                  <a:srgbClr val="3A423F"/>
+                </a:solidFill>
+                <a:latin typeface="Public Sans" pitchFamily="34" charset="0"/>
+                <a:ea typeface="Public Sans" pitchFamily="34" charset="-122"/>
+                <a:cs typeface="Public Sans" pitchFamily="34" charset="-120"/>
               </a:rPr>
               <a:t>Une planche d'étiquettes numérotées, imprimée sur des feuilles autocollantes du commerce. Aucun consommable spécifique.</a:t>
             </a:r>
@@ -14307,7 +14273,7 @@
           </a:xfrm>
           <a:prstGeom prst="roundRect">
             <a:avLst>
-              <a:gd name="adj" fmla="val 1825"/>
+              <a:gd name="adj" fmla="val 912"/>
             </a:avLst>
           </a:prstGeom>
           <a:solidFill>
@@ -14315,7 +14281,7 @@
           </a:solidFill>
           <a:ln w="12700">
             <a:solidFill>
-              <a:srgbClr val="E3E6EE"/>
+              <a:srgbClr val="E2E5E1"/>
             </a:solidFill>
             <a:prstDash val="solid"/>
           </a:ln>
@@ -14372,11 +14338,11 @@
             <a:r>
               <a:rPr lang="en-US" sz="1000" i="1" dirty="0">
                 <a:solidFill>
-                  <a:srgbClr val="5B6475"/>
-                </a:solidFill>
-                <a:latin typeface="Inter" pitchFamily="34" charset="0"/>
-                <a:ea typeface="Inter" pitchFamily="34" charset="-122"/>
-                <a:cs typeface="Inter" pitchFamily="34" charset="-120"/>
+                  <a:srgbClr val="575F5C"/>
+                </a:solidFill>
+                <a:latin typeface="Public Sans" pitchFamily="34" charset="0"/>
+                <a:ea typeface="Public Sans" pitchFamily="34" charset="-122"/>
+                <a:cs typeface="Public Sans" pitchFamily="34" charset="-120"/>
               </a:rPr>
               <a:t>Onglet Set up, données d’essai.</a:t>
             </a:r>
@@ -14411,11 +14377,11 @@
             <a:r>
               <a:rPr lang="en-US" sz="900" dirty="0">
                 <a:solidFill>
-                  <a:srgbClr val="5B6475"/>
-                </a:solidFill>
-                <a:latin typeface="Inter" pitchFamily="34" charset="0"/>
-                <a:ea typeface="Inter" pitchFamily="34" charset="-122"/>
-                <a:cs typeface="Inter" pitchFamily="34" charset="-120"/>
+                  <a:srgbClr val="575F5C"/>
+                </a:solidFill>
+                <a:latin typeface="Public Sans" pitchFamily="34" charset="0"/>
+                <a:ea typeface="Public Sans" pitchFamily="34" charset="-122"/>
+                <a:cs typeface="Public Sans" pitchFamily="34" charset="-120"/>
               </a:rPr>
               <a:t>Quantinvo · dossier technique · septembre 2026</a:t>
             </a:r>
@@ -14450,11 +14416,11 @@
             <a:r>
               <a:rPr lang="en-US" sz="900" dirty="0">
                 <a:solidFill>
-                  <a:srgbClr val="5B6475"/>
-                </a:solidFill>
-                <a:latin typeface="Inter" pitchFamily="34" charset="0"/>
-                <a:ea typeface="Inter" pitchFamily="34" charset="-122"/>
-                <a:cs typeface="Inter" pitchFamily="34" charset="-120"/>
+                  <a:srgbClr val="575F5C"/>
+                </a:solidFill>
+                <a:latin typeface="Public Sans" pitchFamily="34" charset="0"/>
+                <a:ea typeface="Public Sans" pitchFamily="34" charset="-122"/>
+                <a:cs typeface="Public Sans" pitchFamily="34" charset="-120"/>
               </a:rPr>
               <a:t>9</a:t>
             </a:r>
